--- a/presentations/Day 4 - Classification Data Preparation and Unsupervised Learning/3_data_preparation_feature_engineering.pptx
+++ b/presentations/Day 4 - Classification Data Preparation and Unsupervised Learning/3_data_preparation_feature_engineering.pptx
@@ -5,7 +5,7 @@
     <p:sldMasterId id="2147483648" r:id="rId1"/>
   </p:sldMasterIdLst>
   <p:notesMasterIdLst>
-    <p:notesMasterId r:id="rId17"/>
+    <p:notesMasterId r:id="rId15"/>
   </p:notesMasterIdLst>
   <p:sldIdLst>
     <p:sldId id="256" r:id="rId2"/>
@@ -17,12 +17,10 @@
     <p:sldId id="263" r:id="rId8"/>
     <p:sldId id="264" r:id="rId9"/>
     <p:sldId id="265" r:id="rId10"/>
-    <p:sldId id="266" r:id="rId11"/>
-    <p:sldId id="267" r:id="rId12"/>
-    <p:sldId id="268" r:id="rId13"/>
-    <p:sldId id="269" r:id="rId14"/>
-    <p:sldId id="270" r:id="rId15"/>
-    <p:sldId id="271" r:id="rId16"/>
+    <p:sldId id="267" r:id="rId11"/>
+    <p:sldId id="268" r:id="rId12"/>
+    <p:sldId id="269" r:id="rId13"/>
+    <p:sldId id="271" r:id="rId14"/>
   </p:sldIdLst>
   <p:sldSz cx="12192000" cy="6858000"/>
   <p:notesSz cx="6858000" cy="12192000"/>
@@ -671,174 +669,6 @@
 </p:notes>
 </file>
 
-<file path=ppt/notesSlides/notesSlide14.xml><?xml version="1.0" encoding="utf-8"?>
-<p:notes xmlns:a="http://schemas.openxmlformats.org/drawingml/2006/main" xmlns:r="http://schemas.openxmlformats.org/officeDocument/2006/relationships" xmlns:p="http://schemas.openxmlformats.org/presentationml/2006/main">
-  <p:cSld>
-    <p:spTree>
-      <p:nvGrpSpPr>
-        <p:cNvPr id="1" name=""/>
-        <p:cNvGrpSpPr/>
-        <p:nvPr/>
-      </p:nvGrpSpPr>
-      <p:grpSpPr>
-        <a:xfrm>
-          <a:off x="0" y="0"/>
-          <a:ext cx="0" cy="0"/>
-          <a:chOff x="0" y="0"/>
-          <a:chExt cx="0" cy="0"/>
-        </a:xfrm>
-      </p:grpSpPr>
-      <p:sp>
-        <p:nvSpPr>
-          <p:cNvPr id="2" name="Slide Image Placeholder 1"/>
-          <p:cNvSpPr>
-            <a:spLocks noGrp="1" noRot="1" noChangeAspect="1"/>
-          </p:cNvSpPr>
-          <p:nvPr>
-            <p:ph type="sldImg"/>
-          </p:nvPr>
-        </p:nvSpPr>
-        <p:spPr/>
-      </p:sp>
-      <p:sp>
-        <p:nvSpPr>
-          <p:cNvPr id="3" name="Notes Placeholder 2"/>
-          <p:cNvSpPr>
-            <a:spLocks noGrp="1"/>
-          </p:cNvSpPr>
-          <p:nvPr>
-            <p:ph type="body" idx="1"/>
-          </p:nvPr>
-        </p:nvSpPr>
-        <p:spPr/>
-        <p:txBody>
-          <a:bodyPr/>
-          <a:lstStyle/>
-          <a:p>
-            <a:endParaRPr lang="en-US" dirty="0"/>
-          </a:p>
-        </p:txBody>
-      </p:sp>
-      <p:sp>
-        <p:nvSpPr>
-          <p:cNvPr id="4" name="Slide Number Placeholder 3"/>
-          <p:cNvSpPr>
-            <a:spLocks noGrp="1"/>
-          </p:cNvSpPr>
-          <p:nvPr>
-            <p:ph type="sldNum" sz="quarter" idx="10"/>
-          </p:nvPr>
-        </p:nvSpPr>
-        <p:spPr/>
-        <p:txBody>
-          <a:bodyPr/>
-          <a:lstStyle/>
-          <a:p>
-            <a:fld id="{F7021451-1387-4CA6-816F-3879F97B5CBC}" type="slidenum">
-              <a:rPr lang="en-US"/>
-              <a:t>14</a:t>
-            </a:fld>
-            <a:endParaRPr lang="en-US"/>
-          </a:p>
-        </p:txBody>
-      </p:sp>
-    </p:spTree>
-    <p:extLst>
-      <p:ext uri="{BB962C8B-B14F-4D97-AF65-F5344CB8AC3E}">
-        <p14:creationId xmlns:p14="http://schemas.microsoft.com/office/powerpoint/2010/main" val="1024086991"/>
-      </p:ext>
-    </p:extLst>
-  </p:cSld>
-  <p:clrMapOvr>
-    <a:masterClrMapping/>
-  </p:clrMapOvr>
-</p:notes>
-</file>
-
-<file path=ppt/notesSlides/notesSlide15.xml><?xml version="1.0" encoding="utf-8"?>
-<p:notes xmlns:a="http://schemas.openxmlformats.org/drawingml/2006/main" xmlns:r="http://schemas.openxmlformats.org/officeDocument/2006/relationships" xmlns:p="http://schemas.openxmlformats.org/presentationml/2006/main">
-  <p:cSld>
-    <p:spTree>
-      <p:nvGrpSpPr>
-        <p:cNvPr id="1" name=""/>
-        <p:cNvGrpSpPr/>
-        <p:nvPr/>
-      </p:nvGrpSpPr>
-      <p:grpSpPr>
-        <a:xfrm>
-          <a:off x="0" y="0"/>
-          <a:ext cx="0" cy="0"/>
-          <a:chOff x="0" y="0"/>
-          <a:chExt cx="0" cy="0"/>
-        </a:xfrm>
-      </p:grpSpPr>
-      <p:sp>
-        <p:nvSpPr>
-          <p:cNvPr id="2" name="Slide Image Placeholder 1"/>
-          <p:cNvSpPr>
-            <a:spLocks noGrp="1" noRot="1" noChangeAspect="1"/>
-          </p:cNvSpPr>
-          <p:nvPr>
-            <p:ph type="sldImg"/>
-          </p:nvPr>
-        </p:nvSpPr>
-        <p:spPr/>
-      </p:sp>
-      <p:sp>
-        <p:nvSpPr>
-          <p:cNvPr id="3" name="Notes Placeholder 2"/>
-          <p:cNvSpPr>
-            <a:spLocks noGrp="1"/>
-          </p:cNvSpPr>
-          <p:nvPr>
-            <p:ph type="body" idx="1"/>
-          </p:nvPr>
-        </p:nvSpPr>
-        <p:spPr/>
-        <p:txBody>
-          <a:bodyPr/>
-          <a:lstStyle/>
-          <a:p>
-            <a:endParaRPr lang="en-US" dirty="0"/>
-          </a:p>
-        </p:txBody>
-      </p:sp>
-      <p:sp>
-        <p:nvSpPr>
-          <p:cNvPr id="4" name="Slide Number Placeholder 3"/>
-          <p:cNvSpPr>
-            <a:spLocks noGrp="1"/>
-          </p:cNvSpPr>
-          <p:nvPr>
-            <p:ph type="sldNum" sz="quarter" idx="10"/>
-          </p:nvPr>
-        </p:nvSpPr>
-        <p:spPr/>
-        <p:txBody>
-          <a:bodyPr/>
-          <a:lstStyle/>
-          <a:p>
-            <a:fld id="{F7021451-1387-4CA6-816F-3879F97B5CBC}" type="slidenum">
-              <a:rPr lang="en-US"/>
-              <a:t>15</a:t>
-            </a:fld>
-            <a:endParaRPr lang="en-US"/>
-          </a:p>
-        </p:txBody>
-      </p:sp>
-    </p:spTree>
-    <p:extLst>
-      <p:ext uri="{BB962C8B-B14F-4D97-AF65-F5344CB8AC3E}">
-        <p14:creationId xmlns:p14="http://schemas.microsoft.com/office/powerpoint/2010/main" val="1024086991"/>
-      </p:ext>
-    </p:extLst>
-  </p:cSld>
-  <p:clrMapOvr>
-    <a:masterClrMapping/>
-  </p:clrMapOvr>
-</p:notes>
-</file>
-
 <file path=ppt/notesSlides/notesSlide2.xml><?xml version="1.0" encoding="utf-8"?>
 <p:notes xmlns:a="http://schemas.openxmlformats.org/drawingml/2006/main" xmlns:r="http://schemas.openxmlformats.org/officeDocument/2006/relationships" xmlns:p="http://schemas.openxmlformats.org/presentationml/2006/main">
   <p:cSld>
@@ -1533,6 +1363,36 @@
           <a:chExt cx="0" cy="0"/>
         </a:xfrm>
       </p:grpSpPr>
+      <p:pic>
+        <p:nvPicPr>
+          <p:cNvPr id="3" name="Picture 2" descr="NC State Engineering -- ANS / Conferences / 2021 Student Conference">
+            <a:extLst>
+              <a:ext uri="{FF2B5EF4-FFF2-40B4-BE49-F238E27FC236}">
+                <a16:creationId xmlns:a16="http://schemas.microsoft.com/office/drawing/2014/main" id="{4AF56A47-229E-DE68-B4D3-7BB9DC35A51F}"/>
+              </a:ext>
+            </a:extLst>
+          </p:cNvPr>
+          <p:cNvPicPr>
+            <a:picLocks noChangeAspect="1"/>
+          </p:cNvPicPr>
+          <p:nvPr userDrawn="1"/>
+        </p:nvPicPr>
+        <p:blipFill>
+          <a:blip r:embed="rId2"/>
+          <a:stretch>
+            <a:fillRect/>
+          </a:stretch>
+        </p:blipFill>
+        <p:spPr>
+          <a:xfrm>
+            <a:off x="9246111" y="118169"/>
+            <a:ext cx="1551223" cy="432403"/>
+          </a:xfrm>
+          <a:prstGeom prst="rect">
+            <a:avLst/>
+          </a:prstGeom>
+        </p:spPr>
+      </p:pic>
     </p:spTree>
   </p:cSld>
   <p:clrMapOvr>
@@ -1873,14 +1733,14 @@
               <a:buNone/>
             </a:pPr>
             <a:r>
-              <a:rPr lang="en-US" sz="650" b="1" dirty="0">
+              <a:rPr lang="en-US" sz="1200" b="1" dirty="0">
                 <a:solidFill>
                   <a:srgbClr val="CC0000"/>
                 </a:solidFill>
               </a:rPr>
               <a:t>SESSION 3</a:t>
             </a:r>
-            <a:endParaRPr lang="en-US" sz="650" dirty="0"/>
+            <a:endParaRPr lang="en-US" sz="1200" dirty="0"/>
           </a:p>
         </p:txBody>
       </p:sp>
@@ -1975,14 +1835,14 @@
               <a:buNone/>
             </a:pPr>
             <a:r>
-              <a:rPr lang="en-US" sz="850" dirty="0">
+              <a:rPr lang="en-US" sz="1200" dirty="0">
                 <a:solidFill>
                   <a:srgbClr val="444444"/>
                 </a:solidFill>
               </a:rPr>
               <a:t>Missing data • Outliers • Scaling • Encoding • Leakage • Domain features</a:t>
             </a:r>
-            <a:endParaRPr lang="en-US" sz="850" dirty="0"/>
+            <a:endParaRPr lang="en-US" sz="1200" dirty="0"/>
           </a:p>
         </p:txBody>
       </p:sp>
@@ -2011,28 +1871,28 @@
               <a:buNone/>
             </a:pPr>
             <a:r>
-              <a:rPr lang="en-US" sz="800" dirty="0">
+              <a:rPr lang="en-US" sz="1100" dirty="0">
                 <a:solidFill>
                   <a:srgbClr val="555555"/>
                 </a:solidFill>
               </a:rPr>
               <a:t>Applied AI Design Workshop for Faculty</a:t>
             </a:r>
-            <a:endParaRPr lang="en-US" sz="800" dirty="0"/>
-          </a:p>
-          <a:p>
-            <a:pPr marL="0" indent="0">
-              <a:buNone/>
-            </a:pPr>
-            <a:r>
-              <a:rPr lang="en-US" sz="800" dirty="0">
+            <a:endParaRPr lang="en-US" sz="1100" dirty="0"/>
+          </a:p>
+          <a:p>
+            <a:pPr marL="0" indent="0">
+              <a:buNone/>
+            </a:pPr>
+            <a:r>
+              <a:rPr lang="en-US" sz="1100" dirty="0">
                 <a:solidFill>
                   <a:srgbClr val="555555"/>
                 </a:solidFill>
               </a:rPr>
               <a:t>Fred Livingston (fjliving@ncsu.edu) 2026</a:t>
             </a:r>
-            <a:endParaRPr lang="en-US" sz="800" dirty="0"/>
+            <a:endParaRPr lang="en-US" sz="1100" dirty="0"/>
           </a:p>
         </p:txBody>
       </p:sp>
@@ -2127,14 +1987,14 @@
               <a:buNone/>
             </a:pPr>
             <a:r>
-              <a:rPr lang="en-US" sz="950" b="1" dirty="0">
+              <a:rPr lang="en-US" sz="1200" b="1" dirty="0">
                 <a:solidFill>
                   <a:srgbClr val="CC0000"/>
                 </a:solidFill>
               </a:rPr>
               <a:t>Goal</a:t>
             </a:r>
-            <a:endParaRPr lang="en-US" sz="950" dirty="0"/>
+            <a:endParaRPr lang="en-US" sz="1200" dirty="0"/>
           </a:p>
         </p:txBody>
       </p:sp>
@@ -2165,14 +2025,14 @@
               <a:buNone/>
             </a:pPr>
             <a:r>
-              <a:rPr lang="en-US" sz="860" dirty="0">
+              <a:rPr lang="en-US" sz="1200" dirty="0">
                 <a:solidFill>
                   <a:srgbClr val="111111"/>
                 </a:solidFill>
               </a:rPr>
               <a:t>turn raw disciplinary data into a trustworthy modeling table.</a:t>
             </a:r>
-            <a:endParaRPr lang="en-US" sz="860" dirty="0"/>
+            <a:endParaRPr lang="en-US" sz="1200" dirty="0"/>
           </a:p>
         </p:txBody>
       </p:sp>
@@ -2237,14 +2097,14 @@
               <a:buNone/>
             </a:pPr>
             <a:r>
-              <a:rPr lang="en-US" sz="950" b="1" dirty="0">
+              <a:rPr lang="en-US" sz="1200" b="1" dirty="0">
                 <a:solidFill>
                   <a:srgbClr val="CC0000"/>
                 </a:solidFill>
               </a:rPr>
               <a:t>Session outputs</a:t>
             </a:r>
-            <a:endParaRPr lang="en-US" sz="950" dirty="0"/>
+            <a:endParaRPr lang="en-US" sz="1200" dirty="0"/>
           </a:p>
         </p:txBody>
       </p:sp>
@@ -2275,70 +2135,70 @@
               <a:buNone/>
             </a:pPr>
             <a:r>
-              <a:rPr lang="en-US" sz="800" dirty="0">
+              <a:rPr lang="en-US" sz="1200" dirty="0">
                 <a:solidFill>
                   <a:srgbClr val="111111"/>
                 </a:solidFill>
               </a:rPr>
               <a:t>• Data-readiness checklist</a:t>
             </a:r>
-            <a:endParaRPr lang="en-US" sz="800" dirty="0"/>
-          </a:p>
-          <a:p>
-            <a:pPr marL="0" indent="0">
-              <a:buNone/>
-            </a:pPr>
-            <a:r>
-              <a:rPr lang="en-US" sz="800" dirty="0">
+            <a:endParaRPr lang="en-US" sz="1200" dirty="0"/>
+          </a:p>
+          <a:p>
+            <a:pPr marL="0" indent="0">
+              <a:buNone/>
+            </a:pPr>
+            <a:r>
+              <a:rPr lang="en-US" sz="1200" dirty="0">
                 <a:solidFill>
                   <a:srgbClr val="111111"/>
                 </a:solidFill>
               </a:rPr>
               <a:t>• Preprocessing plan</a:t>
             </a:r>
-            <a:endParaRPr lang="en-US" sz="800" dirty="0"/>
-          </a:p>
-          <a:p>
-            <a:pPr marL="0" indent="0">
-              <a:buNone/>
-            </a:pPr>
-            <a:r>
-              <a:rPr lang="en-US" sz="800" dirty="0">
+            <a:endParaRPr lang="en-US" sz="1200" dirty="0"/>
+          </a:p>
+          <a:p>
+            <a:pPr marL="0" indent="0">
+              <a:buNone/>
+            </a:pPr>
+            <a:r>
+              <a:rPr lang="en-US" sz="1200" dirty="0">
                 <a:solidFill>
                   <a:srgbClr val="111111"/>
                 </a:solidFill>
               </a:rPr>
               <a:t>• Leakage-risk decision</a:t>
             </a:r>
-            <a:endParaRPr lang="en-US" sz="800" dirty="0"/>
-          </a:p>
-          <a:p>
-            <a:pPr marL="0" indent="0">
-              <a:buNone/>
-            </a:pPr>
-            <a:r>
-              <a:rPr lang="en-US" sz="800" dirty="0">
+            <a:endParaRPr lang="en-US" sz="1200" dirty="0"/>
+          </a:p>
+          <a:p>
+            <a:pPr marL="0" indent="0">
+              <a:buNone/>
+            </a:pPr>
+            <a:r>
+              <a:rPr lang="en-US" sz="1200" dirty="0">
                 <a:solidFill>
                   <a:srgbClr val="111111"/>
                 </a:solidFill>
               </a:rPr>
               <a:t>• Candidate feature list</a:t>
             </a:r>
-            <a:endParaRPr lang="en-US" sz="800" dirty="0"/>
-          </a:p>
-          <a:p>
-            <a:pPr marL="0" indent="0">
-              <a:buNone/>
-            </a:pPr>
-            <a:r>
-              <a:rPr lang="en-US" sz="800" dirty="0">
+            <a:endParaRPr lang="en-US" sz="1200" dirty="0"/>
+          </a:p>
+          <a:p>
+            <a:pPr marL="0" indent="0">
+              <a:buNone/>
+            </a:pPr>
+            <a:r>
+              <a:rPr lang="en-US" sz="1200" dirty="0">
                 <a:solidFill>
                   <a:srgbClr val="111111"/>
                 </a:solidFill>
               </a:rPr>
               <a:t>• Minimal coding pattern</a:t>
             </a:r>
-            <a:endParaRPr lang="en-US" sz="800" dirty="0"/>
+            <a:endParaRPr lang="en-US" sz="1200" dirty="0"/>
           </a:p>
         </p:txBody>
       </p:sp>
@@ -2403,14 +2263,14 @@
               <a:buNone/>
             </a:pPr>
             <a:r>
-              <a:rPr lang="en-US" sz="950" b="1" dirty="0">
+              <a:rPr lang="en-US" sz="1200" b="1" dirty="0">
                 <a:solidFill>
                   <a:srgbClr val="CC0000"/>
                 </a:solidFill>
               </a:rPr>
               <a:t>Core idea</a:t>
             </a:r>
-            <a:endParaRPr lang="en-US" sz="950" dirty="0"/>
+            <a:endParaRPr lang="en-US" sz="1200" dirty="0"/>
           </a:p>
         </p:txBody>
       </p:sp>
@@ -2441,14 +2301,14 @@
               <a:buNone/>
             </a:pPr>
             <a:r>
-              <a:rPr lang="en-US" sz="900" dirty="0">
+              <a:rPr lang="en-US" sz="1200" dirty="0">
                 <a:solidFill>
                   <a:srgbClr val="111111"/>
                 </a:solidFill>
               </a:rPr>
               <a:t>Model quality is bounded by data quality and representation. Better features often beat bigger models.</a:t>
             </a:r>
-            <a:endParaRPr lang="en-US" sz="900" dirty="0"/>
+            <a:endParaRPr lang="en-US" sz="1200" dirty="0"/>
           </a:p>
         </p:txBody>
       </p:sp>
@@ -2461,1265 +2321,6 @@
 </file>
 
 <file path=ppt/slides/slide10.xml><?xml version="1.0" encoding="utf-8"?>
-<p:sld xmlns:a="http://schemas.openxmlformats.org/drawingml/2006/main" xmlns:r="http://schemas.openxmlformats.org/officeDocument/2006/relationships" xmlns:p="http://schemas.openxmlformats.org/presentationml/2006/main">
-  <p:cSld name="Slide 11">
-    <p:bg>
-      <p:bgPr>
-        <a:solidFill>
-          <a:srgbClr val="FFFFFF"/>
-        </a:solidFill>
-        <a:effectLst/>
-      </p:bgPr>
-    </p:bg>
-    <p:spTree>
-      <p:nvGrpSpPr>
-        <p:cNvPr id="1" name=""/>
-        <p:cNvGrpSpPr/>
-        <p:nvPr/>
-      </p:nvGrpSpPr>
-      <p:grpSpPr>
-        <a:xfrm>
-          <a:off x="0" y="0"/>
-          <a:ext cx="0" cy="0"/>
-          <a:chOff x="0" y="0"/>
-          <a:chExt cx="0" cy="0"/>
-        </a:xfrm>
-      </p:grpSpPr>
-      <p:sp>
-        <p:nvSpPr>
-          <p:cNvPr id="2" name="Shape 0"/>
-          <p:cNvSpPr/>
-          <p:nvPr/>
-        </p:nvSpPr>
-        <p:spPr>
-          <a:xfrm>
-            <a:off x="0" y="0"/>
-            <a:ext cx="12191695" cy="109728"/>
-          </a:xfrm>
-          <a:prstGeom prst="rect">
-            <a:avLst/>
-          </a:prstGeom>
-          <a:solidFill>
-            <a:srgbClr val="CC0000"/>
-          </a:solidFill>
-          <a:ln w="12700">
-            <a:solidFill>
-              <a:srgbClr val="CC0000"/>
-            </a:solidFill>
-            <a:prstDash val="solid"/>
-          </a:ln>
-        </p:spPr>
-        <p:txBody>
-          <a:bodyPr/>
-          <a:lstStyle/>
-          <a:p>
-            <a:endParaRPr lang="en-US"/>
-          </a:p>
-        </p:txBody>
-      </p:sp>
-      <p:sp>
-        <p:nvSpPr>
-          <p:cNvPr id="3" name="Text 1"/>
-          <p:cNvSpPr/>
-          <p:nvPr/>
-        </p:nvSpPr>
-        <p:spPr>
-          <a:xfrm>
-            <a:off x="301752" y="228600"/>
-            <a:ext cx="3108960" cy="146304"/>
-          </a:xfrm>
-          <a:prstGeom prst="rect">
-            <a:avLst/>
-          </a:prstGeom>
-          <a:noFill/>
-          <a:ln/>
-        </p:spPr>
-        <p:txBody>
-          <a:bodyPr wrap="square" lIns="0" tIns="0" rIns="0" bIns="0" rtlCol="0" anchor="ctr"/>
-          <a:lstStyle/>
-          <a:p>
-            <a:pPr marL="0" indent="0">
-              <a:buNone/>
-            </a:pPr>
-            <a:r>
-              <a:rPr lang="en-US" sz="550" b="1" dirty="0">
-                <a:solidFill>
-                  <a:srgbClr val="555555"/>
-                </a:solidFill>
-              </a:rPr>
-              <a:t>APPLIED AI DESIGN WORKSHOP</a:t>
-            </a:r>
-            <a:endParaRPr lang="en-US" sz="550" dirty="0"/>
-          </a:p>
-        </p:txBody>
-      </p:sp>
-      <p:sp>
-        <p:nvSpPr>
-          <p:cNvPr id="4" name="Text 2"/>
-          <p:cNvSpPr/>
-          <p:nvPr/>
-        </p:nvSpPr>
-        <p:spPr>
-          <a:xfrm>
-            <a:off x="10972800" y="228600"/>
-            <a:ext cx="914400" cy="146304"/>
-          </a:xfrm>
-          <a:prstGeom prst="rect">
-            <a:avLst/>
-          </a:prstGeom>
-          <a:noFill/>
-          <a:ln/>
-        </p:spPr>
-        <p:txBody>
-          <a:bodyPr wrap="square" lIns="0" tIns="0" rIns="0" bIns="0" rtlCol="0" anchor="ctr"/>
-          <a:lstStyle/>
-          <a:p>
-            <a:pPr marL="0" indent="0" algn="r">
-              <a:buNone/>
-            </a:pPr>
-            <a:r>
-              <a:rPr lang="en-US" sz="550" dirty="0">
-                <a:solidFill>
-                  <a:srgbClr val="555555"/>
-                </a:solidFill>
-              </a:rPr>
-              <a:t>Session 3</a:t>
-            </a:r>
-            <a:endParaRPr lang="en-US" sz="550" dirty="0"/>
-          </a:p>
-        </p:txBody>
-      </p:sp>
-      <p:sp>
-        <p:nvSpPr>
-          <p:cNvPr id="5" name="Text 3"/>
-          <p:cNvSpPr/>
-          <p:nvPr/>
-        </p:nvSpPr>
-        <p:spPr>
-          <a:xfrm>
-            <a:off x="329184" y="502920"/>
-            <a:ext cx="8778240" cy="384048"/>
-          </a:xfrm>
-          <a:prstGeom prst="rect">
-            <a:avLst/>
-          </a:prstGeom>
-          <a:noFill/>
-          <a:ln/>
-        </p:spPr>
-        <p:txBody>
-          <a:bodyPr wrap="square" lIns="0" tIns="0" rIns="0" bIns="0" rtlCol="0" anchor="ctr">
-            <a:normAutofit/>
-          </a:bodyPr>
-          <a:lstStyle/>
-          <a:p>
-            <a:pPr marL="0" indent="0">
-              <a:buNone/>
-            </a:pPr>
-            <a:r>
-              <a:rPr lang="en-US" sz="2000" b="1" dirty="0">
-                <a:solidFill>
-                  <a:srgbClr val="111111"/>
-                </a:solidFill>
-              </a:rPr>
-              <a:t>Mini-lesson: summarize time-series data into features</a:t>
-            </a:r>
-            <a:endParaRPr lang="en-US" sz="2000" dirty="0"/>
-          </a:p>
-        </p:txBody>
-      </p:sp>
-      <p:sp>
-        <p:nvSpPr>
-          <p:cNvPr id="6" name="Text 4"/>
-          <p:cNvSpPr/>
-          <p:nvPr/>
-        </p:nvSpPr>
-        <p:spPr>
-          <a:xfrm>
-            <a:off x="329184" y="941832"/>
-            <a:ext cx="10789920" cy="164592"/>
-          </a:xfrm>
-          <a:prstGeom prst="rect">
-            <a:avLst/>
-          </a:prstGeom>
-          <a:noFill/>
-          <a:ln/>
-        </p:spPr>
-        <p:txBody>
-          <a:bodyPr wrap="square" lIns="0" tIns="0" rIns="0" bIns="0" rtlCol="0" anchor="ctr"/>
-          <a:lstStyle/>
-          <a:p>
-            <a:pPr marL="0" indent="0">
-              <a:buNone/>
-            </a:pPr>
-            <a:r>
-              <a:rPr lang="en-US" sz="800" dirty="0">
-                <a:solidFill>
-                  <a:srgbClr val="333333"/>
-                </a:solidFill>
-              </a:rPr>
-              <a:t>Many applied datasets start as trajectories but need one row per run, batch, part, or subject.</a:t>
-            </a:r>
-            <a:endParaRPr lang="en-US" sz="800" dirty="0"/>
-          </a:p>
-        </p:txBody>
-      </p:sp>
-      <p:sp>
-        <p:nvSpPr>
-          <p:cNvPr id="7" name="Shape 5"/>
-          <p:cNvSpPr/>
-          <p:nvPr/>
-        </p:nvSpPr>
-        <p:spPr>
-          <a:xfrm>
-            <a:off x="868680" y="4389120"/>
-            <a:ext cx="548640" cy="0"/>
-          </a:xfrm>
-          <a:prstGeom prst="line">
-            <a:avLst/>
-          </a:prstGeom>
-          <a:noFill/>
-          <a:ln w="22860">
-            <a:solidFill>
-              <a:srgbClr val="CC0000"/>
-            </a:solidFill>
-            <a:prstDash val="solid"/>
-          </a:ln>
-        </p:spPr>
-        <p:txBody>
-          <a:bodyPr/>
-          <a:lstStyle/>
-          <a:p>
-            <a:endParaRPr lang="en-US"/>
-          </a:p>
-        </p:txBody>
-      </p:sp>
-      <p:sp>
-        <p:nvSpPr>
-          <p:cNvPr id="8" name="Shape 6"/>
-          <p:cNvSpPr/>
-          <p:nvPr/>
-        </p:nvSpPr>
-        <p:spPr>
-          <a:xfrm>
-            <a:off x="1417320" y="3886200"/>
-            <a:ext cx="548640" cy="0"/>
-          </a:xfrm>
-          <a:prstGeom prst="line">
-            <a:avLst/>
-          </a:prstGeom>
-          <a:noFill/>
-          <a:ln w="22860">
-            <a:solidFill>
-              <a:srgbClr val="CC0000"/>
-            </a:solidFill>
-            <a:prstDash val="solid"/>
-          </a:ln>
-        </p:spPr>
-        <p:txBody>
-          <a:bodyPr/>
-          <a:lstStyle/>
-          <a:p>
-            <a:endParaRPr lang="en-US"/>
-          </a:p>
-        </p:txBody>
-      </p:sp>
-      <p:sp>
-        <p:nvSpPr>
-          <p:cNvPr id="9" name="Shape 7"/>
-          <p:cNvSpPr/>
-          <p:nvPr/>
-        </p:nvSpPr>
-        <p:spPr>
-          <a:xfrm>
-            <a:off x="1965960" y="3337560"/>
-            <a:ext cx="548640" cy="0"/>
-          </a:xfrm>
-          <a:prstGeom prst="line">
-            <a:avLst/>
-          </a:prstGeom>
-          <a:noFill/>
-          <a:ln w="22860">
-            <a:solidFill>
-              <a:srgbClr val="CC0000"/>
-            </a:solidFill>
-            <a:prstDash val="solid"/>
-          </a:ln>
-        </p:spPr>
-        <p:txBody>
-          <a:bodyPr/>
-          <a:lstStyle/>
-          <a:p>
-            <a:endParaRPr lang="en-US"/>
-          </a:p>
-        </p:txBody>
-      </p:sp>
-      <p:sp>
-        <p:nvSpPr>
-          <p:cNvPr id="10" name="Shape 8"/>
-          <p:cNvSpPr/>
-          <p:nvPr/>
-        </p:nvSpPr>
-        <p:spPr>
-          <a:xfrm>
-            <a:off x="2514600" y="2907792"/>
-            <a:ext cx="548640" cy="0"/>
-          </a:xfrm>
-          <a:prstGeom prst="line">
-            <a:avLst/>
-          </a:prstGeom>
-          <a:noFill/>
-          <a:ln w="22860">
-            <a:solidFill>
-              <a:srgbClr val="CC0000"/>
-            </a:solidFill>
-            <a:prstDash val="solid"/>
-          </a:ln>
-        </p:spPr>
-        <p:txBody>
-          <a:bodyPr/>
-          <a:lstStyle/>
-          <a:p>
-            <a:endParaRPr lang="en-US"/>
-          </a:p>
-        </p:txBody>
-      </p:sp>
-      <p:sp>
-        <p:nvSpPr>
-          <p:cNvPr id="11" name="Shape 9"/>
-          <p:cNvSpPr/>
-          <p:nvPr/>
-        </p:nvSpPr>
-        <p:spPr>
-          <a:xfrm>
-            <a:off x="3063240" y="2514600"/>
-            <a:ext cx="548640" cy="0"/>
-          </a:xfrm>
-          <a:prstGeom prst="line">
-            <a:avLst/>
-          </a:prstGeom>
-          <a:noFill/>
-          <a:ln w="22860">
-            <a:solidFill>
-              <a:srgbClr val="CC0000"/>
-            </a:solidFill>
-            <a:prstDash val="solid"/>
-          </a:ln>
-        </p:spPr>
-        <p:txBody>
-          <a:bodyPr/>
-          <a:lstStyle/>
-          <a:p>
-            <a:endParaRPr lang="en-US"/>
-          </a:p>
-        </p:txBody>
-      </p:sp>
-      <p:sp>
-        <p:nvSpPr>
-          <p:cNvPr id="12" name="Shape 10"/>
-          <p:cNvSpPr/>
-          <p:nvPr/>
-        </p:nvSpPr>
-        <p:spPr>
-          <a:xfrm>
-            <a:off x="3611880" y="2221992"/>
-            <a:ext cx="548640" cy="0"/>
-          </a:xfrm>
-          <a:prstGeom prst="line">
-            <a:avLst/>
-          </a:prstGeom>
-          <a:noFill/>
-          <a:ln w="22860">
-            <a:solidFill>
-              <a:srgbClr val="CC0000"/>
-            </a:solidFill>
-            <a:prstDash val="solid"/>
-          </a:ln>
-        </p:spPr>
-        <p:txBody>
-          <a:bodyPr/>
-          <a:lstStyle/>
-          <a:p>
-            <a:endParaRPr lang="en-US"/>
-          </a:p>
-        </p:txBody>
-      </p:sp>
-      <p:sp>
-        <p:nvSpPr>
-          <p:cNvPr id="13" name="Shape 11"/>
-          <p:cNvSpPr/>
-          <p:nvPr/>
-        </p:nvSpPr>
-        <p:spPr>
-          <a:xfrm>
-            <a:off x="4160520" y="2075688"/>
-            <a:ext cx="548640" cy="0"/>
-          </a:xfrm>
-          <a:prstGeom prst="line">
-            <a:avLst/>
-          </a:prstGeom>
-          <a:noFill/>
-          <a:ln w="22860">
-            <a:solidFill>
-              <a:srgbClr val="CC0000"/>
-            </a:solidFill>
-            <a:prstDash val="solid"/>
-          </a:ln>
-        </p:spPr>
-        <p:txBody>
-          <a:bodyPr/>
-          <a:lstStyle/>
-          <a:p>
-            <a:endParaRPr lang="en-US"/>
-          </a:p>
-        </p:txBody>
-      </p:sp>
-      <p:sp>
-        <p:nvSpPr>
-          <p:cNvPr id="14" name="Shape 12"/>
-          <p:cNvSpPr/>
-          <p:nvPr/>
-        </p:nvSpPr>
-        <p:spPr>
-          <a:xfrm>
-            <a:off x="827532" y="4347972"/>
-            <a:ext cx="82296" cy="82296"/>
-          </a:xfrm>
-          <a:prstGeom prst="ellipse">
-            <a:avLst/>
-          </a:prstGeom>
-          <a:solidFill>
-            <a:srgbClr val="CC0000"/>
-          </a:solidFill>
-          <a:ln w="12700">
-            <a:solidFill>
-              <a:srgbClr val="CC0000"/>
-            </a:solidFill>
-            <a:prstDash val="solid"/>
-          </a:ln>
-        </p:spPr>
-        <p:txBody>
-          <a:bodyPr/>
-          <a:lstStyle/>
-          <a:p>
-            <a:endParaRPr lang="en-US"/>
-          </a:p>
-        </p:txBody>
-      </p:sp>
-      <p:sp>
-        <p:nvSpPr>
-          <p:cNvPr id="15" name="Shape 13"/>
-          <p:cNvSpPr/>
-          <p:nvPr/>
-        </p:nvSpPr>
-        <p:spPr>
-          <a:xfrm>
-            <a:off x="1376172" y="3845052"/>
-            <a:ext cx="82296" cy="82296"/>
-          </a:xfrm>
-          <a:prstGeom prst="ellipse">
-            <a:avLst/>
-          </a:prstGeom>
-          <a:solidFill>
-            <a:srgbClr val="CC0000"/>
-          </a:solidFill>
-          <a:ln w="12700">
-            <a:solidFill>
-              <a:srgbClr val="CC0000"/>
-            </a:solidFill>
-            <a:prstDash val="solid"/>
-          </a:ln>
-        </p:spPr>
-        <p:txBody>
-          <a:bodyPr/>
-          <a:lstStyle/>
-          <a:p>
-            <a:endParaRPr lang="en-US"/>
-          </a:p>
-        </p:txBody>
-      </p:sp>
-      <p:sp>
-        <p:nvSpPr>
-          <p:cNvPr id="16" name="Shape 14"/>
-          <p:cNvSpPr/>
-          <p:nvPr/>
-        </p:nvSpPr>
-        <p:spPr>
-          <a:xfrm>
-            <a:off x="1924812" y="3296412"/>
-            <a:ext cx="82296" cy="82296"/>
-          </a:xfrm>
-          <a:prstGeom prst="ellipse">
-            <a:avLst/>
-          </a:prstGeom>
-          <a:solidFill>
-            <a:srgbClr val="CC0000"/>
-          </a:solidFill>
-          <a:ln w="12700">
-            <a:solidFill>
-              <a:srgbClr val="CC0000"/>
-            </a:solidFill>
-            <a:prstDash val="solid"/>
-          </a:ln>
-        </p:spPr>
-        <p:txBody>
-          <a:bodyPr/>
-          <a:lstStyle/>
-          <a:p>
-            <a:endParaRPr lang="en-US"/>
-          </a:p>
-        </p:txBody>
-      </p:sp>
-      <p:sp>
-        <p:nvSpPr>
-          <p:cNvPr id="17" name="Shape 15"/>
-          <p:cNvSpPr/>
-          <p:nvPr/>
-        </p:nvSpPr>
-        <p:spPr>
-          <a:xfrm>
-            <a:off x="2473452" y="2866644"/>
-            <a:ext cx="82296" cy="82296"/>
-          </a:xfrm>
-          <a:prstGeom prst="ellipse">
-            <a:avLst/>
-          </a:prstGeom>
-          <a:solidFill>
-            <a:srgbClr val="CC0000"/>
-          </a:solidFill>
-          <a:ln w="12700">
-            <a:solidFill>
-              <a:srgbClr val="CC0000"/>
-            </a:solidFill>
-            <a:prstDash val="solid"/>
-          </a:ln>
-        </p:spPr>
-        <p:txBody>
-          <a:bodyPr/>
-          <a:lstStyle/>
-          <a:p>
-            <a:endParaRPr lang="en-US"/>
-          </a:p>
-        </p:txBody>
-      </p:sp>
-      <p:sp>
-        <p:nvSpPr>
-          <p:cNvPr id="18" name="Shape 16"/>
-          <p:cNvSpPr/>
-          <p:nvPr/>
-        </p:nvSpPr>
-        <p:spPr>
-          <a:xfrm>
-            <a:off x="3022092" y="2473452"/>
-            <a:ext cx="82296" cy="82296"/>
-          </a:xfrm>
-          <a:prstGeom prst="ellipse">
-            <a:avLst/>
-          </a:prstGeom>
-          <a:solidFill>
-            <a:srgbClr val="CC0000"/>
-          </a:solidFill>
-          <a:ln w="12700">
-            <a:solidFill>
-              <a:srgbClr val="CC0000"/>
-            </a:solidFill>
-            <a:prstDash val="solid"/>
-          </a:ln>
-        </p:spPr>
-        <p:txBody>
-          <a:bodyPr/>
-          <a:lstStyle/>
-          <a:p>
-            <a:endParaRPr lang="en-US"/>
-          </a:p>
-        </p:txBody>
-      </p:sp>
-      <p:sp>
-        <p:nvSpPr>
-          <p:cNvPr id="19" name="Shape 17"/>
-          <p:cNvSpPr/>
-          <p:nvPr/>
-        </p:nvSpPr>
-        <p:spPr>
-          <a:xfrm>
-            <a:off x="3570732" y="2180844"/>
-            <a:ext cx="82296" cy="82296"/>
-          </a:xfrm>
-          <a:prstGeom prst="ellipse">
-            <a:avLst/>
-          </a:prstGeom>
-          <a:solidFill>
-            <a:srgbClr val="CC0000"/>
-          </a:solidFill>
-          <a:ln w="12700">
-            <a:solidFill>
-              <a:srgbClr val="CC0000"/>
-            </a:solidFill>
-            <a:prstDash val="solid"/>
-          </a:ln>
-        </p:spPr>
-        <p:txBody>
-          <a:bodyPr/>
-          <a:lstStyle/>
-          <a:p>
-            <a:endParaRPr lang="en-US"/>
-          </a:p>
-        </p:txBody>
-      </p:sp>
-      <p:sp>
-        <p:nvSpPr>
-          <p:cNvPr id="20" name="Shape 18"/>
-          <p:cNvSpPr/>
-          <p:nvPr/>
-        </p:nvSpPr>
-        <p:spPr>
-          <a:xfrm>
-            <a:off x="4119372" y="2034540"/>
-            <a:ext cx="82296" cy="82296"/>
-          </a:xfrm>
-          <a:prstGeom prst="ellipse">
-            <a:avLst/>
-          </a:prstGeom>
-          <a:solidFill>
-            <a:srgbClr val="CC0000"/>
-          </a:solidFill>
-          <a:ln w="12700">
-            <a:solidFill>
-              <a:srgbClr val="CC0000"/>
-            </a:solidFill>
-            <a:prstDash val="solid"/>
-          </a:ln>
-        </p:spPr>
-        <p:txBody>
-          <a:bodyPr/>
-          <a:lstStyle/>
-          <a:p>
-            <a:endParaRPr lang="en-US"/>
-          </a:p>
-        </p:txBody>
-      </p:sp>
-      <p:sp>
-        <p:nvSpPr>
-          <p:cNvPr id="21" name="Shape 19"/>
-          <p:cNvSpPr/>
-          <p:nvPr/>
-        </p:nvSpPr>
-        <p:spPr>
-          <a:xfrm>
-            <a:off x="4668012" y="1933956"/>
-            <a:ext cx="82296" cy="82296"/>
-          </a:xfrm>
-          <a:prstGeom prst="ellipse">
-            <a:avLst/>
-          </a:prstGeom>
-          <a:solidFill>
-            <a:srgbClr val="CC0000"/>
-          </a:solidFill>
-          <a:ln w="12700">
-            <a:solidFill>
-              <a:srgbClr val="CC0000"/>
-            </a:solidFill>
-            <a:prstDash val="solid"/>
-          </a:ln>
-        </p:spPr>
-        <p:txBody>
-          <a:bodyPr/>
-          <a:lstStyle/>
-          <a:p>
-            <a:endParaRPr lang="en-US"/>
-          </a:p>
-        </p:txBody>
-      </p:sp>
-      <p:sp>
-        <p:nvSpPr>
-          <p:cNvPr id="22" name="Text 20"/>
-          <p:cNvSpPr/>
-          <p:nvPr/>
-        </p:nvSpPr>
-        <p:spPr>
-          <a:xfrm>
-            <a:off x="2377440" y="4736592"/>
-            <a:ext cx="731520" cy="137160"/>
-          </a:xfrm>
-          <a:prstGeom prst="rect">
-            <a:avLst/>
-          </a:prstGeom>
-          <a:noFill/>
-          <a:ln/>
-        </p:spPr>
-        <p:txBody>
-          <a:bodyPr wrap="square" lIns="0" tIns="0" rIns="0" bIns="0" rtlCol="0" anchor="ctr"/>
-          <a:lstStyle/>
-          <a:p>
-            <a:pPr marL="0" indent="0" algn="ctr">
-              <a:buNone/>
-            </a:pPr>
-            <a:r>
-              <a:rPr lang="en-US" sz="750" dirty="0">
-                <a:solidFill>
-                  <a:srgbClr val="555555"/>
-                </a:solidFill>
-              </a:rPr>
-              <a:t>time</a:t>
-            </a:r>
-            <a:endParaRPr lang="en-US" sz="750" dirty="0"/>
-          </a:p>
-        </p:txBody>
-      </p:sp>
-      <p:sp>
-        <p:nvSpPr>
-          <p:cNvPr id="23" name="Text 21"/>
-          <p:cNvSpPr/>
-          <p:nvPr/>
-        </p:nvSpPr>
-        <p:spPr>
-          <a:xfrm rot="16200000">
-            <a:off x="502920" y="3063240"/>
-            <a:ext cx="274320" cy="457200"/>
-          </a:xfrm>
-          <a:prstGeom prst="rect">
-            <a:avLst/>
-          </a:prstGeom>
-          <a:noFill/>
-          <a:ln/>
-        </p:spPr>
-        <p:txBody>
-          <a:bodyPr wrap="square" lIns="0" tIns="0" rIns="0" bIns="0" rtlCol="0" anchor="ctr"/>
-          <a:lstStyle/>
-          <a:p>
-            <a:pPr marL="0" indent="0">
-              <a:buNone/>
-            </a:pPr>
-            <a:r>
-              <a:rPr lang="en-US" sz="750" dirty="0">
-                <a:solidFill>
-                  <a:srgbClr val="555555"/>
-                </a:solidFill>
-              </a:rPr>
-              <a:t>response</a:t>
-            </a:r>
-            <a:endParaRPr lang="en-US" sz="750" dirty="0"/>
-          </a:p>
-        </p:txBody>
-      </p:sp>
-      <p:sp>
-        <p:nvSpPr>
-          <p:cNvPr id="24" name="Shape 22"/>
-          <p:cNvSpPr/>
-          <p:nvPr/>
-        </p:nvSpPr>
-        <p:spPr>
-          <a:xfrm>
-            <a:off x="5532120" y="1143000"/>
-            <a:ext cx="2148840" cy="960120"/>
-          </a:xfrm>
-          <a:prstGeom prst="roundRect">
-            <a:avLst>
-              <a:gd name="adj" fmla="val 4762"/>
-            </a:avLst>
-          </a:prstGeom>
-          <a:solidFill>
-            <a:srgbClr val="F7F7F7"/>
-          </a:solidFill>
-          <a:ln w="7620">
-            <a:solidFill>
-              <a:srgbClr val="E6E6E6"/>
-            </a:solidFill>
-            <a:prstDash val="solid"/>
-          </a:ln>
-        </p:spPr>
-        <p:txBody>
-          <a:bodyPr/>
-          <a:lstStyle/>
-          <a:p>
-            <a:endParaRPr lang="en-US"/>
-          </a:p>
-        </p:txBody>
-      </p:sp>
-      <p:sp>
-        <p:nvSpPr>
-          <p:cNvPr id="25" name="Text 23"/>
-          <p:cNvSpPr/>
-          <p:nvPr/>
-        </p:nvSpPr>
-        <p:spPr>
-          <a:xfrm>
-            <a:off x="5678424" y="1261872"/>
-            <a:ext cx="1856232" cy="228600"/>
-          </a:xfrm>
-          <a:prstGeom prst="rect">
-            <a:avLst/>
-          </a:prstGeom>
-          <a:noFill/>
-          <a:ln/>
-        </p:spPr>
-        <p:txBody>
-          <a:bodyPr wrap="square" lIns="0" tIns="0" rIns="0" bIns="0" rtlCol="0" anchor="ctr">
-            <a:normAutofit/>
-          </a:bodyPr>
-          <a:lstStyle/>
-          <a:p>
-            <a:pPr marL="0" indent="0">
-              <a:buNone/>
-            </a:pPr>
-            <a:r>
-              <a:rPr lang="en-US" sz="950" b="1" dirty="0">
-                <a:solidFill>
-                  <a:srgbClr val="CC0000"/>
-                </a:solidFill>
-              </a:rPr>
-              <a:t>Initial / final</a:t>
-            </a:r>
-            <a:endParaRPr lang="en-US" sz="950" dirty="0"/>
-          </a:p>
-        </p:txBody>
-      </p:sp>
-      <p:sp>
-        <p:nvSpPr>
-          <p:cNvPr id="26" name="Text 24"/>
-          <p:cNvSpPr/>
-          <p:nvPr/>
-        </p:nvSpPr>
-        <p:spPr>
-          <a:xfrm>
-            <a:off x="5678424" y="1581912"/>
-            <a:ext cx="1856232" cy="429768"/>
-          </a:xfrm>
-          <a:prstGeom prst="rect">
-            <a:avLst/>
-          </a:prstGeom>
-          <a:noFill/>
-          <a:ln/>
-        </p:spPr>
-        <p:txBody>
-          <a:bodyPr wrap="square" lIns="0" tIns="0" rIns="0" bIns="0" rtlCol="0" anchor="t">
-            <a:normAutofit/>
-          </a:bodyPr>
-          <a:lstStyle/>
-          <a:p>
-            <a:pPr marL="0" indent="0">
-              <a:buNone/>
-            </a:pPr>
-            <a:r>
-              <a:rPr lang="en-US" sz="780" dirty="0">
-                <a:solidFill>
-                  <a:srgbClr val="111111"/>
-                </a:solidFill>
-              </a:rPr>
-              <a:t>Starting value, ending value, final-initial change</a:t>
-            </a:r>
-            <a:endParaRPr lang="en-US" sz="780" dirty="0"/>
-          </a:p>
-        </p:txBody>
-      </p:sp>
-      <p:sp>
-        <p:nvSpPr>
-          <p:cNvPr id="27" name="Shape 25"/>
-          <p:cNvSpPr/>
-          <p:nvPr/>
-        </p:nvSpPr>
-        <p:spPr>
-          <a:xfrm>
-            <a:off x="7909560" y="1143000"/>
-            <a:ext cx="2148840" cy="960120"/>
-          </a:xfrm>
-          <a:prstGeom prst="roundRect">
-            <a:avLst>
-              <a:gd name="adj" fmla="val 4762"/>
-            </a:avLst>
-          </a:prstGeom>
-          <a:solidFill>
-            <a:srgbClr val="F7F7F7"/>
-          </a:solidFill>
-          <a:ln w="7620">
-            <a:solidFill>
-              <a:srgbClr val="E6E6E6"/>
-            </a:solidFill>
-            <a:prstDash val="solid"/>
-          </a:ln>
-        </p:spPr>
-        <p:txBody>
-          <a:bodyPr/>
-          <a:lstStyle/>
-          <a:p>
-            <a:endParaRPr lang="en-US"/>
-          </a:p>
-        </p:txBody>
-      </p:sp>
-      <p:sp>
-        <p:nvSpPr>
-          <p:cNvPr id="28" name="Text 26"/>
-          <p:cNvSpPr/>
-          <p:nvPr/>
-        </p:nvSpPr>
-        <p:spPr>
-          <a:xfrm>
-            <a:off x="8055864" y="1261872"/>
-            <a:ext cx="1856232" cy="228600"/>
-          </a:xfrm>
-          <a:prstGeom prst="rect">
-            <a:avLst/>
-          </a:prstGeom>
-          <a:noFill/>
-          <a:ln/>
-        </p:spPr>
-        <p:txBody>
-          <a:bodyPr wrap="square" lIns="0" tIns="0" rIns="0" bIns="0" rtlCol="0" anchor="ctr">
-            <a:normAutofit/>
-          </a:bodyPr>
-          <a:lstStyle/>
-          <a:p>
-            <a:pPr marL="0" indent="0">
-              <a:buNone/>
-            </a:pPr>
-            <a:r>
-              <a:rPr lang="en-US" sz="950" b="1" dirty="0">
-                <a:solidFill>
-                  <a:srgbClr val="CC0000"/>
-                </a:solidFill>
-              </a:rPr>
-              <a:t>Trend</a:t>
-            </a:r>
-            <a:endParaRPr lang="en-US" sz="950" dirty="0"/>
-          </a:p>
-        </p:txBody>
-      </p:sp>
-      <p:sp>
-        <p:nvSpPr>
-          <p:cNvPr id="29" name="Text 27"/>
-          <p:cNvSpPr/>
-          <p:nvPr/>
-        </p:nvSpPr>
-        <p:spPr>
-          <a:xfrm>
-            <a:off x="8055864" y="1581912"/>
-            <a:ext cx="1856232" cy="429768"/>
-          </a:xfrm>
-          <a:prstGeom prst="rect">
-            <a:avLst/>
-          </a:prstGeom>
-          <a:noFill/>
-          <a:ln/>
-        </p:spPr>
-        <p:txBody>
-          <a:bodyPr wrap="square" lIns="0" tIns="0" rIns="0" bIns="0" rtlCol="0" anchor="t">
-            <a:normAutofit/>
-          </a:bodyPr>
-          <a:lstStyle/>
-          <a:p>
-            <a:pPr marL="0" indent="0">
-              <a:buNone/>
-            </a:pPr>
-            <a:r>
-              <a:rPr lang="en-US" sz="780" dirty="0">
-                <a:solidFill>
-                  <a:srgbClr val="111111"/>
-                </a:solidFill>
-              </a:rPr>
-              <a:t>Slope, growth rate, time to threshold</a:t>
-            </a:r>
-            <a:endParaRPr lang="en-US" sz="780" dirty="0"/>
-          </a:p>
-        </p:txBody>
-      </p:sp>
-      <p:sp>
-        <p:nvSpPr>
-          <p:cNvPr id="30" name="Shape 28"/>
-          <p:cNvSpPr/>
-          <p:nvPr/>
-        </p:nvSpPr>
-        <p:spPr>
-          <a:xfrm>
-            <a:off x="5532120" y="2423160"/>
-            <a:ext cx="2148840" cy="960120"/>
-          </a:xfrm>
-          <a:prstGeom prst="roundRect">
-            <a:avLst>
-              <a:gd name="adj" fmla="val 4762"/>
-            </a:avLst>
-          </a:prstGeom>
-          <a:solidFill>
-            <a:srgbClr val="F7F7F7"/>
-          </a:solidFill>
-          <a:ln w="7620">
-            <a:solidFill>
-              <a:srgbClr val="E6E6E6"/>
-            </a:solidFill>
-            <a:prstDash val="solid"/>
-          </a:ln>
-        </p:spPr>
-        <p:txBody>
-          <a:bodyPr/>
-          <a:lstStyle/>
-          <a:p>
-            <a:endParaRPr lang="en-US"/>
-          </a:p>
-        </p:txBody>
-      </p:sp>
-      <p:sp>
-        <p:nvSpPr>
-          <p:cNvPr id="31" name="Text 29"/>
-          <p:cNvSpPr/>
-          <p:nvPr/>
-        </p:nvSpPr>
-        <p:spPr>
-          <a:xfrm>
-            <a:off x="5678424" y="2542032"/>
-            <a:ext cx="1856232" cy="228600"/>
-          </a:xfrm>
-          <a:prstGeom prst="rect">
-            <a:avLst/>
-          </a:prstGeom>
-          <a:noFill/>
-          <a:ln/>
-        </p:spPr>
-        <p:txBody>
-          <a:bodyPr wrap="square" lIns="0" tIns="0" rIns="0" bIns="0" rtlCol="0" anchor="ctr">
-            <a:normAutofit/>
-          </a:bodyPr>
-          <a:lstStyle/>
-          <a:p>
-            <a:pPr marL="0" indent="0">
-              <a:buNone/>
-            </a:pPr>
-            <a:r>
-              <a:rPr lang="en-US" sz="950" b="1" dirty="0">
-                <a:solidFill>
-                  <a:srgbClr val="CC0000"/>
-                </a:solidFill>
-              </a:rPr>
-              <a:t>Stability</a:t>
-            </a:r>
-            <a:endParaRPr lang="en-US" sz="950" dirty="0"/>
-          </a:p>
-        </p:txBody>
-      </p:sp>
-      <p:sp>
-        <p:nvSpPr>
-          <p:cNvPr id="32" name="Text 30"/>
-          <p:cNvSpPr/>
-          <p:nvPr/>
-        </p:nvSpPr>
-        <p:spPr>
-          <a:xfrm>
-            <a:off x="5678424" y="2862072"/>
-            <a:ext cx="1856232" cy="429768"/>
-          </a:xfrm>
-          <a:prstGeom prst="rect">
-            <a:avLst/>
-          </a:prstGeom>
-          <a:noFill/>
-          <a:ln/>
-        </p:spPr>
-        <p:txBody>
-          <a:bodyPr wrap="square" lIns="0" tIns="0" rIns="0" bIns="0" rtlCol="0" anchor="t">
-            <a:normAutofit/>
-          </a:bodyPr>
-          <a:lstStyle/>
-          <a:p>
-            <a:pPr marL="0" indent="0">
-              <a:buNone/>
-            </a:pPr>
-            <a:r>
-              <a:rPr lang="en-US" sz="780" dirty="0">
-                <a:solidFill>
-                  <a:srgbClr val="111111"/>
-                </a:solidFill>
-              </a:rPr>
-              <a:t>Mean, variance, coefficient of variation</a:t>
-            </a:r>
-            <a:endParaRPr lang="en-US" sz="780" dirty="0"/>
-          </a:p>
-        </p:txBody>
-      </p:sp>
-      <p:sp>
-        <p:nvSpPr>
-          <p:cNvPr id="33" name="Shape 31"/>
-          <p:cNvSpPr/>
-          <p:nvPr/>
-        </p:nvSpPr>
-        <p:spPr>
-          <a:xfrm>
-            <a:off x="7909560" y="2423160"/>
-            <a:ext cx="2148840" cy="960120"/>
-          </a:xfrm>
-          <a:prstGeom prst="roundRect">
-            <a:avLst>
-              <a:gd name="adj" fmla="val 4762"/>
-            </a:avLst>
-          </a:prstGeom>
-          <a:solidFill>
-            <a:srgbClr val="F7F7F7"/>
-          </a:solidFill>
-          <a:ln w="7620">
-            <a:solidFill>
-              <a:srgbClr val="E6E6E6"/>
-            </a:solidFill>
-            <a:prstDash val="solid"/>
-          </a:ln>
-        </p:spPr>
-        <p:txBody>
-          <a:bodyPr/>
-          <a:lstStyle/>
-          <a:p>
-            <a:endParaRPr lang="en-US"/>
-          </a:p>
-        </p:txBody>
-      </p:sp>
-      <p:sp>
-        <p:nvSpPr>
-          <p:cNvPr id="34" name="Text 32"/>
-          <p:cNvSpPr/>
-          <p:nvPr/>
-        </p:nvSpPr>
-        <p:spPr>
-          <a:xfrm>
-            <a:off x="8055864" y="2542032"/>
-            <a:ext cx="1856232" cy="228600"/>
-          </a:xfrm>
-          <a:prstGeom prst="rect">
-            <a:avLst/>
-          </a:prstGeom>
-          <a:noFill/>
-          <a:ln/>
-        </p:spPr>
-        <p:txBody>
-          <a:bodyPr wrap="square" lIns="0" tIns="0" rIns="0" bIns="0" rtlCol="0" anchor="ctr">
-            <a:normAutofit/>
-          </a:bodyPr>
-          <a:lstStyle/>
-          <a:p>
-            <a:pPr marL="0" indent="0">
-              <a:buNone/>
-            </a:pPr>
-            <a:r>
-              <a:rPr lang="en-US" sz="950" b="1" dirty="0">
-                <a:solidFill>
-                  <a:srgbClr val="CC0000"/>
-                </a:solidFill>
-              </a:rPr>
-              <a:t>Exposure</a:t>
-            </a:r>
-            <a:endParaRPr lang="en-US" sz="950" dirty="0"/>
-          </a:p>
-        </p:txBody>
-      </p:sp>
-      <p:sp>
-        <p:nvSpPr>
-          <p:cNvPr id="35" name="Text 33"/>
-          <p:cNvSpPr/>
-          <p:nvPr/>
-        </p:nvSpPr>
-        <p:spPr>
-          <a:xfrm>
-            <a:off x="8055864" y="2862072"/>
-            <a:ext cx="1856232" cy="429768"/>
-          </a:xfrm>
-          <a:prstGeom prst="rect">
-            <a:avLst/>
-          </a:prstGeom>
-          <a:noFill/>
-          <a:ln/>
-        </p:spPr>
-        <p:txBody>
-          <a:bodyPr wrap="square" lIns="0" tIns="0" rIns="0" bIns="0" rtlCol="0" anchor="t">
-            <a:normAutofit/>
-          </a:bodyPr>
-          <a:lstStyle/>
-          <a:p>
-            <a:pPr marL="0" indent="0">
-              <a:buNone/>
-            </a:pPr>
-            <a:r>
-              <a:rPr lang="en-US" sz="780" dirty="0">
-                <a:solidFill>
-                  <a:srgbClr val="111111"/>
-                </a:solidFill>
-              </a:rPr>
-              <a:t>Area under curve, time above limit</a:t>
-            </a:r>
-            <a:endParaRPr lang="en-US" sz="780" dirty="0"/>
-          </a:p>
-        </p:txBody>
-      </p:sp>
-      <p:sp>
-        <p:nvSpPr>
-          <p:cNvPr id="36" name="Shape 34"/>
-          <p:cNvSpPr/>
-          <p:nvPr/>
-        </p:nvSpPr>
-        <p:spPr>
-          <a:xfrm>
-            <a:off x="640080" y="6053328"/>
-            <a:ext cx="10927080" cy="384048"/>
-          </a:xfrm>
-          <a:prstGeom prst="roundRect">
-            <a:avLst>
-              <a:gd name="adj" fmla="val 9524"/>
-            </a:avLst>
-          </a:prstGeom>
-          <a:solidFill>
-            <a:srgbClr val="FFFFFF"/>
-          </a:solidFill>
-          <a:ln w="10160">
-            <a:solidFill>
-              <a:srgbClr val="F0A0A0"/>
-            </a:solidFill>
-            <a:prstDash val="solid"/>
-          </a:ln>
-        </p:spPr>
-        <p:txBody>
-          <a:bodyPr/>
-          <a:lstStyle/>
-          <a:p>
-            <a:endParaRPr lang="en-US"/>
-          </a:p>
-        </p:txBody>
-      </p:sp>
-      <p:sp>
-        <p:nvSpPr>
-          <p:cNvPr id="37" name="Text 35"/>
-          <p:cNvSpPr/>
-          <p:nvPr/>
-        </p:nvSpPr>
-        <p:spPr>
-          <a:xfrm>
-            <a:off x="777240" y="6172200"/>
-            <a:ext cx="10652760" cy="128016"/>
-          </a:xfrm>
-          <a:prstGeom prst="rect">
-            <a:avLst/>
-          </a:prstGeom>
-          <a:noFill/>
-          <a:ln/>
-        </p:spPr>
-        <p:txBody>
-          <a:bodyPr wrap="square" lIns="0" tIns="0" rIns="0" bIns="0" rtlCol="0" anchor="ctr"/>
-          <a:lstStyle/>
-          <a:p>
-            <a:pPr marL="0" indent="0" algn="ctr">
-              <a:buNone/>
-            </a:pPr>
-            <a:r>
-              <a:rPr lang="en-US" sz="820" b="1" dirty="0">
-                <a:solidFill>
-                  <a:srgbClr val="CC0000"/>
-                </a:solidFill>
-              </a:rPr>
-              <a:t>Feature summaries should match the process behavior that matters for the outcome.</a:t>
-            </a:r>
-            <a:endParaRPr lang="en-US" sz="820" dirty="0"/>
-          </a:p>
-        </p:txBody>
-      </p:sp>
-    </p:spTree>
-  </p:cSld>
-  <p:clrMapOvr>
-    <a:masterClrMapping/>
-  </p:clrMapOvr>
-</p:sld>
-</file>
-
-<file path=ppt/slides/slide11.xml><?xml version="1.0" encoding="utf-8"?>
 <p:sld xmlns:a="http://schemas.openxmlformats.org/drawingml/2006/main" xmlns:r="http://schemas.openxmlformats.org/officeDocument/2006/relationships" xmlns:p="http://schemas.openxmlformats.org/presentationml/2006/main">
   <p:cSld name="Slide 12">
     <p:bg>
@@ -3801,14 +2402,14 @@
               <a:buNone/>
             </a:pPr>
             <a:r>
-              <a:rPr lang="en-US" sz="550" b="1" dirty="0">
+              <a:rPr lang="en-US" sz="1200" b="1" dirty="0">
                 <a:solidFill>
                   <a:srgbClr val="555555"/>
                 </a:solidFill>
               </a:rPr>
               <a:t>APPLIED AI DESIGN WORKSHOP</a:t>
             </a:r>
-            <a:endParaRPr lang="en-US" sz="550" dirty="0"/>
+            <a:endParaRPr lang="en-US" sz="1200" dirty="0"/>
           </a:p>
         </p:txBody>
       </p:sp>
@@ -3837,14 +2438,14 @@
               <a:buNone/>
             </a:pPr>
             <a:r>
-              <a:rPr lang="en-US" sz="550" dirty="0">
+              <a:rPr lang="en-US" sz="1200" dirty="0">
                 <a:solidFill>
                   <a:srgbClr val="555555"/>
                 </a:solidFill>
               </a:rPr>
               <a:t>Session 3</a:t>
             </a:r>
-            <a:endParaRPr lang="en-US" sz="550" dirty="0"/>
+            <a:endParaRPr lang="en-US" sz="1200" dirty="0"/>
           </a:p>
         </p:txBody>
       </p:sp>
@@ -3911,14 +2512,14 @@
               <a:buNone/>
             </a:pPr>
             <a:r>
-              <a:rPr lang="en-US" sz="800" dirty="0">
+              <a:rPr lang="en-US" sz="1200" dirty="0">
                 <a:solidFill>
                   <a:srgbClr val="333333"/>
                 </a:solidFill>
               </a:rPr>
               <a:t>More variables are not always better. Selection can improve interpretation, cost, and robustness.</a:t>
             </a:r>
-            <a:endParaRPr lang="en-US" sz="800" dirty="0"/>
+            <a:endParaRPr lang="en-US" sz="1200" dirty="0"/>
           </a:p>
         </p:txBody>
       </p:sp>
@@ -4021,14 +2622,14 @@
               <a:buNone/>
             </a:pPr>
             <a:r>
-              <a:rPr lang="en-US" sz="850" dirty="0">
+              <a:rPr lang="en-US" sz="1200" dirty="0">
                 <a:solidFill>
                   <a:srgbClr val="111111"/>
                 </a:solidFill>
               </a:rPr>
               <a:t>Use correlation, variance, or statistical association before training a model.</a:t>
             </a:r>
-            <a:endParaRPr lang="en-US" sz="850" dirty="0"/>
+            <a:endParaRPr lang="en-US" sz="1200" dirty="0"/>
           </a:p>
         </p:txBody>
       </p:sp>
@@ -4131,14 +2732,14 @@
               <a:buNone/>
             </a:pPr>
             <a:r>
-              <a:rPr lang="en-US" sz="850" dirty="0">
+              <a:rPr lang="en-US" sz="1200" dirty="0">
                 <a:solidFill>
                   <a:srgbClr val="111111"/>
                 </a:solidFill>
               </a:rPr>
               <a:t>Use model structure such as Lasso coefficients or tree-based importance.</a:t>
             </a:r>
-            <a:endParaRPr lang="en-US" sz="850" dirty="0"/>
+            <a:endParaRPr lang="en-US" sz="1200" dirty="0"/>
           </a:p>
         </p:txBody>
       </p:sp>
@@ -4172,7 +2773,7 @@
           <a:bodyPr/>
           <a:lstStyle/>
           <a:p>
-            <a:endParaRPr lang="en-US"/>
+            <a:endParaRPr lang="en-US" dirty="0"/>
           </a:p>
         </p:txBody>
       </p:sp>
@@ -4241,14 +2842,14 @@
               <a:buNone/>
             </a:pPr>
             <a:r>
-              <a:rPr lang="en-US" sz="850" dirty="0">
+              <a:rPr lang="en-US" sz="1200" dirty="0">
                 <a:solidFill>
                   <a:srgbClr val="111111"/>
                 </a:solidFill>
               </a:rPr>
               <a:t>Keep variables that are reliable, available early, and meaningful to collaborators.</a:t>
             </a:r>
-            <a:endParaRPr lang="en-US" sz="850" dirty="0"/>
+            <a:endParaRPr lang="en-US" sz="1200" dirty="0"/>
           </a:p>
         </p:txBody>
       </p:sp>
@@ -4277,14 +2878,14 @@
               <a:buNone/>
             </a:pPr>
             <a:r>
-              <a:rPr lang="en-US" sz="1000" b="1" dirty="0">
+              <a:rPr lang="en-US" sz="1200" b="1" dirty="0">
                 <a:solidFill>
                   <a:srgbClr val="CC0000"/>
                 </a:solidFill>
               </a:rPr>
               <a:t>Selection criteria</a:t>
             </a:r>
-            <a:endParaRPr lang="en-US" sz="1000" dirty="0"/>
+            <a:endParaRPr lang="en-US" sz="1200" dirty="0"/>
           </a:p>
         </p:txBody>
       </p:sp>
@@ -4341,7 +2942,7 @@
         </p:spPr>
         <p:txBody>
           <a:bodyPr wrap="square" lIns="0" tIns="0" rIns="0" bIns="0" rtlCol="0" anchor="ctr">
-            <a:normAutofit/>
+            <a:noAutofit/>
           </a:bodyPr>
           <a:lstStyle/>
           <a:p>
@@ -4349,14 +2950,14 @@
               <a:buNone/>
             </a:pPr>
             <a:r>
-              <a:rPr lang="en-US" sz="780" b="1" dirty="0">
+              <a:rPr lang="en-US" sz="1200" b="1" dirty="0">
                 <a:solidFill>
                   <a:srgbClr val="FFFFFF"/>
                 </a:solidFill>
               </a:rPr>
               <a:t>Predictive value</a:t>
             </a:r>
-            <a:endParaRPr lang="en-US" sz="780" dirty="0"/>
+            <a:endParaRPr lang="en-US" sz="1200" dirty="0"/>
           </a:p>
         </p:txBody>
       </p:sp>
@@ -4413,7 +3014,7 @@
         </p:spPr>
         <p:txBody>
           <a:bodyPr wrap="square" lIns="0" tIns="0" rIns="0" bIns="0" rtlCol="0" anchor="ctr">
-            <a:normAutofit/>
+            <a:noAutofit/>
           </a:bodyPr>
           <a:lstStyle/>
           <a:p>
@@ -4421,14 +3022,14 @@
               <a:buNone/>
             </a:pPr>
             <a:r>
-              <a:rPr lang="en-US" sz="780" b="1" dirty="0">
+              <a:rPr lang="en-US" sz="1200" b="1" dirty="0">
                 <a:solidFill>
                   <a:srgbClr val="FFFFFF"/>
                 </a:solidFill>
               </a:rPr>
               <a:t>Interpretability</a:t>
             </a:r>
-            <a:endParaRPr lang="en-US" sz="780" dirty="0"/>
+            <a:endParaRPr lang="en-US" sz="1200" dirty="0"/>
           </a:p>
         </p:txBody>
       </p:sp>
@@ -4485,7 +3086,7 @@
         </p:spPr>
         <p:txBody>
           <a:bodyPr wrap="square" lIns="0" tIns="0" rIns="0" bIns="0" rtlCol="0" anchor="ctr">
-            <a:normAutofit/>
+            <a:noAutofit/>
           </a:bodyPr>
           <a:lstStyle/>
           <a:p>
@@ -4493,14 +3094,14 @@
               <a:buNone/>
             </a:pPr>
             <a:r>
-              <a:rPr lang="en-US" sz="780" b="1" dirty="0">
+              <a:rPr lang="en-US" sz="1200" b="1" dirty="0">
                 <a:solidFill>
                   <a:srgbClr val="FFFFFF"/>
                 </a:solidFill>
               </a:rPr>
               <a:t>Measurement cost</a:t>
             </a:r>
-            <a:endParaRPr lang="en-US" sz="780" dirty="0"/>
+            <a:endParaRPr lang="en-US" sz="1200" dirty="0"/>
           </a:p>
         </p:txBody>
       </p:sp>
@@ -4557,7 +3158,7 @@
         </p:spPr>
         <p:txBody>
           <a:bodyPr wrap="square" lIns="0" tIns="0" rIns="0" bIns="0" rtlCol="0" anchor="ctr">
-            <a:normAutofit/>
+            <a:noAutofit/>
           </a:bodyPr>
           <a:lstStyle/>
           <a:p>
@@ -4565,14 +3166,14 @@
               <a:buNone/>
             </a:pPr>
             <a:r>
-              <a:rPr lang="en-US" sz="780" b="1" dirty="0">
+              <a:rPr lang="en-US" sz="1200" b="1" dirty="0">
                 <a:solidFill>
                   <a:srgbClr val="FFFFFF"/>
                 </a:solidFill>
               </a:rPr>
               <a:t>Available at prediction time</a:t>
             </a:r>
-            <a:endParaRPr lang="en-US" sz="780" dirty="0"/>
+            <a:endParaRPr lang="en-US" sz="1200" dirty="0"/>
           </a:p>
         </p:txBody>
       </p:sp>
@@ -4629,7 +3230,7 @@
         </p:spPr>
         <p:txBody>
           <a:bodyPr wrap="square" lIns="0" tIns="0" rIns="0" bIns="0" rtlCol="0" anchor="ctr">
-            <a:normAutofit/>
+            <a:noAutofit/>
           </a:bodyPr>
           <a:lstStyle/>
           <a:p>
@@ -4637,14 +3238,14 @@
               <a:buNone/>
             </a:pPr>
             <a:r>
-              <a:rPr lang="en-US" sz="780" b="1" dirty="0">
+              <a:rPr lang="en-US" sz="1200" b="1" dirty="0">
                 <a:solidFill>
                   <a:srgbClr val="FFFFFF"/>
                 </a:solidFill>
               </a:rPr>
               <a:t>Robust across groups</a:t>
             </a:r>
-            <a:endParaRPr lang="en-US" sz="780" dirty="0"/>
+            <a:endParaRPr lang="en-US" sz="1200" dirty="0"/>
           </a:p>
         </p:txBody>
       </p:sp>
@@ -4707,14 +3308,14 @@
               <a:buNone/>
             </a:pPr>
             <a:r>
-              <a:rPr lang="en-US" sz="820" b="1" dirty="0">
+              <a:rPr lang="en-US" sz="1200" b="1" dirty="0">
                 <a:solidFill>
                   <a:srgbClr val="CC0000"/>
                 </a:solidFill>
               </a:rPr>
               <a:t>Feature selection is a design decision, not only a statistical procedure.</a:t>
             </a:r>
-            <a:endParaRPr lang="en-US" sz="820" dirty="0"/>
+            <a:endParaRPr lang="en-US" sz="1200" dirty="0"/>
           </a:p>
         </p:txBody>
       </p:sp>
@@ -4726,7 +3327,7 @@
 </p:sld>
 </file>
 
-<file path=ppt/slides/slide12.xml><?xml version="1.0" encoding="utf-8"?>
+<file path=ppt/slides/slide11.xml><?xml version="1.0" encoding="utf-8"?>
 <p:sld xmlns:a="http://schemas.openxmlformats.org/drawingml/2006/main" xmlns:r="http://schemas.openxmlformats.org/officeDocument/2006/relationships" xmlns:p="http://schemas.openxmlformats.org/presentationml/2006/main">
   <p:cSld name="Slide 13">
     <p:bg>
@@ -4808,14 +3409,14 @@
               <a:buNone/>
             </a:pPr>
             <a:r>
-              <a:rPr lang="en-US" sz="550" b="1" dirty="0">
+              <a:rPr lang="en-US" sz="1200" b="1" dirty="0">
                 <a:solidFill>
                   <a:srgbClr val="555555"/>
                 </a:solidFill>
               </a:rPr>
               <a:t>APPLIED AI DESIGN WORKSHOP</a:t>
             </a:r>
-            <a:endParaRPr lang="en-US" sz="550" dirty="0"/>
+            <a:endParaRPr lang="en-US" sz="1200" dirty="0"/>
           </a:p>
         </p:txBody>
       </p:sp>
@@ -4844,14 +3445,14 @@
               <a:buNone/>
             </a:pPr>
             <a:r>
-              <a:rPr lang="en-US" sz="550" dirty="0">
+              <a:rPr lang="en-US" sz="1200" dirty="0">
                 <a:solidFill>
                   <a:srgbClr val="555555"/>
                 </a:solidFill>
               </a:rPr>
               <a:t>Session 3</a:t>
             </a:r>
-            <a:endParaRPr lang="en-US" sz="550" dirty="0"/>
+            <a:endParaRPr lang="en-US" sz="1200" dirty="0"/>
           </a:p>
         </p:txBody>
       </p:sp>
@@ -4918,14 +3519,14 @@
               <a:buNone/>
             </a:pPr>
             <a:r>
-              <a:rPr lang="en-US" sz="800" dirty="0">
+              <a:rPr lang="en-US" sz="1200" dirty="0">
                 <a:solidFill>
                   <a:srgbClr val="333333"/>
                 </a:solidFill>
               </a:rPr>
               <a:t>Goal: quickly inspect structure, missingness, variable types, and target balance.</a:t>
             </a:r>
-            <a:endParaRPr lang="en-US" sz="800" dirty="0"/>
+            <a:endParaRPr lang="en-US" sz="1200" dirty="0"/>
           </a:p>
         </p:txBody>
       </p:sp>
@@ -4946,7 +3547,7 @@
             </a:avLst>
           </a:prstGeom>
           <a:solidFill>
-            <a:srgbClr val="F5F5F5"/>
+            <a:schemeClr val="tx2"/>
           </a:solidFill>
           <a:ln w="7620">
             <a:solidFill>
@@ -4959,7 +3560,11 @@
           <a:bodyPr/>
           <a:lstStyle/>
           <a:p>
-            <a:endParaRPr lang="en-US"/>
+            <a:endParaRPr lang="en-US">
+              <a:solidFill>
+                <a:srgbClr val="FF0000"/>
+              </a:solidFill>
+            </a:endParaRPr>
           </a:p>
         </p:txBody>
       </p:sp>
@@ -4990,9 +3595,11 @@
               <a:buNone/>
             </a:pPr>
             <a:r>
-              <a:rPr lang="en-US" sz="820" dirty="0">
-                <a:solidFill>
-                  <a:srgbClr val="222222"/>
+              <a:rPr lang="en-US" sz="1400" dirty="0">
+                <a:solidFill>
+                  <a:schemeClr val="bg1">
+                    <a:lumMod val="95000"/>
+                  </a:schemeClr>
                 </a:solidFill>
                 <a:latin typeface="Courier New" pitchFamily="34" charset="0"/>
                 <a:ea typeface="Courier New" pitchFamily="34" charset="-122"/>
@@ -5000,22 +3607,36 @@
               </a:rPr>
               <a:t>import pandas as pd</a:t>
             </a:r>
-            <a:endParaRPr lang="en-US" sz="820" dirty="0"/>
-          </a:p>
-          <a:p>
-            <a:pPr marL="0" indent="0">
-              <a:buNone/>
-            </a:pPr>
-            <a:endParaRPr lang="en-US" sz="820" dirty="0"/>
-          </a:p>
-          <a:p>
-            <a:pPr marL="0" indent="0">
-              <a:buNone/>
-            </a:pPr>
-            <a:r>
-              <a:rPr lang="en-US" sz="820" dirty="0">
-                <a:solidFill>
-                  <a:srgbClr val="222222"/>
+            <a:endParaRPr lang="en-US" sz="1400" dirty="0">
+              <a:solidFill>
+                <a:schemeClr val="bg1">
+                  <a:lumMod val="95000"/>
+                </a:schemeClr>
+              </a:solidFill>
+            </a:endParaRPr>
+          </a:p>
+          <a:p>
+            <a:pPr marL="0" indent="0">
+              <a:buNone/>
+            </a:pPr>
+            <a:endParaRPr lang="en-US" sz="1400" dirty="0">
+              <a:solidFill>
+                <a:schemeClr val="bg1">
+                  <a:lumMod val="95000"/>
+                </a:schemeClr>
+              </a:solidFill>
+            </a:endParaRPr>
+          </a:p>
+          <a:p>
+            <a:pPr marL="0" indent="0">
+              <a:buNone/>
+            </a:pPr>
+            <a:r>
+              <a:rPr lang="en-US" sz="1400" dirty="0">
+                <a:solidFill>
+                  <a:schemeClr val="bg1">
+                    <a:lumMod val="95000"/>
+                  </a:schemeClr>
                 </a:solidFill>
                 <a:latin typeface="Courier New" pitchFamily="34" charset="0"/>
                 <a:ea typeface="Courier New" pitchFamily="34" charset="-122"/>
@@ -5023,22 +3644,36 @@
               </a:rPr>
               <a:t>df = pd.read_csv("process_data.csv")</a:t>
             </a:r>
-            <a:endParaRPr lang="en-US" sz="820" dirty="0"/>
-          </a:p>
-          <a:p>
-            <a:pPr marL="0" indent="0">
-              <a:buNone/>
-            </a:pPr>
-            <a:endParaRPr lang="en-US" sz="820" dirty="0"/>
-          </a:p>
-          <a:p>
-            <a:pPr marL="0" indent="0">
-              <a:buNone/>
-            </a:pPr>
-            <a:r>
-              <a:rPr lang="en-US" sz="820" dirty="0">
-                <a:solidFill>
-                  <a:srgbClr val="222222"/>
+            <a:endParaRPr lang="en-US" sz="1400" dirty="0">
+              <a:solidFill>
+                <a:schemeClr val="bg1">
+                  <a:lumMod val="95000"/>
+                </a:schemeClr>
+              </a:solidFill>
+            </a:endParaRPr>
+          </a:p>
+          <a:p>
+            <a:pPr marL="0" indent="0">
+              <a:buNone/>
+            </a:pPr>
+            <a:endParaRPr lang="en-US" sz="1400" dirty="0">
+              <a:solidFill>
+                <a:schemeClr val="bg1">
+                  <a:lumMod val="95000"/>
+                </a:schemeClr>
+              </a:solidFill>
+            </a:endParaRPr>
+          </a:p>
+          <a:p>
+            <a:pPr marL="0" indent="0">
+              <a:buNone/>
+            </a:pPr>
+            <a:r>
+              <a:rPr lang="en-US" sz="1400" dirty="0">
+                <a:solidFill>
+                  <a:schemeClr val="bg1">
+                    <a:lumMod val="95000"/>
+                  </a:schemeClr>
                 </a:solidFill>
                 <a:latin typeface="Courier New" pitchFamily="34" charset="0"/>
                 <a:ea typeface="Courier New" pitchFamily="34" charset="-122"/>
@@ -5046,16 +3681,24 @@
               </a:rPr>
               <a:t>print(df.shape)</a:t>
             </a:r>
-            <a:endParaRPr lang="en-US" sz="820" dirty="0"/>
-          </a:p>
-          <a:p>
-            <a:pPr marL="0" indent="0">
-              <a:buNone/>
-            </a:pPr>
-            <a:r>
-              <a:rPr lang="en-US" sz="820" dirty="0">
-                <a:solidFill>
-                  <a:srgbClr val="222222"/>
+            <a:endParaRPr lang="en-US" sz="1400" dirty="0">
+              <a:solidFill>
+                <a:schemeClr val="bg1">
+                  <a:lumMod val="95000"/>
+                </a:schemeClr>
+              </a:solidFill>
+            </a:endParaRPr>
+          </a:p>
+          <a:p>
+            <a:pPr marL="0" indent="0">
+              <a:buNone/>
+            </a:pPr>
+            <a:r>
+              <a:rPr lang="en-US" sz="1400" dirty="0">
+                <a:solidFill>
+                  <a:schemeClr val="bg1">
+                    <a:lumMod val="95000"/>
+                  </a:schemeClr>
                 </a:solidFill>
                 <a:latin typeface="Courier New" pitchFamily="34" charset="0"/>
                 <a:ea typeface="Courier New" pitchFamily="34" charset="-122"/>
@@ -5063,22 +3706,36 @@
               </a:rPr>
               <a:t>display(df.head())</a:t>
             </a:r>
-            <a:endParaRPr lang="en-US" sz="820" dirty="0"/>
-          </a:p>
-          <a:p>
-            <a:pPr marL="0" indent="0">
-              <a:buNone/>
-            </a:pPr>
-            <a:endParaRPr lang="en-US" sz="820" dirty="0"/>
-          </a:p>
-          <a:p>
-            <a:pPr marL="0" indent="0">
-              <a:buNone/>
-            </a:pPr>
-            <a:r>
-              <a:rPr lang="en-US" sz="820" dirty="0">
-                <a:solidFill>
-                  <a:srgbClr val="222222"/>
+            <a:endParaRPr lang="en-US" sz="1400" dirty="0">
+              <a:solidFill>
+                <a:schemeClr val="bg1">
+                  <a:lumMod val="95000"/>
+                </a:schemeClr>
+              </a:solidFill>
+            </a:endParaRPr>
+          </a:p>
+          <a:p>
+            <a:pPr marL="0" indent="0">
+              <a:buNone/>
+            </a:pPr>
+            <a:endParaRPr lang="en-US" sz="1400" dirty="0">
+              <a:solidFill>
+                <a:schemeClr val="bg1">
+                  <a:lumMod val="95000"/>
+                </a:schemeClr>
+              </a:solidFill>
+            </a:endParaRPr>
+          </a:p>
+          <a:p>
+            <a:pPr marL="0" indent="0">
+              <a:buNone/>
+            </a:pPr>
+            <a:r>
+              <a:rPr lang="en-US" sz="1400" dirty="0">
+                <a:solidFill>
+                  <a:schemeClr val="bg1">
+                    <a:lumMod val="95000"/>
+                  </a:schemeClr>
                 </a:solidFill>
                 <a:latin typeface="Courier New" pitchFamily="34" charset="0"/>
                 <a:ea typeface="Courier New" pitchFamily="34" charset="-122"/>
@@ -5086,16 +3743,24 @@
               </a:rPr>
               <a:t>summary = pd.DataFrame({</a:t>
             </a:r>
-            <a:endParaRPr lang="en-US" sz="820" dirty="0"/>
-          </a:p>
-          <a:p>
-            <a:pPr marL="0" indent="0">
-              <a:buNone/>
-            </a:pPr>
-            <a:r>
-              <a:rPr lang="en-US" sz="820" dirty="0">
-                <a:solidFill>
-                  <a:srgbClr val="222222"/>
+            <a:endParaRPr lang="en-US" sz="1400" dirty="0">
+              <a:solidFill>
+                <a:schemeClr val="bg1">
+                  <a:lumMod val="95000"/>
+                </a:schemeClr>
+              </a:solidFill>
+            </a:endParaRPr>
+          </a:p>
+          <a:p>
+            <a:pPr marL="0" indent="0">
+              <a:buNone/>
+            </a:pPr>
+            <a:r>
+              <a:rPr lang="en-US" sz="1400" dirty="0">
+                <a:solidFill>
+                  <a:schemeClr val="bg1">
+                    <a:lumMod val="95000"/>
+                  </a:schemeClr>
                 </a:solidFill>
                 <a:latin typeface="Courier New" pitchFamily="34" charset="0"/>
                 <a:ea typeface="Courier New" pitchFamily="34" charset="-122"/>
@@ -5103,16 +3768,24 @@
               </a:rPr>
               <a:t>    "dtype": df.dtypes.astype(str),</a:t>
             </a:r>
-            <a:endParaRPr lang="en-US" sz="820" dirty="0"/>
-          </a:p>
-          <a:p>
-            <a:pPr marL="0" indent="0">
-              <a:buNone/>
-            </a:pPr>
-            <a:r>
-              <a:rPr lang="en-US" sz="820" dirty="0">
-                <a:solidFill>
-                  <a:srgbClr val="222222"/>
+            <a:endParaRPr lang="en-US" sz="1400" dirty="0">
+              <a:solidFill>
+                <a:schemeClr val="bg1">
+                  <a:lumMod val="95000"/>
+                </a:schemeClr>
+              </a:solidFill>
+            </a:endParaRPr>
+          </a:p>
+          <a:p>
+            <a:pPr marL="0" indent="0">
+              <a:buNone/>
+            </a:pPr>
+            <a:r>
+              <a:rPr lang="en-US" sz="1400" dirty="0">
+                <a:solidFill>
+                  <a:schemeClr val="bg1">
+                    <a:lumMod val="95000"/>
+                  </a:schemeClr>
                 </a:solidFill>
                 <a:latin typeface="Courier New" pitchFamily="34" charset="0"/>
                 <a:ea typeface="Courier New" pitchFamily="34" charset="-122"/>
@@ -5120,16 +3793,24 @@
               </a:rPr>
               <a:t>    "missing": df.isna().sum(),</a:t>
             </a:r>
-            <a:endParaRPr lang="en-US" sz="820" dirty="0"/>
-          </a:p>
-          <a:p>
-            <a:pPr marL="0" indent="0">
-              <a:buNone/>
-            </a:pPr>
-            <a:r>
-              <a:rPr lang="en-US" sz="820" dirty="0">
-                <a:solidFill>
-                  <a:srgbClr val="222222"/>
+            <a:endParaRPr lang="en-US" sz="1400" dirty="0">
+              <a:solidFill>
+                <a:schemeClr val="bg1">
+                  <a:lumMod val="95000"/>
+                </a:schemeClr>
+              </a:solidFill>
+            </a:endParaRPr>
+          </a:p>
+          <a:p>
+            <a:pPr marL="0" indent="0">
+              <a:buNone/>
+            </a:pPr>
+            <a:r>
+              <a:rPr lang="en-US" sz="1400" dirty="0">
+                <a:solidFill>
+                  <a:schemeClr val="bg1">
+                    <a:lumMod val="95000"/>
+                  </a:schemeClr>
                 </a:solidFill>
                 <a:latin typeface="Courier New" pitchFamily="34" charset="0"/>
                 <a:ea typeface="Courier New" pitchFamily="34" charset="-122"/>
@@ -5137,16 +3818,24 @@
               </a:rPr>
               <a:t>    "unique": df.nunique()</a:t>
             </a:r>
-            <a:endParaRPr lang="en-US" sz="820" dirty="0"/>
-          </a:p>
-          <a:p>
-            <a:pPr marL="0" indent="0">
-              <a:buNone/>
-            </a:pPr>
-            <a:r>
-              <a:rPr lang="en-US" sz="820" dirty="0">
-                <a:solidFill>
-                  <a:srgbClr val="222222"/>
+            <a:endParaRPr lang="en-US" sz="1400" dirty="0">
+              <a:solidFill>
+                <a:schemeClr val="bg1">
+                  <a:lumMod val="95000"/>
+                </a:schemeClr>
+              </a:solidFill>
+            </a:endParaRPr>
+          </a:p>
+          <a:p>
+            <a:pPr marL="0" indent="0">
+              <a:buNone/>
+            </a:pPr>
+            <a:r>
+              <a:rPr lang="en-US" sz="1400" dirty="0">
+                <a:solidFill>
+                  <a:schemeClr val="bg1">
+                    <a:lumMod val="95000"/>
+                  </a:schemeClr>
                 </a:solidFill>
                 <a:latin typeface="Courier New" pitchFamily="34" charset="0"/>
                 <a:ea typeface="Courier New" pitchFamily="34" charset="-122"/>
@@ -5154,22 +3843,36 @@
               </a:rPr>
               <a:t>})</a:t>
             </a:r>
-            <a:endParaRPr lang="en-US" sz="820" dirty="0"/>
-          </a:p>
-          <a:p>
-            <a:pPr marL="0" indent="0">
-              <a:buNone/>
-            </a:pPr>
-            <a:endParaRPr lang="en-US" sz="820" dirty="0"/>
-          </a:p>
-          <a:p>
-            <a:pPr marL="0" indent="0">
-              <a:buNone/>
-            </a:pPr>
-            <a:r>
-              <a:rPr lang="en-US" sz="820" dirty="0">
-                <a:solidFill>
-                  <a:srgbClr val="222222"/>
+            <a:endParaRPr lang="en-US" sz="1400" dirty="0">
+              <a:solidFill>
+                <a:schemeClr val="bg1">
+                  <a:lumMod val="95000"/>
+                </a:schemeClr>
+              </a:solidFill>
+            </a:endParaRPr>
+          </a:p>
+          <a:p>
+            <a:pPr marL="0" indent="0">
+              <a:buNone/>
+            </a:pPr>
+            <a:endParaRPr lang="en-US" sz="1400" dirty="0">
+              <a:solidFill>
+                <a:schemeClr val="bg1">
+                  <a:lumMod val="95000"/>
+                </a:schemeClr>
+              </a:solidFill>
+            </a:endParaRPr>
+          </a:p>
+          <a:p>
+            <a:pPr marL="0" indent="0">
+              <a:buNone/>
+            </a:pPr>
+            <a:r>
+              <a:rPr lang="en-US" sz="1400" dirty="0">
+                <a:solidFill>
+                  <a:schemeClr val="bg1">
+                    <a:lumMod val="95000"/>
+                  </a:schemeClr>
                 </a:solidFill>
                 <a:latin typeface="Courier New" pitchFamily="34" charset="0"/>
                 <a:ea typeface="Courier New" pitchFamily="34" charset="-122"/>
@@ -5177,22 +3880,36 @@
               </a:rPr>
               <a:t>display(summary)</a:t>
             </a:r>
-            <a:endParaRPr lang="en-US" sz="820" dirty="0"/>
-          </a:p>
-          <a:p>
-            <a:pPr marL="0" indent="0">
-              <a:buNone/>
-            </a:pPr>
-            <a:endParaRPr lang="en-US" sz="820" dirty="0"/>
-          </a:p>
-          <a:p>
-            <a:pPr marL="0" indent="0">
-              <a:buNone/>
-            </a:pPr>
-            <a:r>
-              <a:rPr lang="en-US" sz="820" dirty="0">
-                <a:solidFill>
-                  <a:srgbClr val="222222"/>
+            <a:endParaRPr lang="en-US" sz="1400" dirty="0">
+              <a:solidFill>
+                <a:schemeClr val="bg1">
+                  <a:lumMod val="95000"/>
+                </a:schemeClr>
+              </a:solidFill>
+            </a:endParaRPr>
+          </a:p>
+          <a:p>
+            <a:pPr marL="0" indent="0">
+              <a:buNone/>
+            </a:pPr>
+            <a:endParaRPr lang="en-US" sz="1400" dirty="0">
+              <a:solidFill>
+                <a:schemeClr val="bg1">
+                  <a:lumMod val="95000"/>
+                </a:schemeClr>
+              </a:solidFill>
+            </a:endParaRPr>
+          </a:p>
+          <a:p>
+            <a:pPr marL="0" indent="0">
+              <a:buNone/>
+            </a:pPr>
+            <a:r>
+              <a:rPr lang="en-US" sz="1400" dirty="0">
+                <a:solidFill>
+                  <a:schemeClr val="bg1">
+                    <a:lumMod val="95000"/>
+                  </a:schemeClr>
                 </a:solidFill>
                 <a:latin typeface="Courier New" pitchFamily="34" charset="0"/>
                 <a:ea typeface="Courier New" pitchFamily="34" charset="-122"/>
@@ -5200,16 +3917,24 @@
               </a:rPr>
               <a:t># For classification targets</a:t>
             </a:r>
-            <a:endParaRPr lang="en-US" sz="820" dirty="0"/>
-          </a:p>
-          <a:p>
-            <a:pPr marL="0" indent="0">
-              <a:buNone/>
-            </a:pPr>
-            <a:r>
-              <a:rPr lang="en-US" sz="820" dirty="0">
-                <a:solidFill>
-                  <a:srgbClr val="222222"/>
+            <a:endParaRPr lang="en-US" sz="1400" dirty="0">
+              <a:solidFill>
+                <a:schemeClr val="bg1">
+                  <a:lumMod val="95000"/>
+                </a:schemeClr>
+              </a:solidFill>
+            </a:endParaRPr>
+          </a:p>
+          <a:p>
+            <a:pPr marL="0" indent="0">
+              <a:buNone/>
+            </a:pPr>
+            <a:r>
+              <a:rPr lang="en-US" sz="1400" dirty="0">
+                <a:solidFill>
+                  <a:schemeClr val="bg1">
+                    <a:lumMod val="95000"/>
+                  </a:schemeClr>
                 </a:solidFill>
                 <a:latin typeface="Courier New" pitchFamily="34" charset="0"/>
                 <a:ea typeface="Courier New" pitchFamily="34" charset="-122"/>
@@ -5217,7 +3942,13 @@
               </a:rPr>
               <a:t>display(df["defect"].value_counts(normalize=True))</a:t>
             </a:r>
-            <a:endParaRPr lang="en-US" sz="820" dirty="0"/>
+            <a:endParaRPr lang="en-US" sz="1400" dirty="0">
+              <a:solidFill>
+                <a:schemeClr val="bg1">
+                  <a:lumMod val="95000"/>
+                </a:schemeClr>
+              </a:solidFill>
+            </a:endParaRPr>
           </a:p>
         </p:txBody>
       </p:sp>
@@ -5251,7 +3982,7 @@
           <a:bodyPr/>
           <a:lstStyle/>
           <a:p>
-            <a:endParaRPr lang="en-US"/>
+            <a:endParaRPr lang="en-US" dirty="0"/>
           </a:p>
         </p:txBody>
       </p:sp>
@@ -5320,14 +4051,14 @@
               <a:buNone/>
             </a:pPr>
             <a:r>
-              <a:rPr lang="en-US" sz="850" dirty="0">
+              <a:rPr lang="en-US" sz="1200" dirty="0">
                 <a:solidFill>
                   <a:srgbClr val="111111"/>
                 </a:solidFill>
               </a:rPr>
               <a:t>This audit should happen before selecting an algorithm.</a:t>
             </a:r>
-            <a:endParaRPr lang="en-US" sz="850" dirty="0"/>
+            <a:endParaRPr lang="en-US" sz="1200" dirty="0"/>
           </a:p>
         </p:txBody>
       </p:sp>
@@ -5397,7 +4128,7 @@
                   <a:srgbClr val="CC0000"/>
                 </a:solidFill>
               </a:rPr>
-              <a:t>Instructor prompt</a:t>
+              <a:t>prompt</a:t>
             </a:r>
             <a:endParaRPr lang="en-US" sz="950" dirty="0"/>
           </a:p>
@@ -5430,39 +4161,45 @@
               <a:buNone/>
             </a:pPr>
             <a:r>
-              <a:rPr lang="en-US" sz="900" dirty="0">
+              <a:rPr lang="en-US" sz="1200" dirty="0">
                 <a:solidFill>
                   <a:srgbClr val="111111"/>
                 </a:solidFill>
               </a:rPr>
               <a:t>“What would stop us from trusting a model trained on this table?”</a:t>
             </a:r>
-            <a:endParaRPr lang="en-US" sz="900" dirty="0"/>
-          </a:p>
-        </p:txBody>
-      </p:sp>
-      <p:sp>
-        <p:nvSpPr>
-          <p:cNvPr id="15" name="Shape 13"/>
-          <p:cNvSpPr/>
-          <p:nvPr/>
-        </p:nvSpPr>
-        <p:spPr>
-          <a:xfrm>
-            <a:off x="7818120" y="4343400"/>
-            <a:ext cx="3154680" cy="685800"/>
+            <a:endParaRPr lang="en-US" sz="1200" dirty="0"/>
+          </a:p>
+        </p:txBody>
+      </p:sp>
+      <p:sp>
+        <p:nvSpPr>
+          <p:cNvPr id="19" name="Shape 33">
+            <a:extLst>
+              <a:ext uri="{FF2B5EF4-FFF2-40B4-BE49-F238E27FC236}">
+                <a16:creationId xmlns:a16="http://schemas.microsoft.com/office/drawing/2014/main" id="{8726F5FA-5585-A7E1-681A-6E211B5B91D6}"/>
+              </a:ext>
+            </a:extLst>
+          </p:cNvPr>
+          <p:cNvSpPr/>
+          <p:nvPr/>
+        </p:nvSpPr>
+        <p:spPr>
+          <a:xfrm>
+            <a:off x="6601968" y="5660136"/>
+            <a:ext cx="1417320" cy="292608"/>
           </a:xfrm>
           <a:prstGeom prst="roundRect">
             <a:avLst>
-              <a:gd name="adj" fmla="val 6667"/>
+              <a:gd name="adj" fmla="val 25000"/>
             </a:avLst>
           </a:prstGeom>
           <a:solidFill>
-            <a:srgbClr val="F7F7F7"/>
+            <a:srgbClr val="7C3AED"/>
           </a:solidFill>
-          <a:ln w="7620">
+          <a:ln w="12700">
             <a:solidFill>
-              <a:srgbClr val="E6E6E6"/>
+              <a:srgbClr val="7C3AED"/>
             </a:solidFill>
             <a:prstDash val="solid"/>
           </a:ln>
@@ -5477,77 +4214,85 @@
       </p:sp>
       <p:sp>
         <p:nvSpPr>
-          <p:cNvPr id="16" name="Text 14"/>
-          <p:cNvSpPr/>
-          <p:nvPr/>
-        </p:nvSpPr>
-        <p:spPr>
-          <a:xfrm>
-            <a:off x="7964424" y="4462272"/>
-            <a:ext cx="2862072" cy="228600"/>
-          </a:xfrm>
-          <a:prstGeom prst="rect">
-            <a:avLst/>
-          </a:prstGeom>
-          <a:noFill/>
-          <a:ln/>
-        </p:spPr>
-        <p:txBody>
-          <a:bodyPr wrap="square" lIns="0" tIns="0" rIns="0" bIns="0" rtlCol="0" anchor="ctr">
-            <a:normAutofit/>
-          </a:bodyPr>
-          <a:lstStyle/>
-          <a:p>
-            <a:pPr marL="0" indent="0">
-              <a:buNone/>
-            </a:pPr>
-            <a:r>
-              <a:rPr lang="en-US" sz="950" b="1" dirty="0">
-                <a:solidFill>
-                  <a:srgbClr val="CC0000"/>
-                </a:solidFill>
-              </a:rPr>
-              <a:t>Notebook</a:t>
-            </a:r>
-            <a:endParaRPr lang="en-US" sz="950" dirty="0"/>
-          </a:p>
-        </p:txBody>
-      </p:sp>
-      <p:sp>
-        <p:nvSpPr>
-          <p:cNvPr id="17" name="Text 15"/>
-          <p:cNvSpPr/>
-          <p:nvPr/>
-        </p:nvSpPr>
-        <p:spPr>
-          <a:xfrm>
-            <a:off x="7964424" y="4782312"/>
-            <a:ext cx="2862072" cy="155448"/>
-          </a:xfrm>
-          <a:prstGeom prst="rect">
-            <a:avLst/>
-          </a:prstGeom>
-          <a:noFill/>
-          <a:ln/>
-        </p:spPr>
-        <p:txBody>
-          <a:bodyPr wrap="square" lIns="0" tIns="0" rIns="0" bIns="0" rtlCol="0" anchor="t">
-            <a:normAutofit/>
-          </a:bodyPr>
-          <a:lstStyle/>
-          <a:p>
-            <a:pPr marL="0" indent="0">
-              <a:buNone/>
-            </a:pPr>
-            <a:r>
-              <a:rPr lang="en-US" sz="800" dirty="0">
-                <a:solidFill>
-                  <a:srgbClr val="111111"/>
-                </a:solidFill>
-              </a:rPr>
-              <a:t>Session 3 embedded notebook or data-preparation notebook</a:t>
-            </a:r>
-            <a:endParaRPr lang="en-US" sz="800" dirty="0"/>
+          <p:cNvPr id="21" name="Text 34">
+            <a:extLst>
+              <a:ext uri="{FF2B5EF4-FFF2-40B4-BE49-F238E27FC236}">
+                <a16:creationId xmlns:a16="http://schemas.microsoft.com/office/drawing/2014/main" id="{AC05EB8F-B6AF-84AF-A190-DCE0D001691C}"/>
+              </a:ext>
+            </a:extLst>
+          </p:cNvPr>
+          <p:cNvSpPr/>
+          <p:nvPr/>
+        </p:nvSpPr>
+        <p:spPr>
+          <a:xfrm>
+            <a:off x="6601968" y="5728716"/>
+            <a:ext cx="1417320" cy="128016"/>
+          </a:xfrm>
+          <a:prstGeom prst="rect">
+            <a:avLst/>
+          </a:prstGeom>
+          <a:noFill/>
+          <a:ln/>
+        </p:spPr>
+        <p:txBody>
+          <a:bodyPr wrap="square" lIns="0" tIns="0" rIns="0" bIns="0" rtlCol="0" anchor="ctr"/>
+          <a:lstStyle/>
+          <a:p>
+            <a:pPr marL="0" indent="0" algn="ctr">
+              <a:buNone/>
+            </a:pPr>
+            <a:r>
+              <a:rPr lang="en-US" sz="850" b="1" dirty="0">
+                <a:solidFill>
+                  <a:srgbClr val="FFFFFF"/>
+                </a:solidFill>
+              </a:rPr>
+              <a:t>Session 3 notebook</a:t>
+            </a:r>
+            <a:endParaRPr lang="en-US" sz="850" dirty="0"/>
+          </a:p>
+        </p:txBody>
+      </p:sp>
+      <p:sp>
+        <p:nvSpPr>
+          <p:cNvPr id="23" name="Text 35">
+            <a:extLst>
+              <a:ext uri="{FF2B5EF4-FFF2-40B4-BE49-F238E27FC236}">
+                <a16:creationId xmlns:a16="http://schemas.microsoft.com/office/drawing/2014/main" id="{8A3BD427-5D18-54E0-5DC7-964B6D4D1C79}"/>
+              </a:ext>
+            </a:extLst>
+          </p:cNvPr>
+          <p:cNvSpPr/>
+          <p:nvPr/>
+        </p:nvSpPr>
+        <p:spPr>
+          <a:xfrm>
+            <a:off x="8156448" y="5696712"/>
+            <a:ext cx="3657600" cy="164592"/>
+          </a:xfrm>
+          <a:prstGeom prst="rect">
+            <a:avLst/>
+          </a:prstGeom>
+          <a:noFill/>
+          <a:ln/>
+        </p:spPr>
+        <p:txBody>
+          <a:bodyPr wrap="square" lIns="0" tIns="0" rIns="0" bIns="0" rtlCol="0" anchor="ctr"/>
+          <a:lstStyle/>
+          <a:p>
+            <a:r>
+              <a:rPr lang="en-US" sz="1120" dirty="0">
+                <a:solidFill>
+                  <a:srgbClr val="111827"/>
+                </a:solidFill>
+                <a:latin typeface="Cascadia Mono" pitchFamily="34" charset="0"/>
+                <a:ea typeface="Cascadia Mono" pitchFamily="34" charset="-122"/>
+                <a:cs typeface="Cascadia Mono" pitchFamily="34" charset="-120"/>
+              </a:rPr>
+              <a:t>03_session3_data_preparation_feature_engineering.ipynb</a:t>
+            </a:r>
+            <a:endParaRPr lang="en-US" sz="1120" dirty="0"/>
           </a:p>
         </p:txBody>
       </p:sp>
@@ -5559,7 +4304,7 @@
 </p:sld>
 </file>
 
-<file path=ppt/slides/slide13.xml><?xml version="1.0" encoding="utf-8"?>
+<file path=ppt/slides/slide12.xml><?xml version="1.0" encoding="utf-8"?>
 <p:sld xmlns:a="http://schemas.openxmlformats.org/drawingml/2006/main" xmlns:r="http://schemas.openxmlformats.org/officeDocument/2006/relationships" xmlns:p="http://schemas.openxmlformats.org/presentationml/2006/main">
   <p:cSld name="Slide 14">
     <p:bg>
@@ -5641,14 +4386,14 @@
               <a:buNone/>
             </a:pPr>
             <a:r>
-              <a:rPr lang="en-US" sz="550" b="1" dirty="0">
+              <a:rPr lang="en-US" sz="1200" b="1" dirty="0">
                 <a:solidFill>
                   <a:srgbClr val="555555"/>
                 </a:solidFill>
               </a:rPr>
               <a:t>APPLIED AI DESIGN WORKSHOP</a:t>
             </a:r>
-            <a:endParaRPr lang="en-US" sz="550" dirty="0"/>
+            <a:endParaRPr lang="en-US" sz="1200" dirty="0"/>
           </a:p>
         </p:txBody>
       </p:sp>
@@ -5677,14 +4422,14 @@
               <a:buNone/>
             </a:pPr>
             <a:r>
-              <a:rPr lang="en-US" sz="550" dirty="0">
+              <a:rPr lang="en-US" sz="1200" dirty="0">
                 <a:solidFill>
                   <a:srgbClr val="555555"/>
                 </a:solidFill>
               </a:rPr>
               <a:t>Session 3</a:t>
             </a:r>
-            <a:endParaRPr lang="en-US" sz="550" dirty="0"/>
+            <a:endParaRPr lang="en-US" sz="1200" dirty="0"/>
           </a:p>
         </p:txBody>
       </p:sp>
@@ -5751,14 +4496,14 @@
               <a:buNone/>
             </a:pPr>
             <a:r>
-              <a:rPr lang="en-US" sz="800" dirty="0">
+              <a:rPr lang="en-US" sz="1200" dirty="0">
                 <a:solidFill>
                   <a:srgbClr val="333333"/>
                 </a:solidFill>
               </a:rPr>
               <a:t>Goal: fit preprocessing decisions on training data only and apply them consistently to test data.</a:t>
             </a:r>
-            <a:endParaRPr lang="en-US" sz="800" dirty="0"/>
+            <a:endParaRPr lang="en-US" sz="1200" dirty="0"/>
           </a:p>
         </p:txBody>
       </p:sp>
@@ -5779,7 +4524,7 @@
             </a:avLst>
           </a:prstGeom>
           <a:solidFill>
-            <a:srgbClr val="F5F5F5"/>
+            <a:schemeClr val="tx2"/>
           </a:solidFill>
           <a:ln w="7620">
             <a:solidFill>
@@ -5823,9 +4568,11 @@
               <a:buNone/>
             </a:pPr>
             <a:r>
-              <a:rPr lang="en-US" sz="760" dirty="0">
-                <a:solidFill>
-                  <a:srgbClr val="222222"/>
+              <a:rPr lang="en-US" sz="1200" dirty="0">
+                <a:solidFill>
+                  <a:schemeClr val="bg1">
+                    <a:lumMod val="95000"/>
+                  </a:schemeClr>
                 </a:solidFill>
                 <a:latin typeface="Courier New" pitchFamily="34" charset="0"/>
                 <a:ea typeface="Courier New" pitchFamily="34" charset="-122"/>
@@ -5833,16 +4580,24 @@
               </a:rPr>
               <a:t>from sklearn.compose import ColumnTransformer</a:t>
             </a:r>
-            <a:endParaRPr lang="en-US" sz="760" dirty="0"/>
-          </a:p>
-          <a:p>
-            <a:pPr marL="0" indent="0">
-              <a:buNone/>
-            </a:pPr>
-            <a:r>
-              <a:rPr lang="en-US" sz="760" dirty="0">
-                <a:solidFill>
-                  <a:srgbClr val="222222"/>
+            <a:endParaRPr lang="en-US" sz="1200" dirty="0">
+              <a:solidFill>
+                <a:schemeClr val="bg1">
+                  <a:lumMod val="95000"/>
+                </a:schemeClr>
+              </a:solidFill>
+            </a:endParaRPr>
+          </a:p>
+          <a:p>
+            <a:pPr marL="0" indent="0">
+              <a:buNone/>
+            </a:pPr>
+            <a:r>
+              <a:rPr lang="en-US" sz="1200" dirty="0">
+                <a:solidFill>
+                  <a:schemeClr val="bg1">
+                    <a:lumMod val="95000"/>
+                  </a:schemeClr>
                 </a:solidFill>
                 <a:latin typeface="Courier New" pitchFamily="34" charset="0"/>
                 <a:ea typeface="Courier New" pitchFamily="34" charset="-122"/>
@@ -5850,16 +4605,24 @@
               </a:rPr>
               <a:t>from sklearn.pipeline import Pipeline</a:t>
             </a:r>
-            <a:endParaRPr lang="en-US" sz="760" dirty="0"/>
-          </a:p>
-          <a:p>
-            <a:pPr marL="0" indent="0">
-              <a:buNone/>
-            </a:pPr>
-            <a:r>
-              <a:rPr lang="en-US" sz="760" dirty="0">
-                <a:solidFill>
-                  <a:srgbClr val="222222"/>
+            <a:endParaRPr lang="en-US" sz="1200" dirty="0">
+              <a:solidFill>
+                <a:schemeClr val="bg1">
+                  <a:lumMod val="95000"/>
+                </a:schemeClr>
+              </a:solidFill>
+            </a:endParaRPr>
+          </a:p>
+          <a:p>
+            <a:pPr marL="0" indent="0">
+              <a:buNone/>
+            </a:pPr>
+            <a:r>
+              <a:rPr lang="en-US" sz="1200" dirty="0">
+                <a:solidFill>
+                  <a:schemeClr val="bg1">
+                    <a:lumMod val="95000"/>
+                  </a:schemeClr>
                 </a:solidFill>
                 <a:latin typeface="Courier New" pitchFamily="34" charset="0"/>
                 <a:ea typeface="Courier New" pitchFamily="34" charset="-122"/>
@@ -5867,16 +4630,24 @@
               </a:rPr>
               <a:t>from sklearn.impute import SimpleImputer</a:t>
             </a:r>
-            <a:endParaRPr lang="en-US" sz="760" dirty="0"/>
-          </a:p>
-          <a:p>
-            <a:pPr marL="0" indent="0">
-              <a:buNone/>
-            </a:pPr>
-            <a:r>
-              <a:rPr lang="en-US" sz="760" dirty="0">
-                <a:solidFill>
-                  <a:srgbClr val="222222"/>
+            <a:endParaRPr lang="en-US" sz="1200" dirty="0">
+              <a:solidFill>
+                <a:schemeClr val="bg1">
+                  <a:lumMod val="95000"/>
+                </a:schemeClr>
+              </a:solidFill>
+            </a:endParaRPr>
+          </a:p>
+          <a:p>
+            <a:pPr marL="0" indent="0">
+              <a:buNone/>
+            </a:pPr>
+            <a:r>
+              <a:rPr lang="en-US" sz="1200" dirty="0">
+                <a:solidFill>
+                  <a:schemeClr val="bg1">
+                    <a:lumMod val="95000"/>
+                  </a:schemeClr>
                 </a:solidFill>
                 <a:latin typeface="Courier New" pitchFamily="34" charset="0"/>
                 <a:ea typeface="Courier New" pitchFamily="34" charset="-122"/>
@@ -5884,22 +4655,36 @@
               </a:rPr>
               <a:t>from sklearn.preprocessing import StandardScaler, OneHotEncoder</a:t>
             </a:r>
-            <a:endParaRPr lang="en-US" sz="760" dirty="0"/>
-          </a:p>
-          <a:p>
-            <a:pPr marL="0" indent="0">
-              <a:buNone/>
-            </a:pPr>
-            <a:endParaRPr lang="en-US" sz="760" dirty="0"/>
-          </a:p>
-          <a:p>
-            <a:pPr marL="0" indent="0">
-              <a:buNone/>
-            </a:pPr>
-            <a:r>
-              <a:rPr lang="en-US" sz="760" dirty="0">
-                <a:solidFill>
-                  <a:srgbClr val="222222"/>
+            <a:endParaRPr lang="en-US" sz="1200" dirty="0">
+              <a:solidFill>
+                <a:schemeClr val="bg1">
+                  <a:lumMod val="95000"/>
+                </a:schemeClr>
+              </a:solidFill>
+            </a:endParaRPr>
+          </a:p>
+          <a:p>
+            <a:pPr marL="0" indent="0">
+              <a:buNone/>
+            </a:pPr>
+            <a:endParaRPr lang="en-US" sz="1200" dirty="0">
+              <a:solidFill>
+                <a:schemeClr val="bg1">
+                  <a:lumMod val="95000"/>
+                </a:schemeClr>
+              </a:solidFill>
+            </a:endParaRPr>
+          </a:p>
+          <a:p>
+            <a:pPr marL="0" indent="0">
+              <a:buNone/>
+            </a:pPr>
+            <a:r>
+              <a:rPr lang="en-US" sz="1200" dirty="0">
+                <a:solidFill>
+                  <a:schemeClr val="bg1">
+                    <a:lumMod val="95000"/>
+                  </a:schemeClr>
                 </a:solidFill>
                 <a:latin typeface="Courier New" pitchFamily="34" charset="0"/>
                 <a:ea typeface="Courier New" pitchFamily="34" charset="-122"/>
@@ -5907,16 +4692,24 @@
               </a:rPr>
               <a:t>numeric_features = ["temperature", "pressure", "vibration"]</a:t>
             </a:r>
-            <a:endParaRPr lang="en-US" sz="760" dirty="0"/>
-          </a:p>
-          <a:p>
-            <a:pPr marL="0" indent="0">
-              <a:buNone/>
-            </a:pPr>
-            <a:r>
-              <a:rPr lang="en-US" sz="760" dirty="0">
-                <a:solidFill>
-                  <a:srgbClr val="222222"/>
+            <a:endParaRPr lang="en-US" sz="1200" dirty="0">
+              <a:solidFill>
+                <a:schemeClr val="bg1">
+                  <a:lumMod val="95000"/>
+                </a:schemeClr>
+              </a:solidFill>
+            </a:endParaRPr>
+          </a:p>
+          <a:p>
+            <a:pPr marL="0" indent="0">
+              <a:buNone/>
+            </a:pPr>
+            <a:r>
+              <a:rPr lang="en-US" sz="1200" dirty="0">
+                <a:solidFill>
+                  <a:schemeClr val="bg1">
+                    <a:lumMod val="95000"/>
+                  </a:schemeClr>
                 </a:solidFill>
                 <a:latin typeface="Courier New" pitchFamily="34" charset="0"/>
                 <a:ea typeface="Courier New" pitchFamily="34" charset="-122"/>
@@ -5924,22 +4717,36 @@
               </a:rPr>
               <a:t>categorical_features = ["material_type"]</a:t>
             </a:r>
-            <a:endParaRPr lang="en-US" sz="760" dirty="0"/>
-          </a:p>
-          <a:p>
-            <a:pPr marL="0" indent="0">
-              <a:buNone/>
-            </a:pPr>
-            <a:endParaRPr lang="en-US" sz="760" dirty="0"/>
-          </a:p>
-          <a:p>
-            <a:pPr marL="0" indent="0">
-              <a:buNone/>
-            </a:pPr>
-            <a:r>
-              <a:rPr lang="en-US" sz="760" dirty="0">
-                <a:solidFill>
-                  <a:srgbClr val="222222"/>
+            <a:endParaRPr lang="en-US" sz="1200" dirty="0">
+              <a:solidFill>
+                <a:schemeClr val="bg1">
+                  <a:lumMod val="95000"/>
+                </a:schemeClr>
+              </a:solidFill>
+            </a:endParaRPr>
+          </a:p>
+          <a:p>
+            <a:pPr marL="0" indent="0">
+              <a:buNone/>
+            </a:pPr>
+            <a:endParaRPr lang="en-US" sz="1200" dirty="0">
+              <a:solidFill>
+                <a:schemeClr val="bg1">
+                  <a:lumMod val="95000"/>
+                </a:schemeClr>
+              </a:solidFill>
+            </a:endParaRPr>
+          </a:p>
+          <a:p>
+            <a:pPr marL="0" indent="0">
+              <a:buNone/>
+            </a:pPr>
+            <a:r>
+              <a:rPr lang="en-US" sz="1200" dirty="0">
+                <a:solidFill>
+                  <a:schemeClr val="bg1">
+                    <a:lumMod val="95000"/>
+                  </a:schemeClr>
                 </a:solidFill>
                 <a:latin typeface="Courier New" pitchFamily="34" charset="0"/>
                 <a:ea typeface="Courier New" pitchFamily="34" charset="-122"/>
@@ -5947,16 +4754,24 @@
               </a:rPr>
               <a:t>preprocess = ColumnTransformer([</a:t>
             </a:r>
-            <a:endParaRPr lang="en-US" sz="760" dirty="0"/>
-          </a:p>
-          <a:p>
-            <a:pPr marL="0" indent="0">
-              <a:buNone/>
-            </a:pPr>
-            <a:r>
-              <a:rPr lang="en-US" sz="760" dirty="0">
-                <a:solidFill>
-                  <a:srgbClr val="222222"/>
+            <a:endParaRPr lang="en-US" sz="1200" dirty="0">
+              <a:solidFill>
+                <a:schemeClr val="bg1">
+                  <a:lumMod val="95000"/>
+                </a:schemeClr>
+              </a:solidFill>
+            </a:endParaRPr>
+          </a:p>
+          <a:p>
+            <a:pPr marL="0" indent="0">
+              <a:buNone/>
+            </a:pPr>
+            <a:r>
+              <a:rPr lang="en-US" sz="1200" dirty="0">
+                <a:solidFill>
+                  <a:schemeClr val="bg1">
+                    <a:lumMod val="95000"/>
+                  </a:schemeClr>
                 </a:solidFill>
                 <a:latin typeface="Courier New" pitchFamily="34" charset="0"/>
                 <a:ea typeface="Courier New" pitchFamily="34" charset="-122"/>
@@ -5964,16 +4779,24 @@
               </a:rPr>
               <a:t>    ("num", Pipeline([</a:t>
             </a:r>
-            <a:endParaRPr lang="en-US" sz="760" dirty="0"/>
-          </a:p>
-          <a:p>
-            <a:pPr marL="0" indent="0">
-              <a:buNone/>
-            </a:pPr>
-            <a:r>
-              <a:rPr lang="en-US" sz="760" dirty="0">
-                <a:solidFill>
-                  <a:srgbClr val="222222"/>
+            <a:endParaRPr lang="en-US" sz="1200" dirty="0">
+              <a:solidFill>
+                <a:schemeClr val="bg1">
+                  <a:lumMod val="95000"/>
+                </a:schemeClr>
+              </a:solidFill>
+            </a:endParaRPr>
+          </a:p>
+          <a:p>
+            <a:pPr marL="0" indent="0">
+              <a:buNone/>
+            </a:pPr>
+            <a:r>
+              <a:rPr lang="en-US" sz="1200" dirty="0">
+                <a:solidFill>
+                  <a:schemeClr val="bg1">
+                    <a:lumMod val="95000"/>
+                  </a:schemeClr>
                 </a:solidFill>
                 <a:latin typeface="Courier New" pitchFamily="34" charset="0"/>
                 <a:ea typeface="Courier New" pitchFamily="34" charset="-122"/>
@@ -5981,16 +4804,24 @@
               </a:rPr>
               <a:t>        ("impute", SimpleImputer(strategy="median")),</a:t>
             </a:r>
-            <a:endParaRPr lang="en-US" sz="760" dirty="0"/>
-          </a:p>
-          <a:p>
-            <a:pPr marL="0" indent="0">
-              <a:buNone/>
-            </a:pPr>
-            <a:r>
-              <a:rPr lang="en-US" sz="760" dirty="0">
-                <a:solidFill>
-                  <a:srgbClr val="222222"/>
+            <a:endParaRPr lang="en-US" sz="1200" dirty="0">
+              <a:solidFill>
+                <a:schemeClr val="bg1">
+                  <a:lumMod val="95000"/>
+                </a:schemeClr>
+              </a:solidFill>
+            </a:endParaRPr>
+          </a:p>
+          <a:p>
+            <a:pPr marL="0" indent="0">
+              <a:buNone/>
+            </a:pPr>
+            <a:r>
+              <a:rPr lang="en-US" sz="1200" dirty="0">
+                <a:solidFill>
+                  <a:schemeClr val="bg1">
+                    <a:lumMod val="95000"/>
+                  </a:schemeClr>
                 </a:solidFill>
                 <a:latin typeface="Courier New" pitchFamily="34" charset="0"/>
                 <a:ea typeface="Courier New" pitchFamily="34" charset="-122"/>
@@ -5998,16 +4829,24 @@
               </a:rPr>
               <a:t>        ("scale", StandardScaler())</a:t>
             </a:r>
-            <a:endParaRPr lang="en-US" sz="760" dirty="0"/>
-          </a:p>
-          <a:p>
-            <a:pPr marL="0" indent="0">
-              <a:buNone/>
-            </a:pPr>
-            <a:r>
-              <a:rPr lang="en-US" sz="760" dirty="0">
-                <a:solidFill>
-                  <a:srgbClr val="222222"/>
+            <a:endParaRPr lang="en-US" sz="1200" dirty="0">
+              <a:solidFill>
+                <a:schemeClr val="bg1">
+                  <a:lumMod val="95000"/>
+                </a:schemeClr>
+              </a:solidFill>
+            </a:endParaRPr>
+          </a:p>
+          <a:p>
+            <a:pPr marL="0" indent="0">
+              <a:buNone/>
+            </a:pPr>
+            <a:r>
+              <a:rPr lang="en-US" sz="1200" dirty="0">
+                <a:solidFill>
+                  <a:schemeClr val="bg1">
+                    <a:lumMod val="95000"/>
+                  </a:schemeClr>
                 </a:solidFill>
                 <a:latin typeface="Courier New" pitchFamily="34" charset="0"/>
                 <a:ea typeface="Courier New" pitchFamily="34" charset="-122"/>
@@ -6015,16 +4854,24 @@
               </a:rPr>
               <a:t>    ]), numeric_features),</a:t>
             </a:r>
-            <a:endParaRPr lang="en-US" sz="760" dirty="0"/>
-          </a:p>
-          <a:p>
-            <a:pPr marL="0" indent="0">
-              <a:buNone/>
-            </a:pPr>
-            <a:r>
-              <a:rPr lang="en-US" sz="760" dirty="0">
-                <a:solidFill>
-                  <a:srgbClr val="222222"/>
+            <a:endParaRPr lang="en-US" sz="1200" dirty="0">
+              <a:solidFill>
+                <a:schemeClr val="bg1">
+                  <a:lumMod val="95000"/>
+                </a:schemeClr>
+              </a:solidFill>
+            </a:endParaRPr>
+          </a:p>
+          <a:p>
+            <a:pPr marL="0" indent="0">
+              <a:buNone/>
+            </a:pPr>
+            <a:r>
+              <a:rPr lang="en-US" sz="1200" dirty="0">
+                <a:solidFill>
+                  <a:schemeClr val="bg1">
+                    <a:lumMod val="95000"/>
+                  </a:schemeClr>
                 </a:solidFill>
                 <a:latin typeface="Courier New" pitchFamily="34" charset="0"/>
                 <a:ea typeface="Courier New" pitchFamily="34" charset="-122"/>
@@ -6032,16 +4879,24 @@
               </a:rPr>
               <a:t>    ("cat", OneHotEncoder(handle_unknown="ignore"),</a:t>
             </a:r>
-            <a:endParaRPr lang="en-US" sz="760" dirty="0"/>
-          </a:p>
-          <a:p>
-            <a:pPr marL="0" indent="0">
-              <a:buNone/>
-            </a:pPr>
-            <a:r>
-              <a:rPr lang="en-US" sz="760" dirty="0">
-                <a:solidFill>
-                  <a:srgbClr val="222222"/>
+            <a:endParaRPr lang="en-US" sz="1200" dirty="0">
+              <a:solidFill>
+                <a:schemeClr val="bg1">
+                  <a:lumMod val="95000"/>
+                </a:schemeClr>
+              </a:solidFill>
+            </a:endParaRPr>
+          </a:p>
+          <a:p>
+            <a:pPr marL="0" indent="0">
+              <a:buNone/>
+            </a:pPr>
+            <a:r>
+              <a:rPr lang="en-US" sz="1200" dirty="0">
+                <a:solidFill>
+                  <a:schemeClr val="bg1">
+                    <a:lumMod val="95000"/>
+                  </a:schemeClr>
                 </a:solidFill>
                 <a:latin typeface="Courier New" pitchFamily="34" charset="0"/>
                 <a:ea typeface="Courier New" pitchFamily="34" charset="-122"/>
@@ -6049,16 +4904,24 @@
               </a:rPr>
               <a:t>     categorical_features)</a:t>
             </a:r>
-            <a:endParaRPr lang="en-US" sz="760" dirty="0"/>
-          </a:p>
-          <a:p>
-            <a:pPr marL="0" indent="0">
-              <a:buNone/>
-            </a:pPr>
-            <a:r>
-              <a:rPr lang="en-US" sz="760" dirty="0">
-                <a:solidFill>
-                  <a:srgbClr val="222222"/>
+            <a:endParaRPr lang="en-US" sz="1200" dirty="0">
+              <a:solidFill>
+                <a:schemeClr val="bg1">
+                  <a:lumMod val="95000"/>
+                </a:schemeClr>
+              </a:solidFill>
+            </a:endParaRPr>
+          </a:p>
+          <a:p>
+            <a:pPr marL="0" indent="0">
+              <a:buNone/>
+            </a:pPr>
+            <a:r>
+              <a:rPr lang="en-US" sz="1200" dirty="0">
+                <a:solidFill>
+                  <a:schemeClr val="bg1">
+                    <a:lumMod val="95000"/>
+                  </a:schemeClr>
                 </a:solidFill>
                 <a:latin typeface="Courier New" pitchFamily="34" charset="0"/>
                 <a:ea typeface="Courier New" pitchFamily="34" charset="-122"/>
@@ -6066,22 +4929,36 @@
               </a:rPr>
               <a:t>])</a:t>
             </a:r>
-            <a:endParaRPr lang="en-US" sz="760" dirty="0"/>
-          </a:p>
-          <a:p>
-            <a:pPr marL="0" indent="0">
-              <a:buNone/>
-            </a:pPr>
-            <a:endParaRPr lang="en-US" sz="760" dirty="0"/>
-          </a:p>
-          <a:p>
-            <a:pPr marL="0" indent="0">
-              <a:buNone/>
-            </a:pPr>
-            <a:r>
-              <a:rPr lang="en-US" sz="760" dirty="0">
-                <a:solidFill>
-                  <a:srgbClr val="222222"/>
+            <a:endParaRPr lang="en-US" sz="1200" dirty="0">
+              <a:solidFill>
+                <a:schemeClr val="bg1">
+                  <a:lumMod val="95000"/>
+                </a:schemeClr>
+              </a:solidFill>
+            </a:endParaRPr>
+          </a:p>
+          <a:p>
+            <a:pPr marL="0" indent="0">
+              <a:buNone/>
+            </a:pPr>
+            <a:endParaRPr lang="en-US" sz="1200" dirty="0">
+              <a:solidFill>
+                <a:schemeClr val="bg1">
+                  <a:lumMod val="95000"/>
+                </a:schemeClr>
+              </a:solidFill>
+            </a:endParaRPr>
+          </a:p>
+          <a:p>
+            <a:pPr marL="0" indent="0">
+              <a:buNone/>
+            </a:pPr>
+            <a:r>
+              <a:rPr lang="en-US" sz="1200" dirty="0">
+                <a:solidFill>
+                  <a:schemeClr val="bg1">
+                    <a:lumMod val="95000"/>
+                  </a:schemeClr>
                 </a:solidFill>
                 <a:latin typeface="Courier New" pitchFamily="34" charset="0"/>
                 <a:ea typeface="Courier New" pitchFamily="34" charset="-122"/>
@@ -6089,7 +4966,13 @@
               </a:rPr>
               <a:t># Later: Pipeline([("prep", preprocess), ("model", model)])</a:t>
             </a:r>
-            <a:endParaRPr lang="en-US" sz="760" dirty="0"/>
+            <a:endParaRPr lang="en-US" sz="1200" dirty="0">
+              <a:solidFill>
+                <a:schemeClr val="bg1">
+                  <a:lumMod val="95000"/>
+                </a:schemeClr>
+              </a:solidFill>
+            </a:endParaRPr>
           </a:p>
         </p:txBody>
       </p:sp>
@@ -6192,14 +5075,14 @@
               <a:buNone/>
             </a:pPr>
             <a:r>
-              <a:rPr lang="en-US" sz="850" dirty="0">
+              <a:rPr lang="en-US" sz="1200" dirty="0">
                 <a:solidFill>
                   <a:srgbClr val="111111"/>
                 </a:solidFill>
               </a:rPr>
               <a:t>It prevents train/test contamination and documents the workflow.</a:t>
             </a:r>
-            <a:endParaRPr lang="en-US" sz="850" dirty="0"/>
+            <a:endParaRPr lang="en-US" sz="1200" dirty="0"/>
           </a:p>
         </p:txBody>
       </p:sp>
@@ -6302,14 +5185,14 @@
               <a:buNone/>
             </a:pPr>
             <a:r>
-              <a:rPr lang="en-US" sz="860" dirty="0">
+              <a:rPr lang="en-US" sz="1200" dirty="0">
                 <a:solidFill>
                   <a:srgbClr val="111111"/>
                 </a:solidFill>
               </a:rPr>
               <a:t>Never use test data to decide imputation, scaling, or encoding rules.</a:t>
             </a:r>
-            <a:endParaRPr lang="en-US" sz="860" dirty="0"/>
+            <a:endParaRPr lang="en-US" sz="1200" dirty="0"/>
           </a:p>
         </p:txBody>
       </p:sp>
@@ -6404,7 +5287,7 @@
         </p:spPr>
         <p:txBody>
           <a:bodyPr wrap="square" lIns="0" tIns="0" rIns="0" bIns="0" rtlCol="0" anchor="t">
-            <a:normAutofit/>
+            <a:noAutofit/>
           </a:bodyPr>
           <a:lstStyle/>
           <a:p>
@@ -6412,14 +5295,14 @@
               <a:buNone/>
             </a:pPr>
             <a:r>
-              <a:rPr lang="en-US" sz="800" dirty="0">
+              <a:rPr lang="en-US" sz="1200" dirty="0">
                 <a:solidFill>
                   <a:srgbClr val="111111"/>
                 </a:solidFill>
               </a:rPr>
               <a:t>Use the preprocessing object inside the baseline model workflow.</a:t>
             </a:r>
-            <a:endParaRPr lang="en-US" sz="800" dirty="0"/>
+            <a:endParaRPr lang="en-US" sz="1200" dirty="0"/>
           </a:p>
         </p:txBody>
       </p:sp>
@@ -6431,1516 +5314,7 @@
 </p:sld>
 </file>
 
-<file path=ppt/slides/slide14.xml><?xml version="1.0" encoding="utf-8"?>
-<p:sld xmlns:a="http://schemas.openxmlformats.org/drawingml/2006/main" xmlns:r="http://schemas.openxmlformats.org/officeDocument/2006/relationships" xmlns:p="http://schemas.openxmlformats.org/presentationml/2006/main">
-  <p:cSld name="Slide 15">
-    <p:bg>
-      <p:bgPr>
-        <a:solidFill>
-          <a:srgbClr val="FFFFFF"/>
-        </a:solidFill>
-        <a:effectLst/>
-      </p:bgPr>
-    </p:bg>
-    <p:spTree>
-      <p:nvGrpSpPr>
-        <p:cNvPr id="1" name=""/>
-        <p:cNvGrpSpPr/>
-        <p:nvPr/>
-      </p:nvGrpSpPr>
-      <p:grpSpPr>
-        <a:xfrm>
-          <a:off x="0" y="0"/>
-          <a:ext cx="0" cy="0"/>
-          <a:chOff x="0" y="0"/>
-          <a:chExt cx="0" cy="0"/>
-        </a:xfrm>
-      </p:grpSpPr>
-      <p:sp>
-        <p:nvSpPr>
-          <p:cNvPr id="2" name="Shape 0"/>
-          <p:cNvSpPr/>
-          <p:nvPr/>
-        </p:nvSpPr>
-        <p:spPr>
-          <a:xfrm>
-            <a:off x="0" y="0"/>
-            <a:ext cx="12191695" cy="109728"/>
-          </a:xfrm>
-          <a:prstGeom prst="rect">
-            <a:avLst/>
-          </a:prstGeom>
-          <a:solidFill>
-            <a:srgbClr val="CC0000"/>
-          </a:solidFill>
-          <a:ln w="12700">
-            <a:solidFill>
-              <a:srgbClr val="CC0000"/>
-            </a:solidFill>
-            <a:prstDash val="solid"/>
-          </a:ln>
-        </p:spPr>
-        <p:txBody>
-          <a:bodyPr/>
-          <a:lstStyle/>
-          <a:p>
-            <a:endParaRPr lang="en-US"/>
-          </a:p>
-        </p:txBody>
-      </p:sp>
-      <p:sp>
-        <p:nvSpPr>
-          <p:cNvPr id="3" name="Text 1"/>
-          <p:cNvSpPr/>
-          <p:nvPr/>
-        </p:nvSpPr>
-        <p:spPr>
-          <a:xfrm>
-            <a:off x="301752" y="228600"/>
-            <a:ext cx="3108960" cy="146304"/>
-          </a:xfrm>
-          <a:prstGeom prst="rect">
-            <a:avLst/>
-          </a:prstGeom>
-          <a:noFill/>
-          <a:ln/>
-        </p:spPr>
-        <p:txBody>
-          <a:bodyPr wrap="square" lIns="0" tIns="0" rIns="0" bIns="0" rtlCol="0" anchor="ctr"/>
-          <a:lstStyle/>
-          <a:p>
-            <a:pPr marL="0" indent="0">
-              <a:buNone/>
-            </a:pPr>
-            <a:r>
-              <a:rPr lang="en-US" sz="550" b="1" dirty="0">
-                <a:solidFill>
-                  <a:srgbClr val="555555"/>
-                </a:solidFill>
-              </a:rPr>
-              <a:t>APPLIED AI DESIGN WORKSHOP</a:t>
-            </a:r>
-            <a:endParaRPr lang="en-US" sz="550" dirty="0"/>
-          </a:p>
-        </p:txBody>
-      </p:sp>
-      <p:sp>
-        <p:nvSpPr>
-          <p:cNvPr id="4" name="Text 2"/>
-          <p:cNvSpPr/>
-          <p:nvPr/>
-        </p:nvSpPr>
-        <p:spPr>
-          <a:xfrm>
-            <a:off x="10972800" y="228600"/>
-            <a:ext cx="914400" cy="146304"/>
-          </a:xfrm>
-          <a:prstGeom prst="rect">
-            <a:avLst/>
-          </a:prstGeom>
-          <a:noFill/>
-          <a:ln/>
-        </p:spPr>
-        <p:txBody>
-          <a:bodyPr wrap="square" lIns="0" tIns="0" rIns="0" bIns="0" rtlCol="0" anchor="ctr"/>
-          <a:lstStyle/>
-          <a:p>
-            <a:pPr marL="0" indent="0" algn="r">
-              <a:buNone/>
-            </a:pPr>
-            <a:r>
-              <a:rPr lang="en-US" sz="550" dirty="0">
-                <a:solidFill>
-                  <a:srgbClr val="555555"/>
-                </a:solidFill>
-              </a:rPr>
-              <a:t>Session 3</a:t>
-            </a:r>
-            <a:endParaRPr lang="en-US" sz="550" dirty="0"/>
-          </a:p>
-        </p:txBody>
-      </p:sp>
-      <p:sp>
-        <p:nvSpPr>
-          <p:cNvPr id="5" name="Text 3"/>
-          <p:cNvSpPr/>
-          <p:nvPr/>
-        </p:nvSpPr>
-        <p:spPr>
-          <a:xfrm>
-            <a:off x="329184" y="502920"/>
-            <a:ext cx="8778240" cy="384048"/>
-          </a:xfrm>
-          <a:prstGeom prst="rect">
-            <a:avLst/>
-          </a:prstGeom>
-          <a:noFill/>
-          <a:ln/>
-        </p:spPr>
-        <p:txBody>
-          <a:bodyPr wrap="square" lIns="0" tIns="0" rIns="0" bIns="0" rtlCol="0" anchor="ctr">
-            <a:normAutofit/>
-          </a:bodyPr>
-          <a:lstStyle/>
-          <a:p>
-            <a:pPr marL="0" indent="0">
-              <a:buNone/>
-            </a:pPr>
-            <a:r>
-              <a:rPr lang="en-US" sz="2000" b="1" dirty="0">
-                <a:solidFill>
-                  <a:srgbClr val="111111"/>
-                </a:solidFill>
-              </a:rPr>
-              <a:t>Faculty activity: create a preprocessing plan</a:t>
-            </a:r>
-            <a:endParaRPr lang="en-US" sz="2000" dirty="0"/>
-          </a:p>
-        </p:txBody>
-      </p:sp>
-      <p:sp>
-        <p:nvSpPr>
-          <p:cNvPr id="6" name="Text 4"/>
-          <p:cNvSpPr/>
-          <p:nvPr/>
-        </p:nvSpPr>
-        <p:spPr>
-          <a:xfrm>
-            <a:off x="329184" y="941832"/>
-            <a:ext cx="10789920" cy="164592"/>
-          </a:xfrm>
-          <a:prstGeom prst="rect">
-            <a:avLst/>
-          </a:prstGeom>
-          <a:noFill/>
-          <a:ln/>
-        </p:spPr>
-        <p:txBody>
-          <a:bodyPr wrap="square" lIns="0" tIns="0" rIns="0" bIns="0" rtlCol="0" anchor="ctr"/>
-          <a:lstStyle/>
-          <a:p>
-            <a:pPr marL="0" indent="0">
-              <a:buNone/>
-            </a:pPr>
-            <a:r>
-              <a:rPr lang="en-US" sz="800" dirty="0">
-                <a:solidFill>
-                  <a:srgbClr val="333333"/>
-                </a:solidFill>
-              </a:rPr>
-              <a:t>Use a workshop dataset or one from your own discipline.</a:t>
-            </a:r>
-            <a:endParaRPr lang="en-US" sz="800" dirty="0"/>
-          </a:p>
-        </p:txBody>
-      </p:sp>
-      <p:sp>
-        <p:nvSpPr>
-          <p:cNvPr id="7" name="Shape 5"/>
-          <p:cNvSpPr/>
-          <p:nvPr/>
-        </p:nvSpPr>
-        <p:spPr>
-          <a:xfrm>
-            <a:off x="777240" y="1325880"/>
-            <a:ext cx="3667344" cy="467360"/>
-          </a:xfrm>
-          <a:prstGeom prst="rect">
-            <a:avLst/>
-          </a:prstGeom>
-          <a:solidFill>
-            <a:srgbClr val="F2F2F2"/>
-          </a:solidFill>
-          <a:ln w="5080">
-            <a:solidFill>
-              <a:srgbClr val="E2E2E2"/>
-            </a:solidFill>
-            <a:prstDash val="solid"/>
-          </a:ln>
-        </p:spPr>
-        <p:txBody>
-          <a:bodyPr/>
-          <a:lstStyle/>
-          <a:p>
-            <a:endParaRPr lang="en-US"/>
-          </a:p>
-        </p:txBody>
-      </p:sp>
-      <p:sp>
-        <p:nvSpPr>
-          <p:cNvPr id="8" name="Text 6"/>
-          <p:cNvSpPr/>
-          <p:nvPr/>
-        </p:nvSpPr>
-        <p:spPr>
-          <a:xfrm>
-            <a:off x="841248" y="1380744"/>
-            <a:ext cx="3539328" cy="357632"/>
-          </a:xfrm>
-          <a:prstGeom prst="rect">
-            <a:avLst/>
-          </a:prstGeom>
-          <a:noFill/>
-          <a:ln/>
-        </p:spPr>
-        <p:txBody>
-          <a:bodyPr wrap="square" lIns="254" tIns="254" rIns="254" bIns="254" rtlCol="0" anchor="ctr">
-            <a:normAutofit/>
-          </a:bodyPr>
-          <a:lstStyle/>
-          <a:p>
-            <a:pPr marL="0" indent="0">
-              <a:buNone/>
-            </a:pPr>
-            <a:r>
-              <a:rPr lang="en-US" sz="800" b="1" dirty="0">
-                <a:solidFill>
-                  <a:srgbClr val="111111"/>
-                </a:solidFill>
-              </a:rPr>
-              <a:t>Decision area</a:t>
-            </a:r>
-            <a:endParaRPr lang="en-US" sz="800" dirty="0"/>
-          </a:p>
-        </p:txBody>
-      </p:sp>
-      <p:sp>
-        <p:nvSpPr>
-          <p:cNvPr id="9" name="Shape 7"/>
-          <p:cNvSpPr/>
-          <p:nvPr/>
-        </p:nvSpPr>
-        <p:spPr>
-          <a:xfrm>
-            <a:off x="4444584" y="1325880"/>
-            <a:ext cx="6985416" cy="467360"/>
-          </a:xfrm>
-          <a:prstGeom prst="rect">
-            <a:avLst/>
-          </a:prstGeom>
-          <a:solidFill>
-            <a:srgbClr val="F2F2F2"/>
-          </a:solidFill>
-          <a:ln w="5080">
-            <a:solidFill>
-              <a:srgbClr val="E2E2E2"/>
-            </a:solidFill>
-            <a:prstDash val="solid"/>
-          </a:ln>
-        </p:spPr>
-        <p:txBody>
-          <a:bodyPr/>
-          <a:lstStyle/>
-          <a:p>
-            <a:endParaRPr lang="en-US"/>
-          </a:p>
-        </p:txBody>
-      </p:sp>
-      <p:sp>
-        <p:nvSpPr>
-          <p:cNvPr id="10" name="Text 8"/>
-          <p:cNvSpPr/>
-          <p:nvPr/>
-        </p:nvSpPr>
-        <p:spPr>
-          <a:xfrm>
-            <a:off x="4508592" y="1380744"/>
-            <a:ext cx="6857400" cy="357632"/>
-          </a:xfrm>
-          <a:prstGeom prst="rect">
-            <a:avLst/>
-          </a:prstGeom>
-          <a:noFill/>
-          <a:ln/>
-        </p:spPr>
-        <p:txBody>
-          <a:bodyPr wrap="square" lIns="254" tIns="254" rIns="254" bIns="254" rtlCol="0" anchor="ctr">
-            <a:normAutofit/>
-          </a:bodyPr>
-          <a:lstStyle/>
-          <a:p>
-            <a:pPr marL="0" indent="0">
-              <a:buNone/>
-            </a:pPr>
-            <a:r>
-              <a:rPr lang="en-US" sz="800" b="1" dirty="0">
-                <a:solidFill>
-                  <a:srgbClr val="111111"/>
-                </a:solidFill>
-              </a:rPr>
-              <a:t>Participant response</a:t>
-            </a:r>
-            <a:endParaRPr lang="en-US" sz="800" dirty="0"/>
-          </a:p>
-        </p:txBody>
-      </p:sp>
-      <p:sp>
-        <p:nvSpPr>
-          <p:cNvPr id="11" name="Shape 9"/>
-          <p:cNvSpPr/>
-          <p:nvPr/>
-        </p:nvSpPr>
-        <p:spPr>
-          <a:xfrm>
-            <a:off x="777240" y="1793240"/>
-            <a:ext cx="3667344" cy="467360"/>
-          </a:xfrm>
-          <a:prstGeom prst="rect">
-            <a:avLst/>
-          </a:prstGeom>
-          <a:solidFill>
-            <a:srgbClr val="FFFFFF">
-              <a:alpha val="0"/>
-            </a:srgbClr>
-          </a:solidFill>
-          <a:ln w="5080">
-            <a:solidFill>
-              <a:srgbClr val="E2E2E2"/>
-            </a:solidFill>
-            <a:prstDash val="solid"/>
-          </a:ln>
-        </p:spPr>
-        <p:txBody>
-          <a:bodyPr/>
-          <a:lstStyle/>
-          <a:p>
-            <a:endParaRPr lang="en-US"/>
-          </a:p>
-        </p:txBody>
-      </p:sp>
-      <p:sp>
-        <p:nvSpPr>
-          <p:cNvPr id="12" name="Text 10"/>
-          <p:cNvSpPr/>
-          <p:nvPr/>
-        </p:nvSpPr>
-        <p:spPr>
-          <a:xfrm>
-            <a:off x="841248" y="1848104"/>
-            <a:ext cx="3539328" cy="357632"/>
-          </a:xfrm>
-          <a:prstGeom prst="rect">
-            <a:avLst/>
-          </a:prstGeom>
-          <a:noFill/>
-          <a:ln/>
-        </p:spPr>
-        <p:txBody>
-          <a:bodyPr wrap="square" lIns="254" tIns="254" rIns="254" bIns="254" rtlCol="0" anchor="ctr">
-            <a:normAutofit/>
-          </a:bodyPr>
-          <a:lstStyle/>
-          <a:p>
-            <a:pPr marL="0" indent="0">
-              <a:buNone/>
-            </a:pPr>
-            <a:r>
-              <a:rPr lang="en-US" sz="800" b="1" dirty="0">
-                <a:solidFill>
-                  <a:srgbClr val="CC0000"/>
-                </a:solidFill>
-              </a:rPr>
-              <a:t>Unit of observation</a:t>
-            </a:r>
-            <a:endParaRPr lang="en-US" sz="800" dirty="0"/>
-          </a:p>
-        </p:txBody>
-      </p:sp>
-      <p:sp>
-        <p:nvSpPr>
-          <p:cNvPr id="13" name="Shape 11"/>
-          <p:cNvSpPr/>
-          <p:nvPr/>
-        </p:nvSpPr>
-        <p:spPr>
-          <a:xfrm>
-            <a:off x="4444584" y="1793240"/>
-            <a:ext cx="6985416" cy="467360"/>
-          </a:xfrm>
-          <a:prstGeom prst="rect">
-            <a:avLst/>
-          </a:prstGeom>
-          <a:solidFill>
-            <a:srgbClr val="FFFFFF">
-              <a:alpha val="0"/>
-            </a:srgbClr>
-          </a:solidFill>
-          <a:ln w="5080">
-            <a:solidFill>
-              <a:srgbClr val="E2E2E2"/>
-            </a:solidFill>
-            <a:prstDash val="solid"/>
-          </a:ln>
-        </p:spPr>
-        <p:txBody>
-          <a:bodyPr/>
-          <a:lstStyle/>
-          <a:p>
-            <a:endParaRPr lang="en-US"/>
-          </a:p>
-        </p:txBody>
-      </p:sp>
-      <p:sp>
-        <p:nvSpPr>
-          <p:cNvPr id="14" name="Text 12"/>
-          <p:cNvSpPr/>
-          <p:nvPr/>
-        </p:nvSpPr>
-        <p:spPr>
-          <a:xfrm>
-            <a:off x="4508592" y="1848104"/>
-            <a:ext cx="6857400" cy="357632"/>
-          </a:xfrm>
-          <a:prstGeom prst="rect">
-            <a:avLst/>
-          </a:prstGeom>
-          <a:noFill/>
-          <a:ln/>
-        </p:spPr>
-        <p:txBody>
-          <a:bodyPr wrap="square" lIns="254" tIns="254" rIns="254" bIns="254" rtlCol="0" anchor="ctr">
-            <a:normAutofit/>
-          </a:bodyPr>
-          <a:lstStyle/>
-          <a:p>
-            <a:pPr marL="0" indent="0">
-              <a:buNone/>
-            </a:pPr>
-            <a:endParaRPr lang="en-US" sz="800" dirty="0"/>
-          </a:p>
-        </p:txBody>
-      </p:sp>
-      <p:sp>
-        <p:nvSpPr>
-          <p:cNvPr id="15" name="Shape 13"/>
-          <p:cNvSpPr/>
-          <p:nvPr/>
-        </p:nvSpPr>
-        <p:spPr>
-          <a:xfrm>
-            <a:off x="777240" y="2260600"/>
-            <a:ext cx="3667344" cy="467360"/>
-          </a:xfrm>
-          <a:prstGeom prst="rect">
-            <a:avLst/>
-          </a:prstGeom>
-          <a:solidFill>
-            <a:srgbClr val="FFFFFF">
-              <a:alpha val="0"/>
-            </a:srgbClr>
-          </a:solidFill>
-          <a:ln w="5080">
-            <a:solidFill>
-              <a:srgbClr val="E2E2E2"/>
-            </a:solidFill>
-            <a:prstDash val="solid"/>
-          </a:ln>
-        </p:spPr>
-        <p:txBody>
-          <a:bodyPr/>
-          <a:lstStyle/>
-          <a:p>
-            <a:endParaRPr lang="en-US"/>
-          </a:p>
-        </p:txBody>
-      </p:sp>
-      <p:sp>
-        <p:nvSpPr>
-          <p:cNvPr id="16" name="Text 14"/>
-          <p:cNvSpPr/>
-          <p:nvPr/>
-        </p:nvSpPr>
-        <p:spPr>
-          <a:xfrm>
-            <a:off x="841248" y="2315464"/>
-            <a:ext cx="3539328" cy="357632"/>
-          </a:xfrm>
-          <a:prstGeom prst="rect">
-            <a:avLst/>
-          </a:prstGeom>
-          <a:noFill/>
-          <a:ln/>
-        </p:spPr>
-        <p:txBody>
-          <a:bodyPr wrap="square" lIns="254" tIns="254" rIns="254" bIns="254" rtlCol="0" anchor="ctr">
-            <a:normAutofit/>
-          </a:bodyPr>
-          <a:lstStyle/>
-          <a:p>
-            <a:pPr marL="0" indent="0">
-              <a:buNone/>
-            </a:pPr>
-            <a:r>
-              <a:rPr lang="en-US" sz="800" b="1" dirty="0">
-                <a:solidFill>
-                  <a:srgbClr val="CC0000"/>
-                </a:solidFill>
-              </a:rPr>
-              <a:t>Target variable</a:t>
-            </a:r>
-            <a:endParaRPr lang="en-US" sz="800" dirty="0"/>
-          </a:p>
-        </p:txBody>
-      </p:sp>
-      <p:sp>
-        <p:nvSpPr>
-          <p:cNvPr id="17" name="Shape 15"/>
-          <p:cNvSpPr/>
-          <p:nvPr/>
-        </p:nvSpPr>
-        <p:spPr>
-          <a:xfrm>
-            <a:off x="4444584" y="2260600"/>
-            <a:ext cx="6985416" cy="467360"/>
-          </a:xfrm>
-          <a:prstGeom prst="rect">
-            <a:avLst/>
-          </a:prstGeom>
-          <a:solidFill>
-            <a:srgbClr val="FFFFFF">
-              <a:alpha val="0"/>
-            </a:srgbClr>
-          </a:solidFill>
-          <a:ln w="5080">
-            <a:solidFill>
-              <a:srgbClr val="E2E2E2"/>
-            </a:solidFill>
-            <a:prstDash val="solid"/>
-          </a:ln>
-        </p:spPr>
-        <p:txBody>
-          <a:bodyPr/>
-          <a:lstStyle/>
-          <a:p>
-            <a:endParaRPr lang="en-US"/>
-          </a:p>
-        </p:txBody>
-      </p:sp>
-      <p:sp>
-        <p:nvSpPr>
-          <p:cNvPr id="18" name="Text 16"/>
-          <p:cNvSpPr/>
-          <p:nvPr/>
-        </p:nvSpPr>
-        <p:spPr>
-          <a:xfrm>
-            <a:off x="4508592" y="2315464"/>
-            <a:ext cx="6857400" cy="357632"/>
-          </a:xfrm>
-          <a:prstGeom prst="rect">
-            <a:avLst/>
-          </a:prstGeom>
-          <a:noFill/>
-          <a:ln/>
-        </p:spPr>
-        <p:txBody>
-          <a:bodyPr wrap="square" lIns="254" tIns="254" rIns="254" bIns="254" rtlCol="0" anchor="ctr">
-            <a:normAutofit/>
-          </a:bodyPr>
-          <a:lstStyle/>
-          <a:p>
-            <a:pPr marL="0" indent="0">
-              <a:buNone/>
-            </a:pPr>
-            <a:endParaRPr lang="en-US" sz="800" dirty="0"/>
-          </a:p>
-        </p:txBody>
-      </p:sp>
-      <p:sp>
-        <p:nvSpPr>
-          <p:cNvPr id="19" name="Shape 17"/>
-          <p:cNvSpPr/>
-          <p:nvPr/>
-        </p:nvSpPr>
-        <p:spPr>
-          <a:xfrm>
-            <a:off x="777240" y="2727960"/>
-            <a:ext cx="3667344" cy="467360"/>
-          </a:xfrm>
-          <a:prstGeom prst="rect">
-            <a:avLst/>
-          </a:prstGeom>
-          <a:solidFill>
-            <a:srgbClr val="FFFFFF">
-              <a:alpha val="0"/>
-            </a:srgbClr>
-          </a:solidFill>
-          <a:ln w="5080">
-            <a:solidFill>
-              <a:srgbClr val="E2E2E2"/>
-            </a:solidFill>
-            <a:prstDash val="solid"/>
-          </a:ln>
-        </p:spPr>
-        <p:txBody>
-          <a:bodyPr/>
-          <a:lstStyle/>
-          <a:p>
-            <a:endParaRPr lang="en-US"/>
-          </a:p>
-        </p:txBody>
-      </p:sp>
-      <p:sp>
-        <p:nvSpPr>
-          <p:cNvPr id="20" name="Text 18"/>
-          <p:cNvSpPr/>
-          <p:nvPr/>
-        </p:nvSpPr>
-        <p:spPr>
-          <a:xfrm>
-            <a:off x="841248" y="2782824"/>
-            <a:ext cx="3539328" cy="357632"/>
-          </a:xfrm>
-          <a:prstGeom prst="rect">
-            <a:avLst/>
-          </a:prstGeom>
-          <a:noFill/>
-          <a:ln/>
-        </p:spPr>
-        <p:txBody>
-          <a:bodyPr wrap="square" lIns="254" tIns="254" rIns="254" bIns="254" rtlCol="0" anchor="ctr">
-            <a:normAutofit/>
-          </a:bodyPr>
-          <a:lstStyle/>
-          <a:p>
-            <a:pPr marL="0" indent="0">
-              <a:buNone/>
-            </a:pPr>
-            <a:r>
-              <a:rPr lang="en-US" sz="800" b="1" dirty="0">
-                <a:solidFill>
-                  <a:srgbClr val="CC0000"/>
-                </a:solidFill>
-              </a:rPr>
-              <a:t>Numeric inputs needing scaling</a:t>
-            </a:r>
-            <a:endParaRPr lang="en-US" sz="800" dirty="0"/>
-          </a:p>
-        </p:txBody>
-      </p:sp>
-      <p:sp>
-        <p:nvSpPr>
-          <p:cNvPr id="21" name="Shape 19"/>
-          <p:cNvSpPr/>
-          <p:nvPr/>
-        </p:nvSpPr>
-        <p:spPr>
-          <a:xfrm>
-            <a:off x="4444584" y="2727960"/>
-            <a:ext cx="6985416" cy="467360"/>
-          </a:xfrm>
-          <a:prstGeom prst="rect">
-            <a:avLst/>
-          </a:prstGeom>
-          <a:solidFill>
-            <a:srgbClr val="FFFFFF">
-              <a:alpha val="0"/>
-            </a:srgbClr>
-          </a:solidFill>
-          <a:ln w="5080">
-            <a:solidFill>
-              <a:srgbClr val="E2E2E2"/>
-            </a:solidFill>
-            <a:prstDash val="solid"/>
-          </a:ln>
-        </p:spPr>
-        <p:txBody>
-          <a:bodyPr/>
-          <a:lstStyle/>
-          <a:p>
-            <a:endParaRPr lang="en-US"/>
-          </a:p>
-        </p:txBody>
-      </p:sp>
-      <p:sp>
-        <p:nvSpPr>
-          <p:cNvPr id="22" name="Text 20"/>
-          <p:cNvSpPr/>
-          <p:nvPr/>
-        </p:nvSpPr>
-        <p:spPr>
-          <a:xfrm>
-            <a:off x="4508592" y="2782824"/>
-            <a:ext cx="6857400" cy="357632"/>
-          </a:xfrm>
-          <a:prstGeom prst="rect">
-            <a:avLst/>
-          </a:prstGeom>
-          <a:noFill/>
-          <a:ln/>
-        </p:spPr>
-        <p:txBody>
-          <a:bodyPr wrap="square" lIns="254" tIns="254" rIns="254" bIns="254" rtlCol="0" anchor="ctr">
-            <a:normAutofit/>
-          </a:bodyPr>
-          <a:lstStyle/>
-          <a:p>
-            <a:pPr marL="0" indent="0">
-              <a:buNone/>
-            </a:pPr>
-            <a:endParaRPr lang="en-US" sz="800" dirty="0"/>
-          </a:p>
-        </p:txBody>
-      </p:sp>
-      <p:sp>
-        <p:nvSpPr>
-          <p:cNvPr id="23" name="Shape 21"/>
-          <p:cNvSpPr/>
-          <p:nvPr/>
-        </p:nvSpPr>
-        <p:spPr>
-          <a:xfrm>
-            <a:off x="777240" y="3195320"/>
-            <a:ext cx="3667344" cy="467360"/>
-          </a:xfrm>
-          <a:prstGeom prst="rect">
-            <a:avLst/>
-          </a:prstGeom>
-          <a:solidFill>
-            <a:srgbClr val="FFFFFF">
-              <a:alpha val="0"/>
-            </a:srgbClr>
-          </a:solidFill>
-          <a:ln w="5080">
-            <a:solidFill>
-              <a:srgbClr val="E2E2E2"/>
-            </a:solidFill>
-            <a:prstDash val="solid"/>
-          </a:ln>
-        </p:spPr>
-        <p:txBody>
-          <a:bodyPr/>
-          <a:lstStyle/>
-          <a:p>
-            <a:endParaRPr lang="en-US"/>
-          </a:p>
-        </p:txBody>
-      </p:sp>
-      <p:sp>
-        <p:nvSpPr>
-          <p:cNvPr id="24" name="Text 22"/>
-          <p:cNvSpPr/>
-          <p:nvPr/>
-        </p:nvSpPr>
-        <p:spPr>
-          <a:xfrm>
-            <a:off x="841248" y="3250184"/>
-            <a:ext cx="3539328" cy="357632"/>
-          </a:xfrm>
-          <a:prstGeom prst="rect">
-            <a:avLst/>
-          </a:prstGeom>
-          <a:noFill/>
-          <a:ln/>
-        </p:spPr>
-        <p:txBody>
-          <a:bodyPr wrap="square" lIns="254" tIns="254" rIns="254" bIns="254" rtlCol="0" anchor="ctr">
-            <a:normAutofit/>
-          </a:bodyPr>
-          <a:lstStyle/>
-          <a:p>
-            <a:pPr marL="0" indent="0">
-              <a:buNone/>
-            </a:pPr>
-            <a:r>
-              <a:rPr lang="en-US" sz="800" b="1" dirty="0">
-                <a:solidFill>
-                  <a:srgbClr val="CC0000"/>
-                </a:solidFill>
-              </a:rPr>
-              <a:t>Categorical inputs needing encoding</a:t>
-            </a:r>
-            <a:endParaRPr lang="en-US" sz="800" dirty="0"/>
-          </a:p>
-        </p:txBody>
-      </p:sp>
-      <p:sp>
-        <p:nvSpPr>
-          <p:cNvPr id="25" name="Shape 23"/>
-          <p:cNvSpPr/>
-          <p:nvPr/>
-        </p:nvSpPr>
-        <p:spPr>
-          <a:xfrm>
-            <a:off x="4444584" y="3195320"/>
-            <a:ext cx="6985416" cy="467360"/>
-          </a:xfrm>
-          <a:prstGeom prst="rect">
-            <a:avLst/>
-          </a:prstGeom>
-          <a:solidFill>
-            <a:srgbClr val="FFFFFF">
-              <a:alpha val="0"/>
-            </a:srgbClr>
-          </a:solidFill>
-          <a:ln w="5080">
-            <a:solidFill>
-              <a:srgbClr val="E2E2E2"/>
-            </a:solidFill>
-            <a:prstDash val="solid"/>
-          </a:ln>
-        </p:spPr>
-        <p:txBody>
-          <a:bodyPr/>
-          <a:lstStyle/>
-          <a:p>
-            <a:endParaRPr lang="en-US"/>
-          </a:p>
-        </p:txBody>
-      </p:sp>
-      <p:sp>
-        <p:nvSpPr>
-          <p:cNvPr id="26" name="Text 24"/>
-          <p:cNvSpPr/>
-          <p:nvPr/>
-        </p:nvSpPr>
-        <p:spPr>
-          <a:xfrm>
-            <a:off x="4508592" y="3250184"/>
-            <a:ext cx="6857400" cy="357632"/>
-          </a:xfrm>
-          <a:prstGeom prst="rect">
-            <a:avLst/>
-          </a:prstGeom>
-          <a:noFill/>
-          <a:ln/>
-        </p:spPr>
-        <p:txBody>
-          <a:bodyPr wrap="square" lIns="254" tIns="254" rIns="254" bIns="254" rtlCol="0" anchor="ctr">
-            <a:normAutofit/>
-          </a:bodyPr>
-          <a:lstStyle/>
-          <a:p>
-            <a:pPr marL="0" indent="0">
-              <a:buNone/>
-            </a:pPr>
-            <a:endParaRPr lang="en-US" sz="800" dirty="0"/>
-          </a:p>
-        </p:txBody>
-      </p:sp>
-      <p:sp>
-        <p:nvSpPr>
-          <p:cNvPr id="27" name="Shape 25"/>
-          <p:cNvSpPr/>
-          <p:nvPr/>
-        </p:nvSpPr>
-        <p:spPr>
-          <a:xfrm>
-            <a:off x="777240" y="3662680"/>
-            <a:ext cx="3667344" cy="467360"/>
-          </a:xfrm>
-          <a:prstGeom prst="rect">
-            <a:avLst/>
-          </a:prstGeom>
-          <a:solidFill>
-            <a:srgbClr val="FFFFFF">
-              <a:alpha val="0"/>
-            </a:srgbClr>
-          </a:solidFill>
-          <a:ln w="5080">
-            <a:solidFill>
-              <a:srgbClr val="E2E2E2"/>
-            </a:solidFill>
-            <a:prstDash val="solid"/>
-          </a:ln>
-        </p:spPr>
-        <p:txBody>
-          <a:bodyPr/>
-          <a:lstStyle/>
-          <a:p>
-            <a:endParaRPr lang="en-US"/>
-          </a:p>
-        </p:txBody>
-      </p:sp>
-      <p:sp>
-        <p:nvSpPr>
-          <p:cNvPr id="28" name="Text 26"/>
-          <p:cNvSpPr/>
-          <p:nvPr/>
-        </p:nvSpPr>
-        <p:spPr>
-          <a:xfrm>
-            <a:off x="841248" y="3717544"/>
-            <a:ext cx="3539328" cy="357632"/>
-          </a:xfrm>
-          <a:prstGeom prst="rect">
-            <a:avLst/>
-          </a:prstGeom>
-          <a:noFill/>
-          <a:ln/>
-        </p:spPr>
-        <p:txBody>
-          <a:bodyPr wrap="square" lIns="254" tIns="254" rIns="254" bIns="254" rtlCol="0" anchor="ctr">
-            <a:normAutofit/>
-          </a:bodyPr>
-          <a:lstStyle/>
-          <a:p>
-            <a:pPr marL="0" indent="0">
-              <a:buNone/>
-            </a:pPr>
-            <a:r>
-              <a:rPr lang="en-US" sz="800" b="1" dirty="0">
-                <a:solidFill>
-                  <a:srgbClr val="CC0000"/>
-                </a:solidFill>
-              </a:rPr>
-              <a:t>Missing-data strategy</a:t>
-            </a:r>
-            <a:endParaRPr lang="en-US" sz="800" dirty="0"/>
-          </a:p>
-        </p:txBody>
-      </p:sp>
-      <p:sp>
-        <p:nvSpPr>
-          <p:cNvPr id="29" name="Shape 27"/>
-          <p:cNvSpPr/>
-          <p:nvPr/>
-        </p:nvSpPr>
-        <p:spPr>
-          <a:xfrm>
-            <a:off x="4444584" y="3662680"/>
-            <a:ext cx="6985416" cy="467360"/>
-          </a:xfrm>
-          <a:prstGeom prst="rect">
-            <a:avLst/>
-          </a:prstGeom>
-          <a:solidFill>
-            <a:srgbClr val="FFFFFF">
-              <a:alpha val="0"/>
-            </a:srgbClr>
-          </a:solidFill>
-          <a:ln w="5080">
-            <a:solidFill>
-              <a:srgbClr val="E2E2E2"/>
-            </a:solidFill>
-            <a:prstDash val="solid"/>
-          </a:ln>
-        </p:spPr>
-        <p:txBody>
-          <a:bodyPr/>
-          <a:lstStyle/>
-          <a:p>
-            <a:endParaRPr lang="en-US"/>
-          </a:p>
-        </p:txBody>
-      </p:sp>
-      <p:sp>
-        <p:nvSpPr>
-          <p:cNvPr id="30" name="Text 28"/>
-          <p:cNvSpPr/>
-          <p:nvPr/>
-        </p:nvSpPr>
-        <p:spPr>
-          <a:xfrm>
-            <a:off x="4508592" y="3717544"/>
-            <a:ext cx="6857400" cy="357632"/>
-          </a:xfrm>
-          <a:prstGeom prst="rect">
-            <a:avLst/>
-          </a:prstGeom>
-          <a:noFill/>
-          <a:ln/>
-        </p:spPr>
-        <p:txBody>
-          <a:bodyPr wrap="square" lIns="254" tIns="254" rIns="254" bIns="254" rtlCol="0" anchor="ctr">
-            <a:normAutofit/>
-          </a:bodyPr>
-          <a:lstStyle/>
-          <a:p>
-            <a:pPr marL="0" indent="0">
-              <a:buNone/>
-            </a:pPr>
-            <a:endParaRPr lang="en-US" sz="800" dirty="0"/>
-          </a:p>
-        </p:txBody>
-      </p:sp>
-      <p:sp>
-        <p:nvSpPr>
-          <p:cNvPr id="31" name="Shape 29"/>
-          <p:cNvSpPr/>
-          <p:nvPr/>
-        </p:nvSpPr>
-        <p:spPr>
-          <a:xfrm>
-            <a:off x="777240" y="4130040"/>
-            <a:ext cx="3667344" cy="467360"/>
-          </a:xfrm>
-          <a:prstGeom prst="rect">
-            <a:avLst/>
-          </a:prstGeom>
-          <a:solidFill>
-            <a:srgbClr val="FFFFFF">
-              <a:alpha val="0"/>
-            </a:srgbClr>
-          </a:solidFill>
-          <a:ln w="5080">
-            <a:solidFill>
-              <a:srgbClr val="E2E2E2"/>
-            </a:solidFill>
-            <a:prstDash val="solid"/>
-          </a:ln>
-        </p:spPr>
-        <p:txBody>
-          <a:bodyPr/>
-          <a:lstStyle/>
-          <a:p>
-            <a:endParaRPr lang="en-US"/>
-          </a:p>
-        </p:txBody>
-      </p:sp>
-      <p:sp>
-        <p:nvSpPr>
-          <p:cNvPr id="32" name="Text 30"/>
-          <p:cNvSpPr/>
-          <p:nvPr/>
-        </p:nvSpPr>
-        <p:spPr>
-          <a:xfrm>
-            <a:off x="841248" y="4184904"/>
-            <a:ext cx="3539328" cy="357632"/>
-          </a:xfrm>
-          <a:prstGeom prst="rect">
-            <a:avLst/>
-          </a:prstGeom>
-          <a:noFill/>
-          <a:ln/>
-        </p:spPr>
-        <p:txBody>
-          <a:bodyPr wrap="square" lIns="254" tIns="254" rIns="254" bIns="254" rtlCol="0" anchor="ctr">
-            <a:normAutofit/>
-          </a:bodyPr>
-          <a:lstStyle/>
-          <a:p>
-            <a:pPr marL="0" indent="0">
-              <a:buNone/>
-            </a:pPr>
-            <a:r>
-              <a:rPr lang="en-US" sz="800" b="1" dirty="0">
-                <a:solidFill>
-                  <a:srgbClr val="CC0000"/>
-                </a:solidFill>
-              </a:rPr>
-              <a:t>Possible leakage variable</a:t>
-            </a:r>
-            <a:endParaRPr lang="en-US" sz="800" dirty="0"/>
-          </a:p>
-        </p:txBody>
-      </p:sp>
-      <p:sp>
-        <p:nvSpPr>
-          <p:cNvPr id="33" name="Shape 31"/>
-          <p:cNvSpPr/>
-          <p:nvPr/>
-        </p:nvSpPr>
-        <p:spPr>
-          <a:xfrm>
-            <a:off x="4444584" y="4130040"/>
-            <a:ext cx="6985416" cy="467360"/>
-          </a:xfrm>
-          <a:prstGeom prst="rect">
-            <a:avLst/>
-          </a:prstGeom>
-          <a:solidFill>
-            <a:srgbClr val="FFFFFF">
-              <a:alpha val="0"/>
-            </a:srgbClr>
-          </a:solidFill>
-          <a:ln w="5080">
-            <a:solidFill>
-              <a:srgbClr val="E2E2E2"/>
-            </a:solidFill>
-            <a:prstDash val="solid"/>
-          </a:ln>
-        </p:spPr>
-        <p:txBody>
-          <a:bodyPr/>
-          <a:lstStyle/>
-          <a:p>
-            <a:endParaRPr lang="en-US"/>
-          </a:p>
-        </p:txBody>
-      </p:sp>
-      <p:sp>
-        <p:nvSpPr>
-          <p:cNvPr id="34" name="Text 32"/>
-          <p:cNvSpPr/>
-          <p:nvPr/>
-        </p:nvSpPr>
-        <p:spPr>
-          <a:xfrm>
-            <a:off x="4508592" y="4184904"/>
-            <a:ext cx="6857400" cy="357632"/>
-          </a:xfrm>
-          <a:prstGeom prst="rect">
-            <a:avLst/>
-          </a:prstGeom>
-          <a:noFill/>
-          <a:ln/>
-        </p:spPr>
-        <p:txBody>
-          <a:bodyPr wrap="square" lIns="254" tIns="254" rIns="254" bIns="254" rtlCol="0" anchor="ctr">
-            <a:normAutofit/>
-          </a:bodyPr>
-          <a:lstStyle/>
-          <a:p>
-            <a:pPr marL="0" indent="0">
-              <a:buNone/>
-            </a:pPr>
-            <a:endParaRPr lang="en-US" sz="800" dirty="0"/>
-          </a:p>
-        </p:txBody>
-      </p:sp>
-      <p:sp>
-        <p:nvSpPr>
-          <p:cNvPr id="35" name="Shape 33"/>
-          <p:cNvSpPr/>
-          <p:nvPr/>
-        </p:nvSpPr>
-        <p:spPr>
-          <a:xfrm>
-            <a:off x="777240" y="4597400"/>
-            <a:ext cx="3667344" cy="467360"/>
-          </a:xfrm>
-          <a:prstGeom prst="rect">
-            <a:avLst/>
-          </a:prstGeom>
-          <a:solidFill>
-            <a:srgbClr val="FFFFFF">
-              <a:alpha val="0"/>
-            </a:srgbClr>
-          </a:solidFill>
-          <a:ln w="5080">
-            <a:solidFill>
-              <a:srgbClr val="E2E2E2"/>
-            </a:solidFill>
-            <a:prstDash val="solid"/>
-          </a:ln>
-        </p:spPr>
-        <p:txBody>
-          <a:bodyPr/>
-          <a:lstStyle/>
-          <a:p>
-            <a:endParaRPr lang="en-US"/>
-          </a:p>
-        </p:txBody>
-      </p:sp>
-      <p:sp>
-        <p:nvSpPr>
-          <p:cNvPr id="36" name="Text 34"/>
-          <p:cNvSpPr/>
-          <p:nvPr/>
-        </p:nvSpPr>
-        <p:spPr>
-          <a:xfrm>
-            <a:off x="841248" y="4652264"/>
-            <a:ext cx="3539328" cy="357632"/>
-          </a:xfrm>
-          <a:prstGeom prst="rect">
-            <a:avLst/>
-          </a:prstGeom>
-          <a:noFill/>
-          <a:ln/>
-        </p:spPr>
-        <p:txBody>
-          <a:bodyPr wrap="square" lIns="254" tIns="254" rIns="254" bIns="254" rtlCol="0" anchor="ctr">
-            <a:normAutofit/>
-          </a:bodyPr>
-          <a:lstStyle/>
-          <a:p>
-            <a:pPr marL="0" indent="0">
-              <a:buNone/>
-            </a:pPr>
-            <a:r>
-              <a:rPr lang="en-US" sz="800" b="1" dirty="0">
-                <a:solidFill>
-                  <a:srgbClr val="CC0000"/>
-                </a:solidFill>
-              </a:rPr>
-              <a:t>Candidate domain-informed feature</a:t>
-            </a:r>
-            <a:endParaRPr lang="en-US" sz="800" dirty="0"/>
-          </a:p>
-        </p:txBody>
-      </p:sp>
-      <p:sp>
-        <p:nvSpPr>
-          <p:cNvPr id="37" name="Shape 35"/>
-          <p:cNvSpPr/>
-          <p:nvPr/>
-        </p:nvSpPr>
-        <p:spPr>
-          <a:xfrm>
-            <a:off x="4444584" y="4597400"/>
-            <a:ext cx="6985416" cy="467360"/>
-          </a:xfrm>
-          <a:prstGeom prst="rect">
-            <a:avLst/>
-          </a:prstGeom>
-          <a:solidFill>
-            <a:srgbClr val="FFFFFF">
-              <a:alpha val="0"/>
-            </a:srgbClr>
-          </a:solidFill>
-          <a:ln w="5080">
-            <a:solidFill>
-              <a:srgbClr val="E2E2E2"/>
-            </a:solidFill>
-            <a:prstDash val="solid"/>
-          </a:ln>
-        </p:spPr>
-        <p:txBody>
-          <a:bodyPr/>
-          <a:lstStyle/>
-          <a:p>
-            <a:endParaRPr lang="en-US"/>
-          </a:p>
-        </p:txBody>
-      </p:sp>
-      <p:sp>
-        <p:nvSpPr>
-          <p:cNvPr id="38" name="Text 36"/>
-          <p:cNvSpPr/>
-          <p:nvPr/>
-        </p:nvSpPr>
-        <p:spPr>
-          <a:xfrm>
-            <a:off x="4508592" y="4652264"/>
-            <a:ext cx="6857400" cy="357632"/>
-          </a:xfrm>
-          <a:prstGeom prst="rect">
-            <a:avLst/>
-          </a:prstGeom>
-          <a:noFill/>
-          <a:ln/>
-        </p:spPr>
-        <p:txBody>
-          <a:bodyPr wrap="square" lIns="254" tIns="254" rIns="254" bIns="254" rtlCol="0" anchor="ctr">
-            <a:normAutofit/>
-          </a:bodyPr>
-          <a:lstStyle/>
-          <a:p>
-            <a:pPr marL="0" indent="0">
-              <a:buNone/>
-            </a:pPr>
-            <a:endParaRPr lang="en-US" sz="800" dirty="0"/>
-          </a:p>
-        </p:txBody>
-      </p:sp>
-      <p:sp>
-        <p:nvSpPr>
-          <p:cNvPr id="39" name="Shape 37"/>
-          <p:cNvSpPr/>
-          <p:nvPr/>
-        </p:nvSpPr>
-        <p:spPr>
-          <a:xfrm>
-            <a:off x="777240" y="5064760"/>
-            <a:ext cx="3667344" cy="467360"/>
-          </a:xfrm>
-          <a:prstGeom prst="rect">
-            <a:avLst/>
-          </a:prstGeom>
-          <a:solidFill>
-            <a:srgbClr val="FFFFFF">
-              <a:alpha val="0"/>
-            </a:srgbClr>
-          </a:solidFill>
-          <a:ln w="5080">
-            <a:solidFill>
-              <a:srgbClr val="E2E2E2"/>
-            </a:solidFill>
-            <a:prstDash val="solid"/>
-          </a:ln>
-        </p:spPr>
-        <p:txBody>
-          <a:bodyPr/>
-          <a:lstStyle/>
-          <a:p>
-            <a:endParaRPr lang="en-US"/>
-          </a:p>
-        </p:txBody>
-      </p:sp>
-      <p:sp>
-        <p:nvSpPr>
-          <p:cNvPr id="40" name="Text 38"/>
-          <p:cNvSpPr/>
-          <p:nvPr/>
-        </p:nvSpPr>
-        <p:spPr>
-          <a:xfrm>
-            <a:off x="841248" y="5119624"/>
-            <a:ext cx="3539328" cy="357632"/>
-          </a:xfrm>
-          <a:prstGeom prst="rect">
-            <a:avLst/>
-          </a:prstGeom>
-          <a:noFill/>
-          <a:ln/>
-        </p:spPr>
-        <p:txBody>
-          <a:bodyPr wrap="square" lIns="254" tIns="254" rIns="254" bIns="254" rtlCol="0" anchor="ctr">
-            <a:normAutofit/>
-          </a:bodyPr>
-          <a:lstStyle/>
-          <a:p>
-            <a:pPr marL="0" indent="0">
-              <a:buNone/>
-            </a:pPr>
-            <a:r>
-              <a:rPr lang="en-US" sz="800" b="1" dirty="0">
-                <a:solidFill>
-                  <a:srgbClr val="CC0000"/>
-                </a:solidFill>
-              </a:rPr>
-              <a:t>Feature to remove or postpone</a:t>
-            </a:r>
-            <a:endParaRPr lang="en-US" sz="800" dirty="0"/>
-          </a:p>
-        </p:txBody>
-      </p:sp>
-      <p:sp>
-        <p:nvSpPr>
-          <p:cNvPr id="41" name="Shape 39"/>
-          <p:cNvSpPr/>
-          <p:nvPr/>
-        </p:nvSpPr>
-        <p:spPr>
-          <a:xfrm>
-            <a:off x="4444584" y="5064760"/>
-            <a:ext cx="6985416" cy="467360"/>
-          </a:xfrm>
-          <a:prstGeom prst="rect">
-            <a:avLst/>
-          </a:prstGeom>
-          <a:solidFill>
-            <a:srgbClr val="FFFFFF">
-              <a:alpha val="0"/>
-            </a:srgbClr>
-          </a:solidFill>
-          <a:ln w="5080">
-            <a:solidFill>
-              <a:srgbClr val="E2E2E2"/>
-            </a:solidFill>
-            <a:prstDash val="solid"/>
-          </a:ln>
-        </p:spPr>
-        <p:txBody>
-          <a:bodyPr/>
-          <a:lstStyle/>
-          <a:p>
-            <a:endParaRPr lang="en-US"/>
-          </a:p>
-        </p:txBody>
-      </p:sp>
-      <p:sp>
-        <p:nvSpPr>
-          <p:cNvPr id="42" name="Text 40"/>
-          <p:cNvSpPr/>
-          <p:nvPr/>
-        </p:nvSpPr>
-        <p:spPr>
-          <a:xfrm>
-            <a:off x="4508592" y="5119624"/>
-            <a:ext cx="6857400" cy="357632"/>
-          </a:xfrm>
-          <a:prstGeom prst="rect">
-            <a:avLst/>
-          </a:prstGeom>
-          <a:noFill/>
-          <a:ln/>
-        </p:spPr>
-        <p:txBody>
-          <a:bodyPr wrap="square" lIns="254" tIns="254" rIns="254" bIns="254" rtlCol="0" anchor="ctr">
-            <a:normAutofit/>
-          </a:bodyPr>
-          <a:lstStyle/>
-          <a:p>
-            <a:pPr marL="0" indent="0">
-              <a:buNone/>
-            </a:pPr>
-            <a:endParaRPr lang="en-US" sz="800" dirty="0"/>
-          </a:p>
-        </p:txBody>
-      </p:sp>
-      <p:sp>
-        <p:nvSpPr>
-          <p:cNvPr id="43" name="Shape 41"/>
-          <p:cNvSpPr/>
-          <p:nvPr/>
-        </p:nvSpPr>
-        <p:spPr>
-          <a:xfrm>
-            <a:off x="640080" y="6053328"/>
-            <a:ext cx="10927080" cy="384048"/>
-          </a:xfrm>
-          <a:prstGeom prst="roundRect">
-            <a:avLst>
-              <a:gd name="adj" fmla="val 9524"/>
-            </a:avLst>
-          </a:prstGeom>
-          <a:solidFill>
-            <a:srgbClr val="FFFFFF"/>
-          </a:solidFill>
-          <a:ln w="10160">
-            <a:solidFill>
-              <a:srgbClr val="F0A0A0"/>
-            </a:solidFill>
-            <a:prstDash val="solid"/>
-          </a:ln>
-        </p:spPr>
-        <p:txBody>
-          <a:bodyPr/>
-          <a:lstStyle/>
-          <a:p>
-            <a:endParaRPr lang="en-US"/>
-          </a:p>
-        </p:txBody>
-      </p:sp>
-      <p:sp>
-        <p:nvSpPr>
-          <p:cNvPr id="44" name="Text 42"/>
-          <p:cNvSpPr/>
-          <p:nvPr/>
-        </p:nvSpPr>
-        <p:spPr>
-          <a:xfrm>
-            <a:off x="777240" y="6172200"/>
-            <a:ext cx="10652760" cy="128016"/>
-          </a:xfrm>
-          <a:prstGeom prst="rect">
-            <a:avLst/>
-          </a:prstGeom>
-          <a:noFill/>
-          <a:ln/>
-        </p:spPr>
-        <p:txBody>
-          <a:bodyPr wrap="square" lIns="0" tIns="0" rIns="0" bIns="0" rtlCol="0" anchor="ctr"/>
-          <a:lstStyle/>
-          <a:p>
-            <a:pPr marL="0" indent="0" algn="ctr">
-              <a:buNone/>
-            </a:pPr>
-            <a:r>
-              <a:rPr lang="en-US" sz="820" b="1" dirty="0">
-                <a:solidFill>
-                  <a:srgbClr val="CC0000"/>
-                </a:solidFill>
-              </a:rPr>
-              <a:t>Deliverable: one preprocessing plan that could be implemented before model training.</a:t>
-            </a:r>
-            <a:endParaRPr lang="en-US" sz="820" dirty="0"/>
-          </a:p>
-        </p:txBody>
-      </p:sp>
-    </p:spTree>
-  </p:cSld>
-  <p:clrMapOvr>
-    <a:masterClrMapping/>
-  </p:clrMapOvr>
-</p:sld>
-</file>
-
-<file path=ppt/slides/slide15.xml><?xml version="1.0" encoding="utf-8"?>
+<file path=ppt/slides/slide13.xml><?xml version="1.0" encoding="utf-8"?>
 <p:sld xmlns:a="http://schemas.openxmlformats.org/drawingml/2006/main" xmlns:r="http://schemas.openxmlformats.org/officeDocument/2006/relationships" xmlns:p="http://schemas.openxmlformats.org/presentationml/2006/main">
   <p:cSld name="Slide 16">
     <p:bg>
@@ -8022,14 +5396,14 @@
               <a:buNone/>
             </a:pPr>
             <a:r>
-              <a:rPr lang="en-US" sz="550" b="1" dirty="0">
+              <a:rPr lang="en-US" sz="1200" b="1" dirty="0">
                 <a:solidFill>
                   <a:srgbClr val="555555"/>
                 </a:solidFill>
               </a:rPr>
               <a:t>APPLIED AI DESIGN WORKSHOP</a:t>
             </a:r>
-            <a:endParaRPr lang="en-US" sz="550" dirty="0"/>
+            <a:endParaRPr lang="en-US" sz="1200" dirty="0"/>
           </a:p>
         </p:txBody>
       </p:sp>
@@ -8058,14 +5432,14 @@
               <a:buNone/>
             </a:pPr>
             <a:r>
-              <a:rPr lang="en-US" sz="550" dirty="0">
+              <a:rPr lang="en-US" sz="1200" dirty="0">
                 <a:solidFill>
                   <a:srgbClr val="555555"/>
                 </a:solidFill>
               </a:rPr>
               <a:t>Session 3</a:t>
             </a:r>
-            <a:endParaRPr lang="en-US" sz="550" dirty="0"/>
+            <a:endParaRPr lang="en-US" sz="1200" dirty="0"/>
           </a:p>
         </p:txBody>
       </p:sp>
@@ -8206,70 +5580,70 @@
               <a:buNone/>
             </a:pPr>
             <a:r>
-              <a:rPr lang="en-US" sz="900" dirty="0">
+              <a:rPr lang="en-US" sz="1200" dirty="0">
                 <a:solidFill>
                   <a:srgbClr val="111111"/>
                 </a:solidFill>
               </a:rPr>
               <a:t>• Define the unit of observation</a:t>
             </a:r>
-            <a:endParaRPr lang="en-US" sz="900" dirty="0"/>
-          </a:p>
-          <a:p>
-            <a:pPr marL="0" indent="0">
-              <a:buNone/>
-            </a:pPr>
-            <a:r>
-              <a:rPr lang="en-US" sz="900" dirty="0">
+            <a:endParaRPr lang="en-US" sz="1200" dirty="0"/>
+          </a:p>
+          <a:p>
+            <a:pPr marL="0" indent="0">
+              <a:buNone/>
+            </a:pPr>
+            <a:r>
+              <a:rPr lang="en-US" sz="1200" dirty="0">
                 <a:solidFill>
                   <a:srgbClr val="111111"/>
                 </a:solidFill>
               </a:rPr>
               <a:t>• Identify target and inputs</a:t>
             </a:r>
-            <a:endParaRPr lang="en-US" sz="900" dirty="0"/>
-          </a:p>
-          <a:p>
-            <a:pPr marL="0" indent="0">
-              <a:buNone/>
-            </a:pPr>
-            <a:r>
-              <a:rPr lang="en-US" sz="900" dirty="0">
+            <a:endParaRPr lang="en-US" sz="1200" dirty="0"/>
+          </a:p>
+          <a:p>
+            <a:pPr marL="0" indent="0">
+              <a:buNone/>
+            </a:pPr>
+            <a:r>
+              <a:rPr lang="en-US" sz="1200" dirty="0">
                 <a:solidFill>
                   <a:srgbClr val="111111"/>
                 </a:solidFill>
               </a:rPr>
               <a:t>• Audit data types</a:t>
             </a:r>
-            <a:endParaRPr lang="en-US" sz="900" dirty="0"/>
-          </a:p>
-          <a:p>
-            <a:pPr marL="0" indent="0">
-              <a:buNone/>
-            </a:pPr>
-            <a:r>
-              <a:rPr lang="en-US" sz="900" dirty="0">
+            <a:endParaRPr lang="en-US" sz="1200" dirty="0"/>
+          </a:p>
+          <a:p>
+            <a:pPr marL="0" indent="0">
+              <a:buNone/>
+            </a:pPr>
+            <a:r>
+              <a:rPr lang="en-US" sz="1200" dirty="0">
                 <a:solidFill>
                   <a:srgbClr val="111111"/>
                 </a:solidFill>
               </a:rPr>
               <a:t>• Check missing values</a:t>
             </a:r>
-            <a:endParaRPr lang="en-US" sz="900" dirty="0"/>
-          </a:p>
-          <a:p>
-            <a:pPr marL="0" indent="0">
-              <a:buNone/>
-            </a:pPr>
-            <a:r>
-              <a:rPr lang="en-US" sz="900" dirty="0">
+            <a:endParaRPr lang="en-US" sz="1200" dirty="0"/>
+          </a:p>
+          <a:p>
+            <a:pPr marL="0" indent="0">
+              <a:buNone/>
+            </a:pPr>
+            <a:r>
+              <a:rPr lang="en-US" sz="1200" dirty="0">
                 <a:solidFill>
                   <a:srgbClr val="111111"/>
                 </a:solidFill>
               </a:rPr>
               <a:t>• Check leakage risk</a:t>
             </a:r>
-            <a:endParaRPr lang="en-US" sz="900" dirty="0"/>
+            <a:endParaRPr lang="en-US" sz="1200" dirty="0"/>
           </a:p>
         </p:txBody>
       </p:sp>
@@ -8372,70 +5746,70 @@
               <a:buNone/>
             </a:pPr>
             <a:r>
-              <a:rPr lang="en-US" sz="900" dirty="0">
+              <a:rPr lang="en-US" sz="1200" dirty="0">
                 <a:solidFill>
                   <a:srgbClr val="111111"/>
                 </a:solidFill>
               </a:rPr>
               <a:t>• Fit transformations on training data</a:t>
             </a:r>
-            <a:endParaRPr lang="en-US" sz="900" dirty="0"/>
-          </a:p>
-          <a:p>
-            <a:pPr marL="0" indent="0">
-              <a:buNone/>
-            </a:pPr>
-            <a:r>
-              <a:rPr lang="en-US" sz="900" dirty="0">
+            <a:endParaRPr lang="en-US" sz="1200" dirty="0"/>
+          </a:p>
+          <a:p>
+            <a:pPr marL="0" indent="0">
+              <a:buNone/>
+            </a:pPr>
+            <a:r>
+              <a:rPr lang="en-US" sz="1200" dirty="0">
                 <a:solidFill>
                   <a:srgbClr val="111111"/>
                 </a:solidFill>
               </a:rPr>
               <a:t>• Impute carefully</a:t>
             </a:r>
-            <a:endParaRPr lang="en-US" sz="900" dirty="0"/>
-          </a:p>
-          <a:p>
-            <a:pPr marL="0" indent="0">
-              <a:buNone/>
-            </a:pPr>
-            <a:r>
-              <a:rPr lang="en-US" sz="900" dirty="0">
+            <a:endParaRPr lang="en-US" sz="1200" dirty="0"/>
+          </a:p>
+          <a:p>
+            <a:pPr marL="0" indent="0">
+              <a:buNone/>
+            </a:pPr>
+            <a:r>
+              <a:rPr lang="en-US" sz="1200" dirty="0">
                 <a:solidFill>
                   <a:srgbClr val="111111"/>
                 </a:solidFill>
               </a:rPr>
               <a:t>• Scale when needed</a:t>
             </a:r>
-            <a:endParaRPr lang="en-US" sz="900" dirty="0"/>
-          </a:p>
-          <a:p>
-            <a:pPr marL="0" indent="0">
-              <a:buNone/>
-            </a:pPr>
-            <a:r>
-              <a:rPr lang="en-US" sz="900" dirty="0">
+            <a:endParaRPr lang="en-US" sz="1200" dirty="0"/>
+          </a:p>
+          <a:p>
+            <a:pPr marL="0" indent="0">
+              <a:buNone/>
+            </a:pPr>
+            <a:r>
+              <a:rPr lang="en-US" sz="1200" dirty="0">
                 <a:solidFill>
                   <a:srgbClr val="111111"/>
                 </a:solidFill>
               </a:rPr>
               <a:t>• Encode categories</a:t>
             </a:r>
-            <a:endParaRPr lang="en-US" sz="900" dirty="0"/>
-          </a:p>
-          <a:p>
-            <a:pPr marL="0" indent="0">
-              <a:buNone/>
-            </a:pPr>
-            <a:r>
-              <a:rPr lang="en-US" sz="900" dirty="0">
+            <a:endParaRPr lang="en-US" sz="1200" dirty="0"/>
+          </a:p>
+          <a:p>
+            <a:pPr marL="0" indent="0">
+              <a:buNone/>
+            </a:pPr>
+            <a:r>
+              <a:rPr lang="en-US" sz="1200" dirty="0">
                 <a:solidFill>
                   <a:srgbClr val="111111"/>
                 </a:solidFill>
               </a:rPr>
               <a:t>• Preserve meaningful outliers</a:t>
             </a:r>
-            <a:endParaRPr lang="en-US" sz="900" dirty="0"/>
+            <a:endParaRPr lang="en-US" sz="1200" dirty="0"/>
           </a:p>
         </p:txBody>
       </p:sp>
@@ -8538,70 +5912,70 @@
               <a:buNone/>
             </a:pPr>
             <a:r>
-              <a:rPr lang="en-US" sz="900" dirty="0">
+              <a:rPr lang="en-US" sz="1200" dirty="0">
                 <a:solidFill>
                   <a:srgbClr val="111111"/>
                 </a:solidFill>
               </a:rPr>
               <a:t>• Document decisions</a:t>
             </a:r>
-            <a:endParaRPr lang="en-US" sz="900" dirty="0"/>
-          </a:p>
-          <a:p>
-            <a:pPr marL="0" indent="0">
-              <a:buNone/>
-            </a:pPr>
-            <a:r>
-              <a:rPr lang="en-US" sz="900" dirty="0">
+            <a:endParaRPr lang="en-US" sz="1200" dirty="0"/>
+          </a:p>
+          <a:p>
+            <a:pPr marL="0" indent="0">
+              <a:buNone/>
+            </a:pPr>
+            <a:r>
+              <a:rPr lang="en-US" sz="1200" dirty="0">
                 <a:solidFill>
                   <a:srgbClr val="111111"/>
                 </a:solidFill>
               </a:rPr>
               <a:t>• Explain limitations</a:t>
             </a:r>
-            <a:endParaRPr lang="en-US" sz="900" dirty="0"/>
-          </a:p>
-          <a:p>
-            <a:pPr marL="0" indent="0">
-              <a:buNone/>
-            </a:pPr>
-            <a:r>
-              <a:rPr lang="en-US" sz="900" dirty="0">
+            <a:endParaRPr lang="en-US" sz="1200" dirty="0"/>
+          </a:p>
+          <a:p>
+            <a:pPr marL="0" indent="0">
+              <a:buNone/>
+            </a:pPr>
+            <a:r>
+              <a:rPr lang="en-US" sz="1200" dirty="0">
                 <a:solidFill>
                   <a:srgbClr val="111111"/>
                 </a:solidFill>
               </a:rPr>
               <a:t>• Revisit data collection</a:t>
             </a:r>
-            <a:endParaRPr lang="en-US" sz="900" dirty="0"/>
-          </a:p>
-          <a:p>
-            <a:pPr marL="0" indent="0">
-              <a:buNone/>
-            </a:pPr>
-            <a:r>
-              <a:rPr lang="en-US" sz="900" dirty="0">
+            <a:endParaRPr lang="en-US" sz="1200" dirty="0"/>
+          </a:p>
+          <a:p>
+            <a:pPr marL="0" indent="0">
+              <a:buNone/>
+            </a:pPr>
+            <a:r>
+              <a:rPr lang="en-US" sz="1200" dirty="0">
                 <a:solidFill>
                   <a:srgbClr val="111111"/>
                 </a:solidFill>
               </a:rPr>
               <a:t>• Engineer better features</a:t>
             </a:r>
-            <a:endParaRPr lang="en-US" sz="900" dirty="0"/>
-          </a:p>
-          <a:p>
-            <a:pPr marL="0" indent="0">
-              <a:buNone/>
-            </a:pPr>
-            <a:r>
-              <a:rPr lang="en-US" sz="900" dirty="0">
+            <a:endParaRPr lang="en-US" sz="1200" dirty="0"/>
+          </a:p>
+          <a:p>
+            <a:pPr marL="0" indent="0">
+              <a:buNone/>
+            </a:pPr>
+            <a:r>
+              <a:rPr lang="en-US" sz="1200" dirty="0">
                 <a:solidFill>
                   <a:srgbClr val="111111"/>
                 </a:solidFill>
               </a:rPr>
               <a:t>• Prepare for model comparison</a:t>
             </a:r>
-            <a:endParaRPr lang="en-US" sz="900" dirty="0"/>
+            <a:endParaRPr lang="en-US" sz="1200" dirty="0"/>
           </a:p>
         </p:txBody>
       </p:sp>
@@ -8664,14 +6038,14 @@
               <a:buNone/>
             </a:pPr>
             <a:r>
-              <a:rPr lang="en-US" sz="820" b="1" dirty="0">
+              <a:rPr lang="en-US" sz="1200" b="1" dirty="0">
                 <a:solidFill>
                   <a:srgbClr val="CC0000"/>
                 </a:solidFill>
               </a:rPr>
               <a:t>Next: Unsupervised Learning for Discovery — exploring structure when target labels are unavailable.</a:t>
             </a:r>
-            <a:endParaRPr lang="en-US" sz="820" dirty="0"/>
+            <a:endParaRPr lang="en-US" sz="1200" dirty="0"/>
           </a:p>
         </p:txBody>
       </p:sp>
@@ -8765,14 +6139,14 @@
               <a:buNone/>
             </a:pPr>
             <a:r>
-              <a:rPr lang="en-US" sz="550" b="1" dirty="0">
+              <a:rPr lang="en-US" sz="1100" b="1" dirty="0">
                 <a:solidFill>
                   <a:srgbClr val="555555"/>
                 </a:solidFill>
               </a:rPr>
               <a:t>APPLIED AI DESIGN WORKSHOP</a:t>
             </a:r>
-            <a:endParaRPr lang="en-US" sz="550" dirty="0"/>
+            <a:endParaRPr lang="en-US" sz="1100" dirty="0"/>
           </a:p>
         </p:txBody>
       </p:sp>
@@ -8801,14 +6175,14 @@
               <a:buNone/>
             </a:pPr>
             <a:r>
-              <a:rPr lang="en-US" sz="550" dirty="0">
+              <a:rPr lang="en-US" sz="1200" dirty="0">
                 <a:solidFill>
                   <a:srgbClr val="555555"/>
                 </a:solidFill>
               </a:rPr>
               <a:t>Session 3</a:t>
             </a:r>
-            <a:endParaRPr lang="en-US" sz="550" dirty="0"/>
+            <a:endParaRPr lang="en-US" sz="1200" dirty="0"/>
           </a:p>
         </p:txBody>
       </p:sp>
@@ -8949,14 +6323,14 @@
               <a:buNone/>
             </a:pPr>
             <a:r>
-              <a:rPr lang="en-US" sz="750" dirty="0">
+              <a:rPr lang="en-US" sz="1200" dirty="0">
                 <a:solidFill>
                   <a:srgbClr val="111111"/>
                 </a:solidFill>
               </a:rPr>
               <a:t>Rows, types, missingness, target</a:t>
             </a:r>
-            <a:endParaRPr lang="en-US" sz="750" dirty="0"/>
+            <a:endParaRPr lang="en-US" sz="1200" dirty="0"/>
           </a:p>
         </p:txBody>
       </p:sp>
@@ -9022,7 +6396,7 @@
           <a:bodyPr/>
           <a:lstStyle/>
           <a:p>
-            <a:endParaRPr lang="en-US"/>
+            <a:endParaRPr lang="en-US" dirty="0"/>
           </a:p>
         </p:txBody>
       </p:sp>
@@ -9091,14 +6465,14 @@
               <a:buNone/>
             </a:pPr>
             <a:r>
-              <a:rPr lang="en-US" sz="750" dirty="0">
+              <a:rPr lang="en-US" sz="1200" dirty="0">
                 <a:solidFill>
                   <a:srgbClr val="111111"/>
                 </a:solidFill>
               </a:rPr>
               <a:t>Missing values, outliers, categories</a:t>
             </a:r>
-            <a:endParaRPr lang="en-US" sz="750" dirty="0"/>
+            <a:endParaRPr lang="en-US" sz="1200" dirty="0"/>
           </a:p>
         </p:txBody>
       </p:sp>
@@ -9233,14 +6607,14 @@
               <a:buNone/>
             </a:pPr>
             <a:r>
-              <a:rPr lang="en-US" sz="750" dirty="0">
+              <a:rPr lang="en-US" sz="1200" dirty="0">
                 <a:solidFill>
                   <a:srgbClr val="111111"/>
                 </a:solidFill>
               </a:rPr>
               <a:t>Scaling and encoding</a:t>
             </a:r>
-            <a:endParaRPr lang="en-US" sz="750" dirty="0"/>
+            <a:endParaRPr lang="en-US" sz="1200" dirty="0"/>
           </a:p>
         </p:txBody>
       </p:sp>
@@ -9306,7 +6680,7 @@
           <a:bodyPr/>
           <a:lstStyle/>
           <a:p>
-            <a:endParaRPr lang="en-US"/>
+            <a:endParaRPr lang="en-US" dirty="0"/>
           </a:p>
         </p:txBody>
       </p:sp>
@@ -9375,14 +6749,14 @@
               <a:buNone/>
             </a:pPr>
             <a:r>
-              <a:rPr lang="en-US" sz="750" dirty="0">
+              <a:rPr lang="en-US" sz="1200" dirty="0">
                 <a:solidFill>
                   <a:srgbClr val="111111"/>
                 </a:solidFill>
               </a:rPr>
               <a:t>Leakage and split strategy</a:t>
             </a:r>
-            <a:endParaRPr lang="en-US" sz="750" dirty="0"/>
+            <a:endParaRPr lang="en-US" sz="1200" dirty="0"/>
           </a:p>
         </p:txBody>
       </p:sp>
@@ -9448,7 +6822,7 @@
           <a:bodyPr/>
           <a:lstStyle/>
           <a:p>
-            <a:endParaRPr lang="en-US"/>
+            <a:endParaRPr lang="en-US" dirty="0"/>
           </a:p>
         </p:txBody>
       </p:sp>
@@ -9517,14 +6891,14 @@
               <a:buNone/>
             </a:pPr>
             <a:r>
-              <a:rPr lang="en-US" sz="750" dirty="0">
+              <a:rPr lang="en-US" sz="1200" dirty="0">
                 <a:solidFill>
                   <a:srgbClr val="111111"/>
                 </a:solidFill>
               </a:rPr>
               <a:t>Domain and time-series features</a:t>
             </a:r>
-            <a:endParaRPr lang="en-US" sz="750" dirty="0"/>
+            <a:endParaRPr lang="en-US" sz="1200" dirty="0"/>
           </a:p>
         </p:txBody>
       </p:sp>
@@ -9659,124 +7033,14 @@
               <a:buNone/>
             </a:pPr>
             <a:r>
-              <a:rPr lang="en-US" sz="750" dirty="0">
+              <a:rPr lang="en-US" sz="1200" dirty="0">
                 <a:solidFill>
                   <a:srgbClr val="111111"/>
                 </a:solidFill>
               </a:rPr>
               <a:t>Preprocessing plan</a:t>
             </a:r>
-            <a:endParaRPr lang="en-US" sz="750" dirty="0"/>
-          </a:p>
-        </p:txBody>
-      </p:sp>
-      <p:sp>
-        <p:nvSpPr>
-          <p:cNvPr id="29" name="Shape 27"/>
-          <p:cNvSpPr/>
-          <p:nvPr/>
-        </p:nvSpPr>
-        <p:spPr>
-          <a:xfrm>
-            <a:off x="914400" y="4160520"/>
-            <a:ext cx="10378440" cy="822960"/>
-          </a:xfrm>
-          <a:prstGeom prst="roundRect">
-            <a:avLst>
-              <a:gd name="adj" fmla="val 5556"/>
-            </a:avLst>
-          </a:prstGeom>
-          <a:solidFill>
-            <a:srgbClr val="FFFFFF"/>
-          </a:solidFill>
-          <a:ln w="7620">
-            <a:solidFill>
-              <a:srgbClr val="E6E6E6"/>
-            </a:solidFill>
-            <a:prstDash val="solid"/>
-          </a:ln>
-        </p:spPr>
-        <p:txBody>
-          <a:bodyPr/>
-          <a:lstStyle/>
-          <a:p>
-            <a:endParaRPr lang="en-US"/>
-          </a:p>
-        </p:txBody>
-      </p:sp>
-      <p:sp>
-        <p:nvSpPr>
-          <p:cNvPr id="30" name="Text 28"/>
-          <p:cNvSpPr/>
-          <p:nvPr/>
-        </p:nvSpPr>
-        <p:spPr>
-          <a:xfrm>
-            <a:off x="1060704" y="4279392"/>
-            <a:ext cx="10085832" cy="228600"/>
-          </a:xfrm>
-          <a:prstGeom prst="rect">
-            <a:avLst/>
-          </a:prstGeom>
-          <a:noFill/>
-          <a:ln/>
-        </p:spPr>
-        <p:txBody>
-          <a:bodyPr wrap="square" lIns="0" tIns="0" rIns="0" bIns="0" rtlCol="0" anchor="ctr">
-            <a:normAutofit/>
-          </a:bodyPr>
-          <a:lstStyle/>
-          <a:p>
-            <a:pPr marL="0" indent="0">
-              <a:buNone/>
-            </a:pPr>
-            <a:r>
-              <a:rPr lang="en-US" sz="950" b="1" dirty="0">
-                <a:solidFill>
-                  <a:srgbClr val="CC0000"/>
-                </a:solidFill>
-              </a:rPr>
-              <a:t>Facilitator note</a:t>
-            </a:r>
-            <a:endParaRPr lang="en-US" sz="950" dirty="0"/>
-          </a:p>
-        </p:txBody>
-      </p:sp>
-      <p:sp>
-        <p:nvSpPr>
-          <p:cNvPr id="31" name="Text 29"/>
-          <p:cNvSpPr/>
-          <p:nvPr/>
-        </p:nvSpPr>
-        <p:spPr>
-          <a:xfrm>
-            <a:off x="1060704" y="4599432"/>
-            <a:ext cx="10085832" cy="292608"/>
-          </a:xfrm>
-          <a:prstGeom prst="rect">
-            <a:avLst/>
-          </a:prstGeom>
-          <a:noFill/>
-          <a:ln/>
-        </p:spPr>
-        <p:txBody>
-          <a:bodyPr wrap="square" lIns="0" tIns="0" rIns="0" bIns="0" rtlCol="0" anchor="t">
-            <a:normAutofit/>
-          </a:bodyPr>
-          <a:lstStyle/>
-          <a:p>
-            <a:pPr marL="0" indent="0">
-              <a:buNone/>
-            </a:pPr>
-            <a:r>
-              <a:rPr lang="en-US" sz="900" dirty="0">
-                <a:solidFill>
-                  <a:srgbClr val="111111"/>
-                </a:solidFill>
-              </a:rPr>
-              <a:t>Keep every preprocessing decision grounded in the prediction point: what would be known before the model is asked to predict?</a:t>
-            </a:r>
-            <a:endParaRPr lang="en-US" sz="900" dirty="0"/>
+            <a:endParaRPr lang="en-US" sz="1200" dirty="0"/>
           </a:p>
         </p:txBody>
       </p:sp>
@@ -9839,14 +7103,14 @@
               <a:buNone/>
             </a:pPr>
             <a:r>
-              <a:rPr lang="en-US" sz="820" b="1" dirty="0">
+              <a:rPr lang="en-US" sz="1200" b="1" dirty="0">
                 <a:solidFill>
                   <a:srgbClr val="CC0000"/>
                 </a:solidFill>
               </a:rPr>
               <a:t>Data preparation is the bridge between problem framing and model training.</a:t>
             </a:r>
-            <a:endParaRPr lang="en-US" sz="820" dirty="0"/>
+            <a:endParaRPr lang="en-US" sz="1200" dirty="0"/>
           </a:p>
         </p:txBody>
       </p:sp>
@@ -9940,14 +7204,14 @@
               <a:buNone/>
             </a:pPr>
             <a:r>
-              <a:rPr lang="en-US" sz="550" b="1" dirty="0">
+              <a:rPr lang="en-US" sz="1200" b="1" dirty="0">
                 <a:solidFill>
                   <a:srgbClr val="555555"/>
                 </a:solidFill>
               </a:rPr>
               <a:t>APPLIED AI DESIGN WORKSHOP</a:t>
             </a:r>
-            <a:endParaRPr lang="en-US" sz="550" dirty="0"/>
+            <a:endParaRPr lang="en-US" sz="1200" dirty="0"/>
           </a:p>
         </p:txBody>
       </p:sp>
@@ -9976,14 +7240,14 @@
               <a:buNone/>
             </a:pPr>
             <a:r>
-              <a:rPr lang="en-US" sz="550" dirty="0">
+              <a:rPr lang="en-US" sz="1200" dirty="0">
                 <a:solidFill>
                   <a:srgbClr val="555555"/>
                 </a:solidFill>
               </a:rPr>
               <a:t>Session 3</a:t>
             </a:r>
-            <a:endParaRPr lang="en-US" sz="550" dirty="0"/>
+            <a:endParaRPr lang="en-US" sz="1200" dirty="0"/>
           </a:p>
         </p:txBody>
       </p:sp>
@@ -10050,14 +7314,14 @@
               <a:buNone/>
             </a:pPr>
             <a:r>
-              <a:rPr lang="en-US" sz="800" dirty="0">
+              <a:rPr lang="en-US" sz="1200" dirty="0">
                 <a:solidFill>
                   <a:srgbClr val="333333"/>
                 </a:solidFill>
               </a:rPr>
               <a:t>Applied AI fails when the data table does not match the real decision context.</a:t>
             </a:r>
-            <a:endParaRPr lang="en-US" sz="800" dirty="0"/>
+            <a:endParaRPr lang="en-US" sz="1200" dirty="0"/>
           </a:p>
         </p:txBody>
       </p:sp>
@@ -10160,84 +7424,84 @@
               <a:buNone/>
             </a:pPr>
             <a:r>
-              <a:rPr lang="en-US" sz="850" dirty="0">
+              <a:rPr lang="en-US" sz="1200" dirty="0">
                 <a:solidFill>
                   <a:srgbClr val="111111"/>
                 </a:solidFill>
               </a:rPr>
               <a:t>• Different units</a:t>
             </a:r>
-            <a:endParaRPr lang="en-US" sz="850" dirty="0"/>
-          </a:p>
-          <a:p>
-            <a:pPr marL="0" indent="0">
-              <a:buNone/>
-            </a:pPr>
-            <a:r>
-              <a:rPr lang="en-US" sz="850" dirty="0">
+            <a:endParaRPr lang="en-US" sz="1200" dirty="0"/>
+          </a:p>
+          <a:p>
+            <a:pPr marL="0" indent="0">
+              <a:buNone/>
+            </a:pPr>
+            <a:r>
+              <a:rPr lang="en-US" sz="1200" dirty="0">
                 <a:solidFill>
                   <a:srgbClr val="111111"/>
                 </a:solidFill>
               </a:rPr>
               <a:t>• Missing values</a:t>
             </a:r>
-            <a:endParaRPr lang="en-US" sz="850" dirty="0"/>
-          </a:p>
-          <a:p>
-            <a:pPr marL="0" indent="0">
-              <a:buNone/>
-            </a:pPr>
-            <a:r>
-              <a:rPr lang="en-US" sz="850" dirty="0">
+            <a:endParaRPr lang="en-US" sz="1200" dirty="0"/>
+          </a:p>
+          <a:p>
+            <a:pPr marL="0" indent="0">
+              <a:buNone/>
+            </a:pPr>
+            <a:r>
+              <a:rPr lang="en-US" sz="1200" dirty="0">
                 <a:solidFill>
                   <a:srgbClr val="111111"/>
                 </a:solidFill>
               </a:rPr>
               <a:t>• Text labels</a:t>
             </a:r>
-            <a:endParaRPr lang="en-US" sz="850" dirty="0"/>
-          </a:p>
-          <a:p>
-            <a:pPr marL="0" indent="0">
-              <a:buNone/>
-            </a:pPr>
-            <a:r>
-              <a:rPr lang="en-US" sz="850" dirty="0">
+            <a:endParaRPr lang="en-US" sz="1200" dirty="0"/>
+          </a:p>
+          <a:p>
+            <a:pPr marL="0" indent="0">
+              <a:buNone/>
+            </a:pPr>
+            <a:r>
+              <a:rPr lang="en-US" sz="1200" dirty="0">
                 <a:solidFill>
                   <a:srgbClr val="111111"/>
                 </a:solidFill>
               </a:rPr>
               <a:t>• Sensor noise</a:t>
             </a:r>
-            <a:endParaRPr lang="en-US" sz="850" dirty="0"/>
-          </a:p>
-          <a:p>
-            <a:pPr marL="0" indent="0">
-              <a:buNone/>
-            </a:pPr>
-            <a:r>
-              <a:rPr lang="en-US" sz="850" dirty="0">
+            <a:endParaRPr lang="en-US" sz="1200" dirty="0"/>
+          </a:p>
+          <a:p>
+            <a:pPr marL="0" indent="0">
+              <a:buNone/>
+            </a:pPr>
+            <a:r>
+              <a:rPr lang="en-US" sz="1200" dirty="0">
                 <a:solidFill>
                   <a:srgbClr val="111111"/>
                 </a:solidFill>
               </a:rPr>
               <a:t>• Time stamps</a:t>
             </a:r>
-            <a:endParaRPr lang="en-US" sz="850" dirty="0"/>
-          </a:p>
-          <a:p>
-            <a:pPr marL="0" indent="0">
-              <a:buNone/>
-            </a:pPr>
-            <a:r>
-              <a:rPr lang="en-US" sz="850" dirty="0">
+            <a:endParaRPr lang="en-US" sz="1200" dirty="0"/>
+          </a:p>
+          <a:p>
+            <a:pPr marL="0" indent="0">
+              <a:buNone/>
+            </a:pPr>
+            <a:r>
+              <a:rPr lang="en-US" sz="1200" dirty="0">
                 <a:solidFill>
                   <a:srgbClr val="111111"/>
                 </a:solidFill>
               </a:rPr>
               <a:t>• Batch identifiers</a:t>
             </a:r>
-            <a:endParaRPr lang="en-US" sz="850" dirty="0"/>
+            <a:endParaRPr lang="en-US" sz="1200" dirty="0"/>
           </a:p>
         </p:txBody>
       </p:sp>
@@ -10372,84 +7636,84 @@
               <a:buNone/>
             </a:pPr>
             <a:r>
-              <a:rPr lang="en-US" sz="850" dirty="0">
+              <a:rPr lang="en-US" sz="1200" dirty="0">
                 <a:solidFill>
                   <a:srgbClr val="111111"/>
                 </a:solidFill>
               </a:rPr>
               <a:t>• One row per observation</a:t>
             </a:r>
-            <a:endParaRPr lang="en-US" sz="850" dirty="0"/>
-          </a:p>
-          <a:p>
-            <a:pPr marL="0" indent="0">
-              <a:buNone/>
-            </a:pPr>
-            <a:r>
-              <a:rPr lang="en-US" sz="850" dirty="0">
+            <a:endParaRPr lang="en-US" sz="1200" dirty="0"/>
+          </a:p>
+          <a:p>
+            <a:pPr marL="0" indent="0">
+              <a:buNone/>
+            </a:pPr>
+            <a:r>
+              <a:rPr lang="en-US" sz="1200" dirty="0">
                 <a:solidFill>
                   <a:srgbClr val="111111"/>
                 </a:solidFill>
               </a:rPr>
               <a:t>• Clean inputs</a:t>
             </a:r>
-            <a:endParaRPr lang="en-US" sz="850" dirty="0"/>
-          </a:p>
-          <a:p>
-            <a:pPr marL="0" indent="0">
-              <a:buNone/>
-            </a:pPr>
-            <a:r>
-              <a:rPr lang="en-US" sz="850" dirty="0">
+            <a:endParaRPr lang="en-US" sz="1200" dirty="0"/>
+          </a:p>
+          <a:p>
+            <a:pPr marL="0" indent="0">
+              <a:buNone/>
+            </a:pPr>
+            <a:r>
+              <a:rPr lang="en-US" sz="1200" dirty="0">
                 <a:solidFill>
                   <a:srgbClr val="111111"/>
                 </a:solidFill>
               </a:rPr>
               <a:t>• Target separated</a:t>
             </a:r>
-            <a:endParaRPr lang="en-US" sz="850" dirty="0"/>
-          </a:p>
-          <a:p>
-            <a:pPr marL="0" indent="0">
-              <a:buNone/>
-            </a:pPr>
-            <a:r>
-              <a:rPr lang="en-US" sz="850" dirty="0">
+            <a:endParaRPr lang="en-US" sz="1200" dirty="0"/>
+          </a:p>
+          <a:p>
+            <a:pPr marL="0" indent="0">
+              <a:buNone/>
+            </a:pPr>
+            <a:r>
+              <a:rPr lang="en-US" sz="1200" dirty="0">
                 <a:solidFill>
                   <a:srgbClr val="111111"/>
                 </a:solidFill>
               </a:rPr>
               <a:t>• Encoded categories</a:t>
             </a:r>
-            <a:endParaRPr lang="en-US" sz="850" dirty="0"/>
-          </a:p>
-          <a:p>
-            <a:pPr marL="0" indent="0">
-              <a:buNone/>
-            </a:pPr>
-            <a:r>
-              <a:rPr lang="en-US" sz="850" dirty="0">
+            <a:endParaRPr lang="en-US" sz="1200" dirty="0"/>
+          </a:p>
+          <a:p>
+            <a:pPr marL="0" indent="0">
+              <a:buNone/>
+            </a:pPr>
+            <a:r>
+              <a:rPr lang="en-US" sz="1200" dirty="0">
                 <a:solidFill>
                   <a:srgbClr val="111111"/>
                 </a:solidFill>
               </a:rPr>
               <a:t>• Scaled numeric fields</a:t>
             </a:r>
-            <a:endParaRPr lang="en-US" sz="850" dirty="0"/>
-          </a:p>
-          <a:p>
-            <a:pPr marL="0" indent="0">
-              <a:buNone/>
-            </a:pPr>
-            <a:r>
-              <a:rPr lang="en-US" sz="850" dirty="0">
+            <a:endParaRPr lang="en-US" sz="1200" dirty="0"/>
+          </a:p>
+          <a:p>
+            <a:pPr marL="0" indent="0">
+              <a:buNone/>
+            </a:pPr>
+            <a:r>
+              <a:rPr lang="en-US" sz="1200" dirty="0">
                 <a:solidFill>
                   <a:srgbClr val="111111"/>
                 </a:solidFill>
               </a:rPr>
               <a:t>• No leakage</a:t>
             </a:r>
-            <a:endParaRPr lang="en-US" sz="850" dirty="0"/>
+            <a:endParaRPr lang="en-US" sz="1200" dirty="0"/>
           </a:p>
         </p:txBody>
       </p:sp>
@@ -10584,70 +7848,70 @@
               <a:buNone/>
             </a:pPr>
             <a:r>
-              <a:rPr lang="en-US" sz="850" dirty="0">
+              <a:rPr lang="en-US" sz="1200" dirty="0">
                 <a:solidFill>
                   <a:srgbClr val="111111"/>
                 </a:solidFill>
               </a:rPr>
               <a:t>• Baseline comparison</a:t>
             </a:r>
-            <a:endParaRPr lang="en-US" sz="850" dirty="0"/>
-          </a:p>
-          <a:p>
-            <a:pPr marL="0" indent="0">
-              <a:buNone/>
-            </a:pPr>
-            <a:r>
-              <a:rPr lang="en-US" sz="850" dirty="0">
+            <a:endParaRPr lang="en-US" sz="1200" dirty="0"/>
+          </a:p>
+          <a:p>
+            <a:pPr marL="0" indent="0">
+              <a:buNone/>
+            </a:pPr>
+            <a:r>
+              <a:rPr lang="en-US" sz="1200" dirty="0">
                 <a:solidFill>
                   <a:srgbClr val="111111"/>
                 </a:solidFill>
               </a:rPr>
               <a:t>• Valid split</a:t>
             </a:r>
-            <a:endParaRPr lang="en-US" sz="850" dirty="0"/>
-          </a:p>
-          <a:p>
-            <a:pPr marL="0" indent="0">
-              <a:buNone/>
-            </a:pPr>
-            <a:r>
-              <a:rPr lang="en-US" sz="850" dirty="0">
+            <a:endParaRPr lang="en-US" sz="1200" dirty="0"/>
+          </a:p>
+          <a:p>
+            <a:pPr marL="0" indent="0">
+              <a:buNone/>
+            </a:pPr>
+            <a:r>
+              <a:rPr lang="en-US" sz="1200" dirty="0">
                 <a:solidFill>
                   <a:srgbClr val="111111"/>
                 </a:solidFill>
               </a:rPr>
               <a:t>• Interpretable metrics</a:t>
             </a:r>
-            <a:endParaRPr lang="en-US" sz="850" dirty="0"/>
-          </a:p>
-          <a:p>
-            <a:pPr marL="0" indent="0">
-              <a:buNone/>
-            </a:pPr>
-            <a:r>
-              <a:rPr lang="en-US" sz="850" dirty="0">
+            <a:endParaRPr lang="en-US" sz="1200" dirty="0"/>
+          </a:p>
+          <a:p>
+            <a:pPr marL="0" indent="0">
+              <a:buNone/>
+            </a:pPr>
+            <a:r>
+              <a:rPr lang="en-US" sz="1200" dirty="0">
                 <a:solidFill>
                   <a:srgbClr val="111111"/>
                 </a:solidFill>
               </a:rPr>
               <a:t>• Reproducible decisions</a:t>
             </a:r>
-            <a:endParaRPr lang="en-US" sz="850" dirty="0"/>
-          </a:p>
-          <a:p>
-            <a:pPr marL="0" indent="0">
-              <a:buNone/>
-            </a:pPr>
-            <a:r>
-              <a:rPr lang="en-US" sz="850" dirty="0">
+            <a:endParaRPr lang="en-US" sz="1200" dirty="0"/>
+          </a:p>
+          <a:p>
+            <a:pPr marL="0" indent="0">
+              <a:buNone/>
+            </a:pPr>
+            <a:r>
+              <a:rPr lang="en-US" sz="1200" dirty="0">
                 <a:solidFill>
                   <a:srgbClr val="111111"/>
                 </a:solidFill>
               </a:rPr>
               <a:t>• Clear limitations</a:t>
             </a:r>
-            <a:endParaRPr lang="en-US" sz="850" dirty="0"/>
+            <a:endParaRPr lang="en-US" sz="1200" dirty="0"/>
           </a:p>
         </p:txBody>
       </p:sp>
@@ -10710,14 +7974,14 @@
               <a:buNone/>
             </a:pPr>
             <a:r>
-              <a:rPr lang="en-US" sz="820" b="1" dirty="0">
+              <a:rPr lang="en-US" sz="1200" b="1" dirty="0">
                 <a:solidFill>
                   <a:srgbClr val="CC0000"/>
                 </a:solidFill>
               </a:rPr>
               <a:t>Preprocessing is not clerical cleanup — it is part of the research design.</a:t>
             </a:r>
-            <a:endParaRPr lang="en-US" sz="820" dirty="0"/>
+            <a:endParaRPr lang="en-US" sz="1200" dirty="0"/>
           </a:p>
         </p:txBody>
       </p:sp>
@@ -10811,14 +8075,14 @@
               <a:buNone/>
             </a:pPr>
             <a:r>
-              <a:rPr lang="en-US" sz="550" b="1" dirty="0">
+              <a:rPr lang="en-US" sz="1200" b="1" dirty="0">
                 <a:solidFill>
                   <a:srgbClr val="555555"/>
                 </a:solidFill>
               </a:rPr>
               <a:t>APPLIED AI DESIGN WORKSHOP</a:t>
             </a:r>
-            <a:endParaRPr lang="en-US" sz="550" dirty="0"/>
+            <a:endParaRPr lang="en-US" sz="1200" dirty="0"/>
           </a:p>
         </p:txBody>
       </p:sp>
@@ -10847,14 +8111,14 @@
               <a:buNone/>
             </a:pPr>
             <a:r>
-              <a:rPr lang="en-US" sz="550" dirty="0">
+              <a:rPr lang="en-US" sz="1200" dirty="0">
                 <a:solidFill>
                   <a:srgbClr val="555555"/>
                 </a:solidFill>
               </a:rPr>
               <a:t>Session 3</a:t>
             </a:r>
-            <a:endParaRPr lang="en-US" sz="550" dirty="0"/>
+            <a:endParaRPr lang="en-US" sz="1200" dirty="0"/>
           </a:p>
         </p:txBody>
       </p:sp>
@@ -10921,14 +8185,14 @@
               <a:buNone/>
             </a:pPr>
             <a:r>
-              <a:rPr lang="en-US" sz="800" dirty="0">
+              <a:rPr lang="en-US" sz="1200" dirty="0">
                 <a:solidFill>
                   <a:srgbClr val="333333"/>
                 </a:solidFill>
               </a:rPr>
               <a:t>A good audit asks whether the dataset can support the intended prediction task.</a:t>
             </a:r>
-            <a:endParaRPr lang="en-US" sz="800" dirty="0"/>
+            <a:endParaRPr lang="en-US" sz="1200" dirty="0"/>
           </a:p>
         </p:txBody>
       </p:sp>
@@ -10991,14 +8255,14 @@
               <a:buNone/>
             </a:pPr>
             <a:r>
-              <a:rPr lang="en-US" sz="800" b="1" dirty="0">
+              <a:rPr lang="en-US" sz="1200" b="1" dirty="0">
                 <a:solidFill>
                   <a:srgbClr val="111111"/>
                 </a:solidFill>
               </a:rPr>
               <a:t>Question</a:t>
             </a:r>
-            <a:endParaRPr lang="en-US" sz="800" dirty="0"/>
+            <a:endParaRPr lang="en-US" sz="1200" dirty="0"/>
           </a:p>
         </p:txBody>
       </p:sp>
@@ -11061,14 +8325,14 @@
               <a:buNone/>
             </a:pPr>
             <a:r>
-              <a:rPr lang="en-US" sz="800" b="1" dirty="0">
+              <a:rPr lang="en-US" sz="1200" b="1" dirty="0">
                 <a:solidFill>
                   <a:srgbClr val="111111"/>
                 </a:solidFill>
               </a:rPr>
               <a:t>Why it matters</a:t>
             </a:r>
-            <a:endParaRPr lang="en-US" sz="800" dirty="0"/>
+            <a:endParaRPr lang="en-US" sz="1200" dirty="0"/>
           </a:p>
         </p:txBody>
       </p:sp>
@@ -11102,7 +8366,7 @@
           <a:bodyPr/>
           <a:lstStyle/>
           <a:p>
-            <a:endParaRPr lang="en-US"/>
+            <a:endParaRPr lang="en-US" dirty="0"/>
           </a:p>
         </p:txBody>
       </p:sp>
@@ -11133,14 +8397,14 @@
               <a:buNone/>
             </a:pPr>
             <a:r>
-              <a:rPr lang="en-US" sz="800" b="1" dirty="0">
+              <a:rPr lang="en-US" sz="1200" b="1" dirty="0">
                 <a:solidFill>
                   <a:srgbClr val="CC0000"/>
                 </a:solidFill>
               </a:rPr>
               <a:t>What does one row represent?</a:t>
             </a:r>
-            <a:endParaRPr lang="en-US" sz="800" dirty="0"/>
+            <a:endParaRPr lang="en-US" sz="1200" dirty="0"/>
           </a:p>
         </p:txBody>
       </p:sp>
@@ -11174,7 +8438,7 @@
           <a:bodyPr/>
           <a:lstStyle/>
           <a:p>
-            <a:endParaRPr lang="en-US"/>
+            <a:endParaRPr lang="en-US" dirty="0"/>
           </a:p>
         </p:txBody>
       </p:sp>
@@ -11205,14 +8469,14 @@
               <a:buNone/>
             </a:pPr>
             <a:r>
-              <a:rPr lang="en-US" sz="800" dirty="0">
+              <a:rPr lang="en-US" sz="1200" dirty="0">
                 <a:solidFill>
                   <a:srgbClr val="111111"/>
                 </a:solidFill>
               </a:rPr>
               <a:t>Defines the unit of observation and prevents mixed cases</a:t>
             </a:r>
-            <a:endParaRPr lang="en-US" sz="800" dirty="0"/>
+            <a:endParaRPr lang="en-US" sz="1200" dirty="0"/>
           </a:p>
         </p:txBody>
       </p:sp>
@@ -11277,14 +8541,14 @@
               <a:buNone/>
             </a:pPr>
             <a:r>
-              <a:rPr lang="en-US" sz="800" b="1" dirty="0">
+              <a:rPr lang="en-US" sz="1200" b="1" dirty="0">
                 <a:solidFill>
                   <a:srgbClr val="CC0000"/>
                 </a:solidFill>
               </a:rPr>
               <a:t>Which column is the target?</a:t>
             </a:r>
-            <a:endParaRPr lang="en-US" sz="800" dirty="0"/>
+            <a:endParaRPr lang="en-US" sz="1200" dirty="0"/>
           </a:p>
         </p:txBody>
       </p:sp>
@@ -11349,14 +8613,14 @@
               <a:buNone/>
             </a:pPr>
             <a:r>
-              <a:rPr lang="en-US" sz="800" dirty="0">
+              <a:rPr lang="en-US" sz="1200" dirty="0">
                 <a:solidFill>
                   <a:srgbClr val="111111"/>
                 </a:solidFill>
               </a:rPr>
               <a:t>Separates prediction objective from inputs</a:t>
             </a:r>
-            <a:endParaRPr lang="en-US" sz="800" dirty="0"/>
+            <a:endParaRPr lang="en-US" sz="1200" dirty="0"/>
           </a:p>
         </p:txBody>
       </p:sp>
@@ -11390,7 +8654,7 @@
           <a:bodyPr/>
           <a:lstStyle/>
           <a:p>
-            <a:endParaRPr lang="en-US"/>
+            <a:endParaRPr lang="en-US" dirty="0"/>
           </a:p>
         </p:txBody>
       </p:sp>
@@ -11421,14 +8685,14 @@
               <a:buNone/>
             </a:pPr>
             <a:r>
-              <a:rPr lang="en-US" sz="800" b="1" dirty="0">
+              <a:rPr lang="en-US" sz="1200" b="1" dirty="0">
                 <a:solidFill>
                   <a:srgbClr val="CC0000"/>
                 </a:solidFill>
               </a:rPr>
               <a:t>Which variables are numeric, categorical, datetime, text, or IDs?</a:t>
             </a:r>
-            <a:endParaRPr lang="en-US" sz="800" dirty="0"/>
+            <a:endParaRPr lang="en-US" sz="1200" dirty="0"/>
           </a:p>
         </p:txBody>
       </p:sp>
@@ -11493,14 +8757,14 @@
               <a:buNone/>
             </a:pPr>
             <a:r>
-              <a:rPr lang="en-US" sz="800" dirty="0">
+              <a:rPr lang="en-US" sz="1200" dirty="0">
                 <a:solidFill>
                   <a:srgbClr val="111111"/>
                 </a:solidFill>
               </a:rPr>
               <a:t>Determines preprocessing and modeling choices</a:t>
             </a:r>
-            <a:endParaRPr lang="en-US" sz="800" dirty="0"/>
+            <a:endParaRPr lang="en-US" sz="1200" dirty="0"/>
           </a:p>
         </p:txBody>
       </p:sp>
@@ -11565,14 +8829,14 @@
               <a:buNone/>
             </a:pPr>
             <a:r>
-              <a:rPr lang="en-US" sz="800" b="1" dirty="0">
+              <a:rPr lang="en-US" sz="1200" b="1" dirty="0">
                 <a:solidFill>
                   <a:srgbClr val="CC0000"/>
                 </a:solidFill>
               </a:rPr>
               <a:t>Are values missing?</a:t>
             </a:r>
-            <a:endParaRPr lang="en-US" sz="800" dirty="0"/>
+            <a:endParaRPr lang="en-US" sz="1200" dirty="0"/>
           </a:p>
         </p:txBody>
       </p:sp>
@@ -11606,7 +8870,7 @@
           <a:bodyPr/>
           <a:lstStyle/>
           <a:p>
-            <a:endParaRPr lang="en-US"/>
+            <a:endParaRPr lang="en-US" dirty="0"/>
           </a:p>
         </p:txBody>
       </p:sp>
@@ -11637,14 +8901,14 @@
               <a:buNone/>
             </a:pPr>
             <a:r>
-              <a:rPr lang="en-US" sz="800" dirty="0">
+              <a:rPr lang="en-US" sz="1200" dirty="0">
                 <a:solidFill>
                   <a:srgbClr val="111111"/>
                 </a:solidFill>
               </a:rPr>
               <a:t>May require imputation, removal, or redesign</a:t>
             </a:r>
-            <a:endParaRPr lang="en-US" sz="800" dirty="0"/>
+            <a:endParaRPr lang="en-US" sz="1200" dirty="0"/>
           </a:p>
         </p:txBody>
       </p:sp>
@@ -11709,14 +8973,14 @@
               <a:buNone/>
             </a:pPr>
             <a:r>
-              <a:rPr lang="en-US" sz="800" b="1" dirty="0">
+              <a:rPr lang="en-US" sz="1200" b="1" dirty="0">
                 <a:solidFill>
                   <a:srgbClr val="CC0000"/>
                 </a:solidFill>
               </a:rPr>
               <a:t>Are categories consistent?</a:t>
             </a:r>
-            <a:endParaRPr lang="en-US" sz="800" dirty="0"/>
+            <a:endParaRPr lang="en-US" sz="1200" dirty="0"/>
           </a:p>
         </p:txBody>
       </p:sp>
@@ -11781,14 +9045,14 @@
               <a:buNone/>
             </a:pPr>
             <a:r>
-              <a:rPr lang="en-US" sz="800" dirty="0">
+              <a:rPr lang="en-US" sz="1200" dirty="0">
                 <a:solidFill>
                   <a:srgbClr val="111111"/>
                 </a:solidFill>
               </a:rPr>
               <a:t>Avoids treating “A”, “a”, and “Batch A” as different categories</a:t>
             </a:r>
-            <a:endParaRPr lang="en-US" sz="800" dirty="0"/>
+            <a:endParaRPr lang="en-US" sz="1200" dirty="0"/>
           </a:p>
         </p:txBody>
       </p:sp>
@@ -11853,14 +9117,14 @@
               <a:buNone/>
             </a:pPr>
             <a:r>
-              <a:rPr lang="en-US" sz="800" b="1" dirty="0">
+              <a:rPr lang="en-US" sz="1200" b="1" dirty="0">
                 <a:solidFill>
                   <a:srgbClr val="CC0000"/>
                 </a:solidFill>
               </a:rPr>
               <a:t>Are there outliers or impossible values?</a:t>
             </a:r>
-            <a:endParaRPr lang="en-US" sz="800" dirty="0"/>
+            <a:endParaRPr lang="en-US" sz="1200" dirty="0"/>
           </a:p>
         </p:txBody>
       </p:sp>
@@ -11925,14 +9189,14 @@
               <a:buNone/>
             </a:pPr>
             <a:r>
-              <a:rPr lang="en-US" sz="800" dirty="0">
+              <a:rPr lang="en-US" sz="1200" dirty="0">
                 <a:solidFill>
                   <a:srgbClr val="111111"/>
                 </a:solidFill>
               </a:rPr>
               <a:t>May indicate errors, rare events, or valid extremes</a:t>
             </a:r>
-            <a:endParaRPr lang="en-US" sz="800" dirty="0"/>
+            <a:endParaRPr lang="en-US" sz="1200" dirty="0"/>
           </a:p>
         </p:txBody>
       </p:sp>
@@ -11995,14 +9259,14 @@
               <a:buNone/>
             </a:pPr>
             <a:r>
-              <a:rPr lang="en-US" sz="820" b="1" dirty="0">
+              <a:rPr lang="en-US" sz="1200" b="1" dirty="0">
                 <a:solidFill>
                   <a:srgbClr val="CC0000"/>
                 </a:solidFill>
               </a:rPr>
               <a:t>A good data audit reduces the risk of training a high-scoring but meaningless model.</a:t>
             </a:r>
-            <a:endParaRPr lang="en-US" sz="820" dirty="0"/>
+            <a:endParaRPr lang="en-US" sz="1200" dirty="0"/>
           </a:p>
         </p:txBody>
       </p:sp>
@@ -12096,14 +9360,14 @@
               <a:buNone/>
             </a:pPr>
             <a:r>
-              <a:rPr lang="en-US" sz="550" b="1" dirty="0">
+              <a:rPr lang="en-US" sz="1200" b="1" dirty="0">
                 <a:solidFill>
                   <a:srgbClr val="555555"/>
                 </a:solidFill>
               </a:rPr>
               <a:t>APPLIED AI DESIGN WORKSHOP</a:t>
             </a:r>
-            <a:endParaRPr lang="en-US" sz="550" dirty="0"/>
+            <a:endParaRPr lang="en-US" sz="1200" dirty="0"/>
           </a:p>
         </p:txBody>
       </p:sp>
@@ -12132,14 +9396,14 @@
               <a:buNone/>
             </a:pPr>
             <a:r>
-              <a:rPr lang="en-US" sz="550" dirty="0">
+              <a:rPr lang="en-US" sz="1200" dirty="0">
                 <a:solidFill>
                   <a:srgbClr val="555555"/>
                 </a:solidFill>
               </a:rPr>
               <a:t>Session 3</a:t>
             </a:r>
-            <a:endParaRPr lang="en-US" sz="550" dirty="0"/>
+            <a:endParaRPr lang="en-US" sz="1200" dirty="0"/>
           </a:p>
         </p:txBody>
       </p:sp>
@@ -12206,14 +9470,14 @@
               <a:buNone/>
             </a:pPr>
             <a:r>
-              <a:rPr lang="en-US" sz="800" dirty="0">
+              <a:rPr lang="en-US" sz="1200" dirty="0">
                 <a:solidFill>
                   <a:srgbClr val="333333"/>
                 </a:solidFill>
               </a:rPr>
               <a:t>Missingness and extreme values can be errors, process signals, or meaningful rare events.</a:t>
             </a:r>
-            <a:endParaRPr lang="en-US" sz="800" dirty="0"/>
+            <a:endParaRPr lang="en-US" sz="1200" dirty="0"/>
           </a:p>
         </p:txBody>
       </p:sp>
@@ -12316,70 +9580,70 @@
               <a:buNone/>
             </a:pPr>
             <a:r>
-              <a:rPr lang="en-US" sz="850" dirty="0">
+              <a:rPr lang="en-US" sz="1200" dirty="0">
                 <a:solidFill>
                   <a:srgbClr val="111111"/>
                 </a:solidFill>
               </a:rPr>
               <a:t>Common actions:</a:t>
             </a:r>
-            <a:endParaRPr lang="en-US" sz="850" dirty="0"/>
-          </a:p>
-          <a:p>
-            <a:pPr marL="0" indent="0">
-              <a:buNone/>
-            </a:pPr>
-            <a:r>
-              <a:rPr lang="en-US" sz="850" dirty="0">
+            <a:endParaRPr lang="en-US" sz="1200" dirty="0"/>
+          </a:p>
+          <a:p>
+            <a:pPr marL="0" indent="0">
+              <a:buNone/>
+            </a:pPr>
+            <a:r>
+              <a:rPr lang="en-US" sz="1200" dirty="0">
                 <a:solidFill>
                   <a:srgbClr val="111111"/>
                 </a:solidFill>
               </a:rPr>
               <a:t>• Remove only when justified</a:t>
             </a:r>
-            <a:endParaRPr lang="en-US" sz="850" dirty="0"/>
-          </a:p>
-          <a:p>
-            <a:pPr marL="0" indent="0">
-              <a:buNone/>
-            </a:pPr>
-            <a:r>
-              <a:rPr lang="en-US" sz="850" dirty="0">
+            <a:endParaRPr lang="en-US" sz="1200" dirty="0"/>
+          </a:p>
+          <a:p>
+            <a:pPr marL="0" indent="0">
+              <a:buNone/>
+            </a:pPr>
+            <a:r>
+              <a:rPr lang="en-US" sz="1200" dirty="0">
                 <a:solidFill>
                   <a:srgbClr val="111111"/>
                 </a:solidFill>
               </a:rPr>
               <a:t>• Impute median or mode</a:t>
             </a:r>
-            <a:endParaRPr lang="en-US" sz="850" dirty="0"/>
-          </a:p>
-          <a:p>
-            <a:pPr marL="0" indent="0">
-              <a:buNone/>
-            </a:pPr>
-            <a:r>
-              <a:rPr lang="en-US" sz="850" dirty="0">
+            <a:endParaRPr lang="en-US" sz="1200" dirty="0"/>
+          </a:p>
+          <a:p>
+            <a:pPr marL="0" indent="0">
+              <a:buNone/>
+            </a:pPr>
+            <a:r>
+              <a:rPr lang="en-US" sz="1200" dirty="0">
                 <a:solidFill>
                   <a:srgbClr val="111111"/>
                 </a:solidFill>
               </a:rPr>
               <a:t>• Add a missingness indicator</a:t>
             </a:r>
-            <a:endParaRPr lang="en-US" sz="850" dirty="0"/>
-          </a:p>
-          <a:p>
-            <a:pPr marL="0" indent="0">
-              <a:buNone/>
-            </a:pPr>
-            <a:r>
-              <a:rPr lang="en-US" sz="850" dirty="0">
+            <a:endParaRPr lang="en-US" sz="1200" dirty="0"/>
+          </a:p>
+          <a:p>
+            <a:pPr marL="0" indent="0">
+              <a:buNone/>
+            </a:pPr>
+            <a:r>
+              <a:rPr lang="en-US" sz="1200" dirty="0">
                 <a:solidFill>
                   <a:srgbClr val="111111"/>
                 </a:solidFill>
               </a:rPr>
               <a:t>• Revisit data collection</a:t>
             </a:r>
-            <a:endParaRPr lang="en-US" sz="850" dirty="0"/>
+            <a:endParaRPr lang="en-US" sz="1200" dirty="0"/>
           </a:p>
         </p:txBody>
       </p:sp>
@@ -12413,7 +9677,7 @@
           <a:bodyPr/>
           <a:lstStyle/>
           <a:p>
-            <a:endParaRPr lang="en-US"/>
+            <a:endParaRPr lang="en-US" dirty="0"/>
           </a:p>
         </p:txBody>
       </p:sp>
@@ -12482,70 +9746,70 @@
               <a:buNone/>
             </a:pPr>
             <a:r>
-              <a:rPr lang="en-US" sz="850" dirty="0">
+              <a:rPr lang="en-US" sz="1200" dirty="0">
                 <a:solidFill>
                   <a:srgbClr val="111111"/>
                 </a:solidFill>
               </a:rPr>
               <a:t>Possible actions:</a:t>
             </a:r>
-            <a:endParaRPr lang="en-US" sz="850" dirty="0"/>
-          </a:p>
-          <a:p>
-            <a:pPr marL="0" indent="0">
-              <a:buNone/>
-            </a:pPr>
-            <a:r>
-              <a:rPr lang="en-US" sz="850" dirty="0">
+            <a:endParaRPr lang="en-US" sz="1200" dirty="0"/>
+          </a:p>
+          <a:p>
+            <a:pPr marL="0" indent="0">
+              <a:buNone/>
+            </a:pPr>
+            <a:r>
+              <a:rPr lang="en-US" sz="1200" dirty="0">
                 <a:solidFill>
                   <a:srgbClr val="111111"/>
                 </a:solidFill>
               </a:rPr>
               <a:t>• Correct impossible values</a:t>
             </a:r>
-            <a:endParaRPr lang="en-US" sz="850" dirty="0"/>
-          </a:p>
-          <a:p>
-            <a:pPr marL="0" indent="0">
-              <a:buNone/>
-            </a:pPr>
-            <a:r>
-              <a:rPr lang="en-US" sz="850" dirty="0">
+            <a:endParaRPr lang="en-US" sz="1200" dirty="0"/>
+          </a:p>
+          <a:p>
+            <a:pPr marL="0" indent="0">
+              <a:buNone/>
+            </a:pPr>
+            <a:r>
+              <a:rPr lang="en-US" sz="1200" dirty="0">
                 <a:solidFill>
                   <a:srgbClr val="111111"/>
                 </a:solidFill>
               </a:rPr>
               <a:t>• Preserve rare valid cases</a:t>
             </a:r>
-            <a:endParaRPr lang="en-US" sz="850" dirty="0"/>
-          </a:p>
-          <a:p>
-            <a:pPr marL="0" indent="0">
-              <a:buNone/>
-            </a:pPr>
-            <a:r>
-              <a:rPr lang="en-US" sz="850" dirty="0">
+            <a:endParaRPr lang="en-US" sz="1200" dirty="0"/>
+          </a:p>
+          <a:p>
+            <a:pPr marL="0" indent="0">
+              <a:buNone/>
+            </a:pPr>
+            <a:r>
+              <a:rPr lang="en-US" sz="1200" dirty="0">
                 <a:solidFill>
                   <a:srgbClr val="111111"/>
                 </a:solidFill>
               </a:rPr>
               <a:t>• Cap or transform values</a:t>
             </a:r>
-            <a:endParaRPr lang="en-US" sz="850" dirty="0"/>
-          </a:p>
-          <a:p>
-            <a:pPr marL="0" indent="0">
-              <a:buNone/>
-            </a:pPr>
-            <a:r>
-              <a:rPr lang="en-US" sz="850" dirty="0">
+            <a:endParaRPr lang="en-US" sz="1200" dirty="0"/>
+          </a:p>
+          <a:p>
+            <a:pPr marL="0" indent="0">
+              <a:buNone/>
+            </a:pPr>
+            <a:r>
+              <a:rPr lang="en-US" sz="1200" dirty="0">
                 <a:solidFill>
                   <a:srgbClr val="111111"/>
                 </a:solidFill>
               </a:rPr>
               <a:t>• Use robust models</a:t>
             </a:r>
-            <a:endParaRPr lang="en-US" sz="850" dirty="0"/>
+            <a:endParaRPr lang="en-US" sz="1200" dirty="0"/>
           </a:p>
         </p:txBody>
       </p:sp>
@@ -12648,14 +9912,14 @@
               <a:buNone/>
             </a:pPr>
             <a:r>
-              <a:rPr lang="en-US" sz="840" dirty="0">
+              <a:rPr lang="en-US" sz="1200" dirty="0">
                 <a:solidFill>
                   <a:srgbClr val="111111"/>
                 </a:solidFill>
               </a:rPr>
               <a:t>Fit imputation and scaling rules only on training data, then apply them to validation/test data.</a:t>
             </a:r>
-            <a:endParaRPr lang="en-US" sz="840" dirty="0"/>
+            <a:endParaRPr lang="en-US" sz="1200" dirty="0"/>
           </a:p>
         </p:txBody>
       </p:sp>
@@ -12718,14 +9982,14 @@
               <a:buNone/>
             </a:pPr>
             <a:r>
-              <a:rPr lang="en-US" sz="730" b="1" dirty="0">
+              <a:rPr lang="en-US" sz="1200" b="1" dirty="0">
                 <a:solidFill>
                   <a:srgbClr val="111111"/>
                 </a:solidFill>
               </a:rPr>
               <a:t>Example</a:t>
             </a:r>
-            <a:endParaRPr lang="en-US" sz="730" dirty="0"/>
+            <a:endParaRPr lang="en-US" sz="1200" dirty="0"/>
           </a:p>
         </p:txBody>
       </p:sp>
@@ -12757,7 +10021,7 @@
           <a:bodyPr/>
           <a:lstStyle/>
           <a:p>
-            <a:endParaRPr lang="en-US"/>
+            <a:endParaRPr lang="en-US" dirty="0"/>
           </a:p>
         </p:txBody>
       </p:sp>
@@ -12788,14 +10052,14 @@
               <a:buNone/>
             </a:pPr>
             <a:r>
-              <a:rPr lang="en-US" sz="730" b="1" dirty="0">
+              <a:rPr lang="en-US" sz="1200" b="1" dirty="0">
                 <a:solidFill>
                   <a:srgbClr val="111111"/>
                 </a:solidFill>
               </a:rPr>
               <a:t>Interpretation</a:t>
             </a:r>
-            <a:endParaRPr lang="en-US" sz="730" dirty="0"/>
+            <a:endParaRPr lang="en-US" sz="1200" dirty="0"/>
           </a:p>
         </p:txBody>
       </p:sp>
@@ -12858,14 +10122,14 @@
               <a:buNone/>
             </a:pPr>
             <a:r>
-              <a:rPr lang="en-US" sz="730" b="1" dirty="0">
+              <a:rPr lang="en-US" sz="1200" b="1" dirty="0">
                 <a:solidFill>
                   <a:srgbClr val="111111"/>
                 </a:solidFill>
               </a:rPr>
               <a:t>Decision</a:t>
             </a:r>
-            <a:endParaRPr lang="en-US" sz="730" dirty="0"/>
+            <a:endParaRPr lang="en-US" sz="1200" dirty="0"/>
           </a:p>
         </p:txBody>
       </p:sp>
@@ -12922,7 +10186,7 @@
         </p:spPr>
         <p:txBody>
           <a:bodyPr wrap="square" lIns="254" tIns="254" rIns="254" bIns="254" rtlCol="0" anchor="ctr">
-            <a:normAutofit/>
+            <a:noAutofit/>
           </a:bodyPr>
           <a:lstStyle/>
           <a:p>
@@ -12930,14 +10194,14 @@
               <a:buNone/>
             </a:pPr>
             <a:r>
-              <a:rPr lang="en-US" sz="730" b="1" dirty="0">
+              <a:rPr lang="en-US" sz="1200" b="1" dirty="0">
                 <a:solidFill>
                   <a:srgbClr val="CC0000"/>
                 </a:solidFill>
               </a:rPr>
               <a:t>Vibration missing during high-speed runs</a:t>
             </a:r>
-            <a:endParaRPr lang="en-US" sz="730" dirty="0"/>
+            <a:endParaRPr lang="en-US" sz="1200" dirty="0"/>
           </a:p>
         </p:txBody>
       </p:sp>
@@ -13002,14 +10266,14 @@
               <a:buNone/>
             </a:pPr>
             <a:r>
-              <a:rPr lang="en-US" sz="730" dirty="0">
+              <a:rPr lang="en-US" sz="1200" dirty="0">
                 <a:solidFill>
                   <a:srgbClr val="111111"/>
                 </a:solidFill>
               </a:rPr>
               <a:t>Sensor saturation may be informative</a:t>
             </a:r>
-            <a:endParaRPr lang="en-US" sz="730" dirty="0"/>
+            <a:endParaRPr lang="en-US" sz="1200" dirty="0"/>
           </a:p>
         </p:txBody>
       </p:sp>
@@ -13074,14 +10338,14 @@
               <a:buNone/>
             </a:pPr>
             <a:r>
-              <a:rPr lang="en-US" sz="730" dirty="0">
+              <a:rPr lang="en-US" sz="1200" dirty="0">
                 <a:solidFill>
                   <a:srgbClr val="111111"/>
                 </a:solidFill>
               </a:rPr>
               <a:t>Add missingness flag and investigate sensor</a:t>
             </a:r>
-            <a:endParaRPr lang="en-US" sz="730" dirty="0"/>
+            <a:endParaRPr lang="en-US" sz="1200" dirty="0"/>
           </a:p>
         </p:txBody>
       </p:sp>
@@ -13146,14 +10410,14 @@
               <a:buNone/>
             </a:pPr>
             <a:r>
-              <a:rPr lang="en-US" sz="730" b="1" dirty="0">
+              <a:rPr lang="en-US" sz="1200" b="1" dirty="0">
                 <a:solidFill>
                   <a:srgbClr val="CC0000"/>
                 </a:solidFill>
               </a:rPr>
               <a:t>pH missing at random</a:t>
             </a:r>
-            <a:endParaRPr lang="en-US" sz="730" dirty="0"/>
+            <a:endParaRPr lang="en-US" sz="1200" dirty="0"/>
           </a:p>
         </p:txBody>
       </p:sp>
@@ -13218,14 +10482,14 @@
               <a:buNone/>
             </a:pPr>
             <a:r>
-              <a:rPr lang="en-US" sz="730" dirty="0">
+              <a:rPr lang="en-US" sz="1200" dirty="0">
                 <a:solidFill>
                   <a:srgbClr val="111111"/>
                 </a:solidFill>
               </a:rPr>
               <a:t>Small random gaps</a:t>
             </a:r>
-            <a:endParaRPr lang="en-US" sz="730" dirty="0"/>
+            <a:endParaRPr lang="en-US" sz="1200" dirty="0"/>
           </a:p>
         </p:txBody>
       </p:sp>
@@ -13290,14 +10554,14 @@
               <a:buNone/>
             </a:pPr>
             <a:r>
-              <a:rPr lang="en-US" sz="730" dirty="0">
+              <a:rPr lang="en-US" sz="1200" dirty="0">
                 <a:solidFill>
                   <a:srgbClr val="111111"/>
                 </a:solidFill>
               </a:rPr>
               <a:t>Median imputation may be acceptable</a:t>
             </a:r>
-            <a:endParaRPr lang="en-US" sz="730" dirty="0"/>
+            <a:endParaRPr lang="en-US" sz="1200" dirty="0"/>
           </a:p>
         </p:txBody>
       </p:sp>
@@ -13331,7 +10595,7 @@
           <a:bodyPr/>
           <a:lstStyle/>
           <a:p>
-            <a:endParaRPr lang="en-US"/>
+            <a:endParaRPr lang="en-US" dirty="0"/>
           </a:p>
         </p:txBody>
       </p:sp>
@@ -13354,7 +10618,7 @@
         </p:spPr>
         <p:txBody>
           <a:bodyPr wrap="square" lIns="254" tIns="254" rIns="254" bIns="254" rtlCol="0" anchor="ctr">
-            <a:normAutofit/>
+            <a:noAutofit/>
           </a:bodyPr>
           <a:lstStyle/>
           <a:p>
@@ -13362,14 +10626,14 @@
               <a:buNone/>
             </a:pPr>
             <a:r>
-              <a:rPr lang="en-US" sz="730" b="1" dirty="0">
+              <a:rPr lang="en-US" sz="1200" b="1" dirty="0">
                 <a:solidFill>
                   <a:srgbClr val="CC0000"/>
                 </a:solidFill>
               </a:rPr>
               <a:t>Final inspection score missing before inspection</a:t>
             </a:r>
-            <a:endParaRPr lang="en-US" sz="730" dirty="0"/>
+            <a:endParaRPr lang="en-US" sz="1200" dirty="0"/>
           </a:p>
         </p:txBody>
       </p:sp>
@@ -13434,14 +10698,14 @@
               <a:buNone/>
             </a:pPr>
             <a:r>
-              <a:rPr lang="en-US" sz="730" dirty="0">
+              <a:rPr lang="en-US" sz="1200" dirty="0">
                 <a:solidFill>
                   <a:srgbClr val="111111"/>
                 </a:solidFill>
               </a:rPr>
               <a:t>Prediction-time leakage risk</a:t>
             </a:r>
-            <a:endParaRPr lang="en-US" sz="730" dirty="0"/>
+            <a:endParaRPr lang="en-US" sz="1200" dirty="0"/>
           </a:p>
         </p:txBody>
       </p:sp>
@@ -13498,7 +10762,7 @@
         </p:spPr>
         <p:txBody>
           <a:bodyPr wrap="square" lIns="254" tIns="254" rIns="254" bIns="254" rtlCol="0" anchor="ctr">
-            <a:normAutofit/>
+            <a:noAutofit/>
           </a:bodyPr>
           <a:lstStyle/>
           <a:p>
@@ -13506,14 +10770,14 @@
               <a:buNone/>
             </a:pPr>
             <a:r>
-              <a:rPr lang="en-US" sz="730" dirty="0">
+              <a:rPr lang="en-US" sz="1200" dirty="0">
                 <a:solidFill>
                   <a:srgbClr val="111111"/>
                 </a:solidFill>
               </a:rPr>
               <a:t>Do not use as input</a:t>
             </a:r>
-            <a:endParaRPr lang="en-US" sz="730" dirty="0"/>
+            <a:endParaRPr lang="en-US" sz="1200" dirty="0"/>
           </a:p>
         </p:txBody>
       </p:sp>
@@ -13607,14 +10871,14 @@
               <a:buNone/>
             </a:pPr>
             <a:r>
-              <a:rPr lang="en-US" sz="550" b="1" dirty="0">
+              <a:rPr lang="en-US" sz="1200" b="1" dirty="0">
                 <a:solidFill>
                   <a:srgbClr val="555555"/>
                 </a:solidFill>
               </a:rPr>
               <a:t>APPLIED AI DESIGN WORKSHOP</a:t>
             </a:r>
-            <a:endParaRPr lang="en-US" sz="550" dirty="0"/>
+            <a:endParaRPr lang="en-US" sz="1200" dirty="0"/>
           </a:p>
         </p:txBody>
       </p:sp>
@@ -13643,14 +10907,14 @@
               <a:buNone/>
             </a:pPr>
             <a:r>
-              <a:rPr lang="en-US" sz="550" dirty="0">
+              <a:rPr lang="en-US" sz="1200" dirty="0">
                 <a:solidFill>
                   <a:srgbClr val="555555"/>
                 </a:solidFill>
               </a:rPr>
               <a:t>Session 3</a:t>
             </a:r>
-            <a:endParaRPr lang="en-US" sz="550" dirty="0"/>
+            <a:endParaRPr lang="en-US" sz="1200" dirty="0"/>
           </a:p>
         </p:txBody>
       </p:sp>
@@ -13717,14 +10981,14 @@
               <a:buNone/>
             </a:pPr>
             <a:r>
-              <a:rPr lang="en-US" sz="800" dirty="0">
+              <a:rPr lang="en-US" sz="1200" dirty="0">
                 <a:solidFill>
                   <a:srgbClr val="333333"/>
                 </a:solidFill>
               </a:rPr>
               <a:t>Models need numeric arrays, but disciplinary data often contain categories, IDs, dates, and text.</a:t>
             </a:r>
-            <a:endParaRPr lang="en-US" sz="800" dirty="0"/>
+            <a:endParaRPr lang="en-US" sz="1200" dirty="0"/>
           </a:p>
         </p:txBody>
       </p:sp>
@@ -13787,14 +11051,14 @@
               <a:buNone/>
             </a:pPr>
             <a:r>
-              <a:rPr lang="en-US" sz="800" b="1" dirty="0">
+              <a:rPr lang="en-US" sz="1200" b="1" dirty="0">
                 <a:solidFill>
                   <a:srgbClr val="111111"/>
                 </a:solidFill>
               </a:rPr>
               <a:t>Data type</a:t>
             </a:r>
-            <a:endParaRPr lang="en-US" sz="800" dirty="0"/>
+            <a:endParaRPr lang="en-US" sz="1200" dirty="0"/>
           </a:p>
         </p:txBody>
       </p:sp>
@@ -13857,14 +11121,14 @@
               <a:buNone/>
             </a:pPr>
             <a:r>
-              <a:rPr lang="en-US" sz="800" b="1" dirty="0">
+              <a:rPr lang="en-US" sz="1200" b="1" dirty="0">
                 <a:solidFill>
                   <a:srgbClr val="111111"/>
                 </a:solidFill>
               </a:rPr>
               <a:t>Examples</a:t>
             </a:r>
-            <a:endParaRPr lang="en-US" sz="800" dirty="0"/>
+            <a:endParaRPr lang="en-US" sz="1200" dirty="0"/>
           </a:p>
         </p:txBody>
       </p:sp>
@@ -13927,14 +11191,14 @@
               <a:buNone/>
             </a:pPr>
             <a:r>
-              <a:rPr lang="en-US" sz="800" b="1" dirty="0">
+              <a:rPr lang="en-US" sz="1200" b="1" dirty="0">
                 <a:solidFill>
                   <a:srgbClr val="111111"/>
                 </a:solidFill>
               </a:rPr>
               <a:t>Typical handling</a:t>
             </a:r>
-            <a:endParaRPr lang="en-US" sz="800" dirty="0"/>
+            <a:endParaRPr lang="en-US" sz="1200" dirty="0"/>
           </a:p>
         </p:txBody>
       </p:sp>
@@ -13999,14 +11263,14 @@
               <a:buNone/>
             </a:pPr>
             <a:r>
-              <a:rPr lang="en-US" sz="800" b="1" dirty="0">
+              <a:rPr lang="en-US" sz="1200" b="1" dirty="0">
                 <a:solidFill>
                   <a:srgbClr val="CC0000"/>
                 </a:solidFill>
               </a:rPr>
               <a:t>Numeric</a:t>
             </a:r>
-            <a:endParaRPr lang="en-US" sz="800" dirty="0"/>
+            <a:endParaRPr lang="en-US" sz="1200" dirty="0"/>
           </a:p>
         </p:txBody>
       </p:sp>
@@ -14071,14 +11335,14 @@
               <a:buNone/>
             </a:pPr>
             <a:r>
-              <a:rPr lang="en-US" sz="800" dirty="0">
+              <a:rPr lang="en-US" sz="1200" dirty="0">
                 <a:solidFill>
                   <a:srgbClr val="111111"/>
                 </a:solidFill>
               </a:rPr>
               <a:t>temperature, pressure, speed</a:t>
             </a:r>
-            <a:endParaRPr lang="en-US" sz="800" dirty="0"/>
+            <a:endParaRPr lang="en-US" sz="1200" dirty="0"/>
           </a:p>
         </p:txBody>
       </p:sp>
@@ -14143,14 +11407,14 @@
               <a:buNone/>
             </a:pPr>
             <a:r>
-              <a:rPr lang="en-US" sz="800" dirty="0">
+              <a:rPr lang="en-US" sz="1200" dirty="0">
                 <a:solidFill>
                   <a:srgbClr val="111111"/>
                 </a:solidFill>
               </a:rPr>
               <a:t>Impute missing values; scale if needed</a:t>
             </a:r>
-            <a:endParaRPr lang="en-US" sz="800" dirty="0"/>
+            <a:endParaRPr lang="en-US" sz="1200" dirty="0"/>
           </a:p>
         </p:txBody>
       </p:sp>
@@ -14215,14 +11479,14 @@
               <a:buNone/>
             </a:pPr>
             <a:r>
-              <a:rPr lang="en-US" sz="800" b="1" dirty="0">
+              <a:rPr lang="en-US" sz="1200" b="1" dirty="0">
                 <a:solidFill>
                   <a:srgbClr val="CC0000"/>
                 </a:solidFill>
               </a:rPr>
               <a:t>Categorical</a:t>
             </a:r>
-            <a:endParaRPr lang="en-US" sz="800" dirty="0"/>
+            <a:endParaRPr lang="en-US" sz="1200" dirty="0"/>
           </a:p>
         </p:txBody>
       </p:sp>
@@ -14287,14 +11551,14 @@
               <a:buNone/>
             </a:pPr>
             <a:r>
-              <a:rPr lang="en-US" sz="800" dirty="0">
+              <a:rPr lang="en-US" sz="1200" dirty="0">
                 <a:solidFill>
                   <a:srgbClr val="111111"/>
                 </a:solidFill>
               </a:rPr>
               <a:t>material type, machine ID, treatment group</a:t>
             </a:r>
-            <a:endParaRPr lang="en-US" sz="800" dirty="0"/>
+            <a:endParaRPr lang="en-US" sz="1200" dirty="0"/>
           </a:p>
         </p:txBody>
       </p:sp>
@@ -14328,7 +11592,7 @@
           <a:bodyPr/>
           <a:lstStyle/>
           <a:p>
-            <a:endParaRPr lang="en-US"/>
+            <a:endParaRPr lang="en-US" dirty="0"/>
           </a:p>
         </p:txBody>
       </p:sp>
@@ -14359,14 +11623,14 @@
               <a:buNone/>
             </a:pPr>
             <a:r>
-              <a:rPr lang="en-US" sz="800" dirty="0">
+              <a:rPr lang="en-US" sz="1200" dirty="0">
                 <a:solidFill>
                   <a:srgbClr val="111111"/>
                 </a:solidFill>
               </a:rPr>
               <a:t>One-hot encode or ordinal encode carefully</a:t>
             </a:r>
-            <a:endParaRPr lang="en-US" sz="800" dirty="0"/>
+            <a:endParaRPr lang="en-US" sz="1200" dirty="0"/>
           </a:p>
         </p:txBody>
       </p:sp>
@@ -14431,14 +11695,14 @@
               <a:buNone/>
             </a:pPr>
             <a:r>
-              <a:rPr lang="en-US" sz="800" b="1" dirty="0">
+              <a:rPr lang="en-US" sz="1200" b="1" dirty="0">
                 <a:solidFill>
                   <a:srgbClr val="CC0000"/>
                 </a:solidFill>
               </a:rPr>
               <a:t>Datetime</a:t>
             </a:r>
-            <a:endParaRPr lang="en-US" sz="800" dirty="0"/>
+            <a:endParaRPr lang="en-US" sz="1200" dirty="0"/>
           </a:p>
         </p:txBody>
       </p:sp>
@@ -14472,7 +11736,7 @@
           <a:bodyPr/>
           <a:lstStyle/>
           <a:p>
-            <a:endParaRPr lang="en-US"/>
+            <a:endParaRPr lang="en-US" dirty="0"/>
           </a:p>
         </p:txBody>
       </p:sp>
@@ -14503,14 +11767,14 @@
               <a:buNone/>
             </a:pPr>
             <a:r>
-              <a:rPr lang="en-US" sz="800" dirty="0">
+              <a:rPr lang="en-US" sz="1200" dirty="0">
                 <a:solidFill>
                   <a:srgbClr val="111111"/>
                 </a:solidFill>
               </a:rPr>
               <a:t>timestamp, collection date</a:t>
             </a:r>
-            <a:endParaRPr lang="en-US" sz="800" dirty="0"/>
+            <a:endParaRPr lang="en-US" sz="1200" dirty="0"/>
           </a:p>
         </p:txBody>
       </p:sp>
@@ -14575,14 +11839,14 @@
               <a:buNone/>
             </a:pPr>
             <a:r>
-              <a:rPr lang="en-US" sz="800" dirty="0">
+              <a:rPr lang="en-US" sz="1200" dirty="0">
                 <a:solidFill>
                   <a:srgbClr val="111111"/>
                 </a:solidFill>
               </a:rPr>
               <a:t>Extract elapsed time, hour, day, cycle, or lags</a:t>
             </a:r>
-            <a:endParaRPr lang="en-US" sz="800" dirty="0"/>
+            <a:endParaRPr lang="en-US" sz="1200" dirty="0"/>
           </a:p>
         </p:txBody>
       </p:sp>
@@ -14647,14 +11911,14 @@
               <a:buNone/>
             </a:pPr>
             <a:r>
-              <a:rPr lang="en-US" sz="800" b="1" dirty="0">
+              <a:rPr lang="en-US" sz="1200" b="1" dirty="0">
                 <a:solidFill>
                   <a:srgbClr val="CC0000"/>
                 </a:solidFill>
               </a:rPr>
               <a:t>Identifier</a:t>
             </a:r>
-            <a:endParaRPr lang="en-US" sz="800" dirty="0"/>
+            <a:endParaRPr lang="en-US" sz="1200" dirty="0"/>
           </a:p>
         </p:txBody>
       </p:sp>
@@ -14719,14 +11983,14 @@
               <a:buNone/>
             </a:pPr>
             <a:r>
-              <a:rPr lang="en-US" sz="800" dirty="0">
+              <a:rPr lang="en-US" sz="1200" dirty="0">
                 <a:solidFill>
                   <a:srgbClr val="111111"/>
                 </a:solidFill>
               </a:rPr>
               <a:t>part ID, student ID, batch ID</a:t>
             </a:r>
-            <a:endParaRPr lang="en-US" sz="800" dirty="0"/>
+            <a:endParaRPr lang="en-US" sz="1200" dirty="0"/>
           </a:p>
         </p:txBody>
       </p:sp>
@@ -14791,14 +12055,14 @@
               <a:buNone/>
             </a:pPr>
             <a:r>
-              <a:rPr lang="en-US" sz="800" dirty="0">
+              <a:rPr lang="en-US" sz="1200" dirty="0">
                 <a:solidFill>
                   <a:srgbClr val="111111"/>
                 </a:solidFill>
               </a:rPr>
               <a:t>Usually remove; use for grouping or split strategy</a:t>
             </a:r>
-            <a:endParaRPr lang="en-US" sz="800" dirty="0"/>
+            <a:endParaRPr lang="en-US" sz="1200" dirty="0"/>
           </a:p>
         </p:txBody>
       </p:sp>
@@ -14863,14 +12127,14 @@
               <a:buNone/>
             </a:pPr>
             <a:r>
-              <a:rPr lang="en-US" sz="800" b="1" dirty="0">
+              <a:rPr lang="en-US" sz="1200" b="1" dirty="0">
                 <a:solidFill>
                   <a:srgbClr val="CC0000"/>
                 </a:solidFill>
               </a:rPr>
               <a:t>Text</a:t>
             </a:r>
-            <a:endParaRPr lang="en-US" sz="800" dirty="0"/>
+            <a:endParaRPr lang="en-US" sz="1200" dirty="0"/>
           </a:p>
         </p:txBody>
       </p:sp>
@@ -14935,14 +12199,14 @@
               <a:buNone/>
             </a:pPr>
             <a:r>
-              <a:rPr lang="en-US" sz="800" dirty="0">
+              <a:rPr lang="en-US" sz="1200" dirty="0">
                 <a:solidFill>
                   <a:srgbClr val="111111"/>
                 </a:solidFill>
               </a:rPr>
               <a:t>notes, descriptions, comments</a:t>
             </a:r>
-            <a:endParaRPr lang="en-US" sz="800" dirty="0"/>
+            <a:endParaRPr lang="en-US" sz="1200" dirty="0"/>
           </a:p>
         </p:txBody>
       </p:sp>
@@ -15007,14 +12271,14 @@
               <a:buNone/>
             </a:pPr>
             <a:r>
-              <a:rPr lang="en-US" sz="800" dirty="0">
+              <a:rPr lang="en-US" sz="1200" dirty="0">
                 <a:solidFill>
                   <a:srgbClr val="111111"/>
                 </a:solidFill>
               </a:rPr>
               <a:t>Use separate NLP workflow; avoid accidental leakage</a:t>
             </a:r>
-            <a:endParaRPr lang="en-US" sz="800" dirty="0"/>
+            <a:endParaRPr lang="en-US" sz="1200" dirty="0"/>
           </a:p>
         </p:txBody>
       </p:sp>
@@ -15077,14 +12341,14 @@
               <a:buNone/>
             </a:pPr>
             <a:r>
-              <a:rPr lang="en-US" sz="820" b="1" dirty="0">
+              <a:rPr lang="en-US" sz="1200" b="1" dirty="0">
                 <a:solidFill>
                   <a:srgbClr val="CC0000"/>
                 </a:solidFill>
               </a:rPr>
               <a:t>Question to ask: is this variable a meaningful predictor, an identifier, or a disguised answer?</a:t>
             </a:r>
-            <a:endParaRPr lang="en-US" sz="820" dirty="0"/>
+            <a:endParaRPr lang="en-US" sz="1200" dirty="0"/>
           </a:p>
         </p:txBody>
       </p:sp>
@@ -15178,14 +12442,14 @@
               <a:buNone/>
             </a:pPr>
             <a:r>
-              <a:rPr lang="en-US" sz="550" b="1" dirty="0">
+              <a:rPr lang="en-US" sz="1200" b="1" dirty="0">
                 <a:solidFill>
                   <a:srgbClr val="555555"/>
                 </a:solidFill>
               </a:rPr>
               <a:t>APPLIED AI DESIGN WORKSHOP</a:t>
             </a:r>
-            <a:endParaRPr lang="en-US" sz="550" dirty="0"/>
+            <a:endParaRPr lang="en-US" sz="1200" dirty="0"/>
           </a:p>
         </p:txBody>
       </p:sp>
@@ -15214,14 +12478,14 @@
               <a:buNone/>
             </a:pPr>
             <a:r>
-              <a:rPr lang="en-US" sz="550" dirty="0">
+              <a:rPr lang="en-US" sz="1200" dirty="0">
                 <a:solidFill>
                   <a:srgbClr val="555555"/>
                 </a:solidFill>
               </a:rPr>
               <a:t>Session 3</a:t>
             </a:r>
-            <a:endParaRPr lang="en-US" sz="550" dirty="0"/>
+            <a:endParaRPr lang="en-US" sz="1200" dirty="0"/>
           </a:p>
         </p:txBody>
       </p:sp>
@@ -15288,14 +12552,14 @@
               <a:buNone/>
             </a:pPr>
             <a:r>
-              <a:rPr lang="en-US" sz="800" dirty="0">
+              <a:rPr lang="en-US" sz="1200" dirty="0">
                 <a:solidFill>
                   <a:srgbClr val="333333"/>
                 </a:solidFill>
               </a:rPr>
               <a:t>Transformations should make inputs usable without changing the meaning of the problem.</a:t>
             </a:r>
-            <a:endParaRPr lang="en-US" sz="800" dirty="0"/>
+            <a:endParaRPr lang="en-US" sz="1200" dirty="0"/>
           </a:p>
         </p:txBody>
       </p:sp>
@@ -15398,48 +12662,48 @@
               <a:buNone/>
             </a:pPr>
             <a:r>
-              <a:rPr lang="en-US" sz="820" dirty="0">
+              <a:rPr lang="en-US" sz="1200" dirty="0">
                 <a:solidFill>
                   <a:srgbClr val="111111"/>
                 </a:solidFill>
               </a:rPr>
               <a:t>Why it matters:</a:t>
             </a:r>
-            <a:endParaRPr lang="en-US" sz="820" dirty="0"/>
-          </a:p>
-          <a:p>
-            <a:pPr marL="0" indent="0">
-              <a:buNone/>
-            </a:pPr>
-            <a:r>
-              <a:rPr lang="en-US" sz="820" dirty="0">
+            <a:endParaRPr lang="en-US" sz="1200" dirty="0"/>
+          </a:p>
+          <a:p>
+            <a:pPr marL="0" indent="0">
+              <a:buNone/>
+            </a:pPr>
+            <a:r>
+              <a:rPr lang="en-US" sz="1200" dirty="0">
                 <a:solidFill>
                   <a:srgbClr val="111111"/>
                 </a:solidFill>
               </a:rPr>
               <a:t>variables measured in large units can dominate distance-based or coefficient-based models.</a:t>
             </a:r>
-            <a:endParaRPr lang="en-US" sz="820" dirty="0"/>
-          </a:p>
-          <a:p>
-            <a:pPr marL="0" indent="0">
-              <a:buNone/>
-            </a:pPr>
-            <a:endParaRPr lang="en-US" sz="820" dirty="0"/>
-          </a:p>
-          <a:p>
-            <a:pPr marL="0" indent="0">
-              <a:buNone/>
-            </a:pPr>
-            <a:r>
-              <a:rPr lang="en-US" sz="820" dirty="0">
+            <a:endParaRPr lang="en-US" sz="1200" dirty="0"/>
+          </a:p>
+          <a:p>
+            <a:pPr marL="0" indent="0">
+              <a:buNone/>
+            </a:pPr>
+            <a:endParaRPr lang="en-US" sz="1200" dirty="0"/>
+          </a:p>
+          <a:p>
+            <a:pPr marL="0" indent="0">
+              <a:buNone/>
+            </a:pPr>
+            <a:r>
+              <a:rPr lang="en-US" sz="1200" dirty="0">
                 <a:solidFill>
                   <a:srgbClr val="111111"/>
                 </a:solidFill>
               </a:rPr>
               <a:t>Use for KNN, SVM, PCA, logistic regression, and regularized regression.</a:t>
             </a:r>
-            <a:endParaRPr lang="en-US" sz="820" dirty="0"/>
+            <a:endParaRPr lang="en-US" sz="1200" dirty="0"/>
           </a:p>
         </p:txBody>
       </p:sp>
@@ -15542,48 +12806,48 @@
               <a:buNone/>
             </a:pPr>
             <a:r>
-              <a:rPr lang="en-US" sz="820" dirty="0">
+              <a:rPr lang="en-US" sz="1200" dirty="0">
                 <a:solidFill>
                   <a:srgbClr val="111111"/>
                 </a:solidFill>
               </a:rPr>
               <a:t>Why it matters:</a:t>
             </a:r>
-            <a:endParaRPr lang="en-US" sz="820" dirty="0"/>
-          </a:p>
-          <a:p>
-            <a:pPr marL="0" indent="0">
-              <a:buNone/>
-            </a:pPr>
-            <a:r>
-              <a:rPr lang="en-US" sz="820" dirty="0">
+            <a:endParaRPr lang="en-US" sz="1200" dirty="0"/>
+          </a:p>
+          <a:p>
+            <a:pPr marL="0" indent="0">
+              <a:buNone/>
+            </a:pPr>
+            <a:r>
+              <a:rPr lang="en-US" sz="1200" dirty="0">
                 <a:solidFill>
                   <a:srgbClr val="111111"/>
                 </a:solidFill>
               </a:rPr>
               <a:t>models cannot use raw text categories.</a:t>
             </a:r>
-            <a:endParaRPr lang="en-US" sz="820" dirty="0"/>
-          </a:p>
-          <a:p>
-            <a:pPr marL="0" indent="0">
-              <a:buNone/>
-            </a:pPr>
-            <a:endParaRPr lang="en-US" sz="820" dirty="0"/>
-          </a:p>
-          <a:p>
-            <a:pPr marL="0" indent="0">
-              <a:buNone/>
-            </a:pPr>
-            <a:r>
-              <a:rPr lang="en-US" sz="820" dirty="0">
+            <a:endParaRPr lang="en-US" sz="1200" dirty="0"/>
+          </a:p>
+          <a:p>
+            <a:pPr marL="0" indent="0">
+              <a:buNone/>
+            </a:pPr>
+            <a:endParaRPr lang="en-US" sz="1200" dirty="0"/>
+          </a:p>
+          <a:p>
+            <a:pPr marL="0" indent="0">
+              <a:buNone/>
+            </a:pPr>
+            <a:r>
+              <a:rPr lang="en-US" sz="1200" dirty="0">
                 <a:solidFill>
                   <a:srgbClr val="111111"/>
                 </a:solidFill>
               </a:rPr>
               <a:t>Use one-hot encoding for categories without natural order. Be careful with ordinal encoding.</a:t>
             </a:r>
-            <a:endParaRPr lang="en-US" sz="820" dirty="0"/>
+            <a:endParaRPr lang="en-US" sz="1200" dirty="0"/>
           </a:p>
         </p:txBody>
       </p:sp>
@@ -15686,14 +12950,14 @@
               <a:buNone/>
             </a:pPr>
             <a:r>
-              <a:rPr lang="en-US" sz="820" dirty="0">
+              <a:rPr lang="en-US" sz="1200" dirty="0">
                 <a:solidFill>
                   <a:srgbClr val="111111"/>
                 </a:solidFill>
               </a:rPr>
               <a:t>Fit scalers, encoders, and imputers on training data only. Apply the learned transformations to validation and test sets.</a:t>
             </a:r>
-            <a:endParaRPr lang="en-US" sz="820" dirty="0"/>
+            <a:endParaRPr lang="en-US" sz="1200" dirty="0"/>
           </a:p>
         </p:txBody>
       </p:sp>
@@ -15727,7 +12991,7 @@
           <a:bodyPr/>
           <a:lstStyle/>
           <a:p>
-            <a:endParaRPr lang="en-US"/>
+            <a:endParaRPr lang="en-US" dirty="0"/>
           </a:p>
         </p:txBody>
       </p:sp>
@@ -15756,14 +13020,14 @@
               <a:buNone/>
             </a:pPr>
             <a:r>
-              <a:rPr lang="en-US" sz="820" b="1" dirty="0">
+              <a:rPr lang="en-US" sz="1200" b="1" dirty="0">
                 <a:solidFill>
                   <a:srgbClr val="CC0000"/>
                 </a:solidFill>
               </a:rPr>
               <a:t>Preprocessing rules are learned from the training set, not from the full dataset.</a:t>
             </a:r>
-            <a:endParaRPr lang="en-US" sz="820" dirty="0"/>
+            <a:endParaRPr lang="en-US" sz="1200" dirty="0"/>
           </a:p>
         </p:txBody>
       </p:sp>
@@ -15857,14 +13121,14 @@
               <a:buNone/>
             </a:pPr>
             <a:r>
-              <a:rPr lang="en-US" sz="550" b="1" dirty="0">
+              <a:rPr lang="en-US" sz="1100" b="1" dirty="0">
                 <a:solidFill>
                   <a:srgbClr val="555555"/>
                 </a:solidFill>
               </a:rPr>
               <a:t>APPLIED AI DESIGN WORKSHOP</a:t>
             </a:r>
-            <a:endParaRPr lang="en-US" sz="550" dirty="0"/>
+            <a:endParaRPr lang="en-US" sz="1100" dirty="0"/>
           </a:p>
         </p:txBody>
       </p:sp>
@@ -15893,14 +13157,14 @@
               <a:buNone/>
             </a:pPr>
             <a:r>
-              <a:rPr lang="en-US" sz="550" dirty="0">
+              <a:rPr lang="en-US" sz="1200" dirty="0">
                 <a:solidFill>
                   <a:srgbClr val="555555"/>
                 </a:solidFill>
               </a:rPr>
               <a:t>Session 3</a:t>
             </a:r>
-            <a:endParaRPr lang="en-US" sz="550" dirty="0"/>
+            <a:endParaRPr lang="en-US" sz="1200" dirty="0"/>
           </a:p>
         </p:txBody>
       </p:sp>
@@ -15967,14 +13231,14 @@
               <a:buNone/>
             </a:pPr>
             <a:r>
-              <a:rPr lang="en-US" sz="800" dirty="0">
+              <a:rPr lang="en-US" sz="1200" dirty="0">
                 <a:solidFill>
                   <a:srgbClr val="333333"/>
                 </a:solidFill>
               </a:rPr>
               <a:t>Leakage creates inflated performance by letting the model see information unavailable in real use.</a:t>
             </a:r>
-            <a:endParaRPr lang="en-US" sz="800" dirty="0"/>
+            <a:endParaRPr lang="en-US" sz="1200" dirty="0"/>
           </a:p>
         </p:txBody>
       </p:sp>
@@ -16077,34 +13341,34 @@
               <a:buNone/>
             </a:pPr>
             <a:r>
-              <a:rPr lang="en-US" sz="830" dirty="0">
+              <a:rPr lang="en-US" sz="1200" dirty="0">
                 <a:solidFill>
                   <a:srgbClr val="111111"/>
                 </a:solidFill>
               </a:rPr>
               <a:t>Input contains the answer or a near-answer.</a:t>
             </a:r>
-            <a:endParaRPr lang="en-US" sz="830" dirty="0"/>
-          </a:p>
-          <a:p>
-            <a:pPr marL="0" indent="0">
-              <a:buNone/>
-            </a:pPr>
-            <a:endParaRPr lang="en-US" sz="830" dirty="0"/>
-          </a:p>
-          <a:p>
-            <a:pPr marL="0" indent="0">
-              <a:buNone/>
-            </a:pPr>
-            <a:r>
-              <a:rPr lang="en-US" sz="830" dirty="0">
+            <a:endParaRPr lang="en-US" sz="1200" dirty="0"/>
+          </a:p>
+          <a:p>
+            <a:pPr marL="0" indent="0">
+              <a:buNone/>
+            </a:pPr>
+            <a:endParaRPr lang="en-US" sz="1200" dirty="0"/>
+          </a:p>
+          <a:p>
+            <a:pPr marL="0" indent="0">
+              <a:buNone/>
+            </a:pPr>
+            <a:r>
+              <a:rPr lang="en-US" sz="1200" dirty="0">
                 <a:solidFill>
                   <a:srgbClr val="111111"/>
                 </a:solidFill>
               </a:rPr>
               <a:t>Example: final inspection score used to predict pass/fail quality.</a:t>
             </a:r>
-            <a:endParaRPr lang="en-US" sz="830" dirty="0"/>
+            <a:endParaRPr lang="en-US" sz="1200" dirty="0"/>
           </a:p>
         </p:txBody>
       </p:sp>
@@ -16207,34 +13471,34 @@
               <a:buNone/>
             </a:pPr>
             <a:r>
-              <a:rPr lang="en-US" sz="830" dirty="0">
+              <a:rPr lang="en-US" sz="1200" dirty="0">
                 <a:solidFill>
                   <a:srgbClr val="111111"/>
                 </a:solidFill>
               </a:rPr>
               <a:t>Future information is used to predict an earlier outcome.</a:t>
             </a:r>
-            <a:endParaRPr lang="en-US" sz="830" dirty="0"/>
-          </a:p>
-          <a:p>
-            <a:pPr marL="0" indent="0">
-              <a:buNone/>
-            </a:pPr>
-            <a:endParaRPr lang="en-US" sz="830" dirty="0"/>
-          </a:p>
-          <a:p>
-            <a:pPr marL="0" indent="0">
-              <a:buNone/>
-            </a:pPr>
-            <a:r>
-              <a:rPr lang="en-US" sz="830" dirty="0">
+            <a:endParaRPr lang="en-US" sz="1200" dirty="0"/>
+          </a:p>
+          <a:p>
+            <a:pPr marL="0" indent="0">
+              <a:buNone/>
+            </a:pPr>
+            <a:endParaRPr lang="en-US" sz="1200" dirty="0"/>
+          </a:p>
+          <a:p>
+            <a:pPr marL="0" indent="0">
+              <a:buNone/>
+            </a:pPr>
+            <a:r>
+              <a:rPr lang="en-US" sz="1200" dirty="0">
                 <a:solidFill>
                   <a:srgbClr val="111111"/>
                 </a:solidFill>
               </a:rPr>
               <a:t>Example: using post-failure data to predict pre-failure status.</a:t>
             </a:r>
-            <a:endParaRPr lang="en-US" sz="830" dirty="0"/>
+            <a:endParaRPr lang="en-US" sz="1200" dirty="0"/>
           </a:p>
         </p:txBody>
       </p:sp>
@@ -16337,34 +13601,34 @@
               <a:buNone/>
             </a:pPr>
             <a:r>
-              <a:rPr lang="en-US" sz="830" dirty="0">
+              <a:rPr lang="en-US" sz="1200" dirty="0">
                 <a:solidFill>
                   <a:srgbClr val="111111"/>
                 </a:solidFill>
               </a:rPr>
               <a:t>Related samples appear in both train and test sets.</a:t>
             </a:r>
-            <a:endParaRPr lang="en-US" sz="830" dirty="0"/>
-          </a:p>
-          <a:p>
-            <a:pPr marL="0" indent="0">
-              <a:buNone/>
-            </a:pPr>
-            <a:endParaRPr lang="en-US" sz="830" dirty="0"/>
-          </a:p>
-          <a:p>
-            <a:pPr marL="0" indent="0">
-              <a:buNone/>
-            </a:pPr>
-            <a:r>
-              <a:rPr lang="en-US" sz="830" dirty="0">
+            <a:endParaRPr lang="en-US" sz="1200" dirty="0"/>
+          </a:p>
+          <a:p>
+            <a:pPr marL="0" indent="0">
+              <a:buNone/>
+            </a:pPr>
+            <a:endParaRPr lang="en-US" sz="1200" dirty="0"/>
+          </a:p>
+          <a:p>
+            <a:pPr marL="0" indent="0">
+              <a:buNone/>
+            </a:pPr>
+            <a:r>
+              <a:rPr lang="en-US" sz="1200" dirty="0">
                 <a:solidFill>
                   <a:srgbClr val="111111"/>
                 </a:solidFill>
               </a:rPr>
               <a:t>Example: parts from the same batch split across train and test.</a:t>
             </a:r>
-            <a:endParaRPr lang="en-US" sz="830" dirty="0"/>
+            <a:endParaRPr lang="en-US" sz="1200" dirty="0"/>
           </a:p>
         </p:txBody>
       </p:sp>
@@ -16429,14 +13693,14 @@
               <a:buNone/>
             </a:pPr>
             <a:r>
-              <a:rPr lang="en-US" sz="920" b="1" dirty="0">
+              <a:rPr lang="en-US" sz="1200" b="1" dirty="0">
                 <a:solidFill>
                   <a:srgbClr val="CC0000"/>
                 </a:solidFill>
               </a:rPr>
-              <a:t>Activity prompt</a:t>
-            </a:r>
-            <a:endParaRPr lang="en-US" sz="920" dirty="0"/>
+              <a:t>Self Activity</a:t>
+            </a:r>
+            <a:endParaRPr lang="en-US" sz="1200" dirty="0"/>
           </a:p>
         </p:txBody>
       </p:sp>
@@ -16459,7 +13723,7 @@
         </p:spPr>
         <p:txBody>
           <a:bodyPr wrap="square" lIns="0" tIns="0" rIns="0" bIns="0" rtlCol="0" anchor="t">
-            <a:normAutofit/>
+            <a:noAutofit/>
           </a:bodyPr>
           <a:lstStyle/>
           <a:p>
@@ -16467,14 +13731,14 @@
               <a:buNone/>
             </a:pPr>
             <a:r>
-              <a:rPr lang="en-US" sz="920" dirty="0">
+              <a:rPr lang="en-US" sz="1400" dirty="0">
                 <a:solidFill>
                   <a:srgbClr val="111111"/>
                 </a:solidFill>
               </a:rPr>
               <a:t>For each feature, ask: would this value be known at the moment the prediction is needed?</a:t>
             </a:r>
-            <a:endParaRPr lang="en-US" sz="920" dirty="0"/>
+            <a:endParaRPr lang="en-US" sz="1400" dirty="0"/>
           </a:p>
         </p:txBody>
       </p:sp>
@@ -16568,14 +13832,14 @@
               <a:buNone/>
             </a:pPr>
             <a:r>
-              <a:rPr lang="en-US" sz="550" b="1" dirty="0">
+              <a:rPr lang="en-US" sz="1200" b="1" dirty="0">
                 <a:solidFill>
                   <a:srgbClr val="555555"/>
                 </a:solidFill>
               </a:rPr>
               <a:t>APPLIED AI DESIGN WORKSHOP</a:t>
             </a:r>
-            <a:endParaRPr lang="en-US" sz="550" dirty="0"/>
+            <a:endParaRPr lang="en-US" sz="1200" dirty="0"/>
           </a:p>
         </p:txBody>
       </p:sp>
@@ -16604,14 +13868,14 @@
               <a:buNone/>
             </a:pPr>
             <a:r>
-              <a:rPr lang="en-US" sz="550" dirty="0">
+              <a:rPr lang="en-US" sz="1200" dirty="0">
                 <a:solidFill>
                   <a:srgbClr val="555555"/>
                 </a:solidFill>
               </a:rPr>
               <a:t>Session 3</a:t>
             </a:r>
-            <a:endParaRPr lang="en-US" sz="550" dirty="0"/>
+            <a:endParaRPr lang="en-US" sz="1200" dirty="0"/>
           </a:p>
         </p:txBody>
       </p:sp>
@@ -16678,14 +13942,14 @@
               <a:buNone/>
             </a:pPr>
             <a:r>
-              <a:rPr lang="en-US" sz="800" dirty="0">
+              <a:rPr lang="en-US" sz="1200" dirty="0">
                 <a:solidFill>
                   <a:srgbClr val="333333"/>
                 </a:solidFill>
               </a:rPr>
               <a:t>Feature engineering converts raw measurements into variables that better represent mechanisms, behavior, or context.</a:t>
             </a:r>
-            <a:endParaRPr lang="en-US" sz="800" dirty="0"/>
+            <a:endParaRPr lang="en-US" sz="1200" dirty="0"/>
           </a:p>
         </p:txBody>
       </p:sp>
@@ -16748,14 +14012,14 @@
               <a:buNone/>
             </a:pPr>
             <a:r>
-              <a:rPr lang="en-US" sz="780" b="1" dirty="0">
+              <a:rPr lang="en-US" sz="1200" b="1" dirty="0">
                 <a:solidFill>
                   <a:srgbClr val="111111"/>
                 </a:solidFill>
               </a:rPr>
               <a:t>Raw data</a:t>
             </a:r>
-            <a:endParaRPr lang="en-US" sz="780" dirty="0"/>
+            <a:endParaRPr lang="en-US" sz="1200" dirty="0"/>
           </a:p>
         </p:txBody>
       </p:sp>
@@ -16818,14 +14082,14 @@
               <a:buNone/>
             </a:pPr>
             <a:r>
-              <a:rPr lang="en-US" sz="780" b="1" dirty="0">
+              <a:rPr lang="en-US" sz="1200" b="1" dirty="0">
                 <a:solidFill>
                   <a:srgbClr val="111111"/>
                 </a:solidFill>
               </a:rPr>
               <a:t>Engineered feature</a:t>
             </a:r>
-            <a:endParaRPr lang="en-US" sz="780" dirty="0"/>
+            <a:endParaRPr lang="en-US" sz="1200" dirty="0"/>
           </a:p>
         </p:txBody>
       </p:sp>
@@ -16857,7 +14121,7 @@
           <a:bodyPr/>
           <a:lstStyle/>
           <a:p>
-            <a:endParaRPr lang="en-US"/>
+            <a:endParaRPr lang="en-US" dirty="0"/>
           </a:p>
         </p:txBody>
       </p:sp>
@@ -16888,14 +14152,14 @@
               <a:buNone/>
             </a:pPr>
             <a:r>
-              <a:rPr lang="en-US" sz="780" b="1" dirty="0">
+              <a:rPr lang="en-US" sz="1200" b="1" dirty="0">
                 <a:solidFill>
                   <a:srgbClr val="111111"/>
                 </a:solidFill>
               </a:rPr>
               <a:t>Why useful</a:t>
             </a:r>
-            <a:endParaRPr lang="en-US" sz="780" dirty="0"/>
+            <a:endParaRPr lang="en-US" sz="1200" dirty="0"/>
           </a:p>
         </p:txBody>
       </p:sp>
@@ -16960,14 +14224,14 @@
               <a:buNone/>
             </a:pPr>
             <a:r>
-              <a:rPr lang="en-US" sz="780" b="1" dirty="0">
+              <a:rPr lang="en-US" sz="1200" b="1" dirty="0">
                 <a:solidFill>
                   <a:srgbClr val="CC0000"/>
                 </a:solidFill>
               </a:rPr>
               <a:t>Temperature time series</a:t>
             </a:r>
-            <a:endParaRPr lang="en-US" sz="780" dirty="0"/>
+            <a:endParaRPr lang="en-US" sz="1200" dirty="0"/>
           </a:p>
         </p:txBody>
       </p:sp>
@@ -17001,7 +14265,7 @@
           <a:bodyPr/>
           <a:lstStyle/>
           <a:p>
-            <a:endParaRPr lang="en-US"/>
+            <a:endParaRPr lang="en-US" dirty="0"/>
           </a:p>
         </p:txBody>
       </p:sp>
@@ -17032,14 +14296,14 @@
               <a:buNone/>
             </a:pPr>
             <a:r>
-              <a:rPr lang="en-US" sz="780" dirty="0">
+              <a:rPr lang="en-US" sz="1200" dirty="0">
                 <a:solidFill>
                   <a:srgbClr val="111111"/>
                 </a:solidFill>
               </a:rPr>
               <a:t>slope, max, time above threshold</a:t>
             </a:r>
-            <a:endParaRPr lang="en-US" sz="780" dirty="0"/>
+            <a:endParaRPr lang="en-US" sz="1200" dirty="0"/>
           </a:p>
         </p:txBody>
       </p:sp>
@@ -17104,14 +14368,14 @@
               <a:buNone/>
             </a:pPr>
             <a:r>
-              <a:rPr lang="en-US" sz="780" dirty="0">
+              <a:rPr lang="en-US" sz="1200" dirty="0">
                 <a:solidFill>
                   <a:srgbClr val="111111"/>
                 </a:solidFill>
               </a:rPr>
               <a:t>Captures trend and thermal exposure</a:t>
             </a:r>
-            <a:endParaRPr lang="en-US" sz="780" dirty="0"/>
+            <a:endParaRPr lang="en-US" sz="1200" dirty="0"/>
           </a:p>
         </p:txBody>
       </p:sp>
@@ -17176,14 +14440,14 @@
               <a:buNone/>
             </a:pPr>
             <a:r>
-              <a:rPr lang="en-US" sz="780" b="1" dirty="0">
+              <a:rPr lang="en-US" sz="1200" b="1" dirty="0">
                 <a:solidFill>
                   <a:srgbClr val="CC0000"/>
                 </a:solidFill>
               </a:rPr>
               <a:t>Sensor signal</a:t>
             </a:r>
-            <a:endParaRPr lang="en-US" sz="780" dirty="0"/>
+            <a:endParaRPr lang="en-US" sz="1200" dirty="0"/>
           </a:p>
         </p:txBody>
       </p:sp>
@@ -17248,14 +14512,14 @@
               <a:buNone/>
             </a:pPr>
             <a:r>
-              <a:rPr lang="en-US" sz="780" dirty="0">
+              <a:rPr lang="en-US" sz="1200" dirty="0">
                 <a:solidFill>
                   <a:srgbClr val="111111"/>
                 </a:solidFill>
               </a:rPr>
               <a:t>rolling mean, variance, peak count</a:t>
             </a:r>
-            <a:endParaRPr lang="en-US" sz="780" dirty="0"/>
+            <a:endParaRPr lang="en-US" sz="1200" dirty="0"/>
           </a:p>
         </p:txBody>
       </p:sp>
@@ -17320,14 +14584,14 @@
               <a:buNone/>
             </a:pPr>
             <a:r>
-              <a:rPr lang="en-US" sz="780" dirty="0">
+              <a:rPr lang="en-US" sz="1200" dirty="0">
                 <a:solidFill>
                   <a:srgbClr val="111111"/>
                 </a:solidFill>
               </a:rPr>
               <a:t>Summarizes stability and abnormal variation</a:t>
             </a:r>
-            <a:endParaRPr lang="en-US" sz="780" dirty="0"/>
+            <a:endParaRPr lang="en-US" sz="1200" dirty="0"/>
           </a:p>
         </p:txBody>
       </p:sp>
@@ -17392,14 +14656,14 @@
               <a:buNone/>
             </a:pPr>
             <a:r>
-              <a:rPr lang="en-US" sz="780" b="1" dirty="0">
+              <a:rPr lang="en-US" sz="1200" b="1" dirty="0">
                 <a:solidFill>
                   <a:srgbClr val="CC0000"/>
                 </a:solidFill>
               </a:rPr>
               <a:t>Process settings</a:t>
             </a:r>
-            <a:endParaRPr lang="en-US" sz="780" dirty="0"/>
+            <a:endParaRPr lang="en-US" sz="1200" dirty="0"/>
           </a:p>
         </p:txBody>
       </p:sp>
@@ -17464,14 +14728,14 @@
               <a:buNone/>
             </a:pPr>
             <a:r>
-              <a:rPr lang="en-US" sz="780" dirty="0">
+              <a:rPr lang="en-US" sz="1200" dirty="0">
                 <a:solidFill>
                   <a:srgbClr val="111111"/>
                 </a:solidFill>
               </a:rPr>
               <a:t>distance from nominal setting</a:t>
             </a:r>
-            <a:endParaRPr lang="en-US" sz="780" dirty="0"/>
+            <a:endParaRPr lang="en-US" sz="1200" dirty="0"/>
           </a:p>
         </p:txBody>
       </p:sp>
@@ -17536,14 +14800,14 @@
               <a:buNone/>
             </a:pPr>
             <a:r>
-              <a:rPr lang="en-US" sz="780" dirty="0">
+              <a:rPr lang="en-US" sz="1200" dirty="0">
                 <a:solidFill>
                   <a:srgbClr val="111111"/>
                 </a:solidFill>
               </a:rPr>
               <a:t>Represents deviation from intended operation</a:t>
             </a:r>
-            <a:endParaRPr lang="en-US" sz="780" dirty="0"/>
+            <a:endParaRPr lang="en-US" sz="1200" dirty="0"/>
           </a:p>
         </p:txBody>
       </p:sp>
@@ -17608,14 +14872,14 @@
               <a:buNone/>
             </a:pPr>
             <a:r>
-              <a:rPr lang="en-US" sz="780" b="1" dirty="0">
+              <a:rPr lang="en-US" sz="1200" b="1" dirty="0">
                 <a:solidFill>
                   <a:srgbClr val="CC0000"/>
                 </a:solidFill>
               </a:rPr>
               <a:t>Student activity logs</a:t>
             </a:r>
-            <a:endParaRPr lang="en-US" sz="780" dirty="0"/>
+            <a:endParaRPr lang="en-US" sz="1200" dirty="0"/>
           </a:p>
         </p:txBody>
       </p:sp>
@@ -17680,14 +14944,14 @@
               <a:buNone/>
             </a:pPr>
             <a:r>
-              <a:rPr lang="en-US" sz="780" dirty="0">
+              <a:rPr lang="en-US" sz="1200" dirty="0">
                 <a:solidFill>
                   <a:srgbClr val="111111"/>
                 </a:solidFill>
               </a:rPr>
               <a:t>completion rate, delay, weekly activity</a:t>
             </a:r>
-            <a:endParaRPr lang="en-US" sz="780" dirty="0"/>
+            <a:endParaRPr lang="en-US" sz="1200" dirty="0"/>
           </a:p>
         </p:txBody>
       </p:sp>
@@ -17752,14 +15016,14 @@
               <a:buNone/>
             </a:pPr>
             <a:r>
-              <a:rPr lang="en-US" sz="780" dirty="0">
+              <a:rPr lang="en-US" sz="1200" dirty="0">
                 <a:solidFill>
                   <a:srgbClr val="111111"/>
                 </a:solidFill>
               </a:rPr>
               <a:t>Summarizes engagement over time</a:t>
             </a:r>
-            <a:endParaRPr lang="en-US" sz="780" dirty="0"/>
+            <a:endParaRPr lang="en-US" sz="1200" dirty="0"/>
           </a:p>
         </p:txBody>
       </p:sp>
@@ -17824,14 +15088,14 @@
               <a:buNone/>
             </a:pPr>
             <a:r>
-              <a:rPr lang="en-US" sz="780" b="1" dirty="0">
+              <a:rPr lang="en-US" sz="1200" b="1" dirty="0">
                 <a:solidFill>
                   <a:srgbClr val="CC0000"/>
                 </a:solidFill>
               </a:rPr>
               <a:t>Bioprocess trajectories</a:t>
             </a:r>
-            <a:endParaRPr lang="en-US" sz="780" dirty="0"/>
+            <a:endParaRPr lang="en-US" sz="1200" dirty="0"/>
           </a:p>
         </p:txBody>
       </p:sp>
@@ -17896,14 +15160,14 @@
               <a:buNone/>
             </a:pPr>
             <a:r>
-              <a:rPr lang="en-US" sz="780" dirty="0">
+              <a:rPr lang="en-US" sz="1200" dirty="0">
                 <a:solidFill>
                   <a:srgbClr val="111111"/>
                 </a:solidFill>
               </a:rPr>
               <a:t>area under curve, growth rate, final-initial change</a:t>
             </a:r>
-            <a:endParaRPr lang="en-US" sz="780" dirty="0"/>
+            <a:endParaRPr lang="en-US" sz="1200" dirty="0"/>
           </a:p>
         </p:txBody>
       </p:sp>
@@ -17968,14 +15232,14 @@
               <a:buNone/>
             </a:pPr>
             <a:r>
-              <a:rPr lang="en-US" sz="780" dirty="0">
+              <a:rPr lang="en-US" sz="1200" dirty="0">
                 <a:solidFill>
                   <a:srgbClr val="111111"/>
                 </a:solidFill>
               </a:rPr>
               <a:t>Captures dynamic process behavior</a:t>
             </a:r>
-            <a:endParaRPr lang="en-US" sz="780" dirty="0"/>
+            <a:endParaRPr lang="en-US" sz="1200" dirty="0"/>
           </a:p>
         </p:txBody>
       </p:sp>
@@ -18038,14 +15302,14 @@
               <a:buNone/>
             </a:pPr>
             <a:r>
-              <a:rPr lang="en-US" sz="820" b="1" dirty="0">
+              <a:rPr lang="en-US" sz="1200" b="1" dirty="0">
                 <a:solidFill>
                   <a:srgbClr val="CC0000"/>
                 </a:solidFill>
               </a:rPr>
               <a:t>Good features make the model inputs closer to how a domain expert reasons about the system.</a:t>
             </a:r>
-            <a:endParaRPr lang="en-US" sz="820" dirty="0"/>
+            <a:endParaRPr lang="en-US" sz="1200" dirty="0"/>
           </a:p>
         </p:txBody>
       </p:sp>
